--- a/exports/pptx/lessons/middle-module-09-subtraction-nikhilam/day-08-general-subtraction.pptx
+++ b/exports/pptx/lessons/middle-module-09-subtraction-nikhilam/day-08-general-subtraction.pptx
@@ -4978,8 +4978,8 @@
         </p:nvSpPr>
         <p:spPr>
           <a:xfrm>
-            <a:off x="634901" y="6744891"/>
-            <a:ext cx="8102798" cy="898922"/>
+            <a:off x="406301" y="5304086"/>
+            <a:ext cx="8498026" cy="213271"/>
           </a:xfrm>
           <a:prstGeom prst="rect">
             <a:avLst/>
@@ -4991,6 +4991,54 @@
           <a:bodyPr wrap="square" lIns="0" tIns="0" rIns="0" bIns="0" rtlCol="0" anchor="t"/>
           <a:lstStyle/>
           <a:p>
+            <a:pPr algn="l" indent="0" marL="0">
+              <a:lnSpc>
+                <a:spcPts val="1680"/>
+              </a:lnSpc>
+              <a:spcBef>
+                <a:spcPts val="300"/>
+              </a:spcBef>
+              <a:spcAft>
+                <a:spcPts val="300"/>
+              </a:spcAft>
+              <a:buNone/>
+            </a:pPr>
+            <a:r>
+              <a:rPr lang="en-US" sz="1200" i="1" dirty="0">
+                <a:solidFill>
+                  <a:srgbClr val="1C2833"/>
+                </a:solidFill>
+                <a:latin typeface="Arial" pitchFamily="34" charset="0"/>
+                <a:ea typeface="Arial" pitchFamily="34" charset="-122"/>
+                <a:cs typeface="Arial" pitchFamily="34" charset="-120"/>
+              </a:rPr>
+              <a:t>Each row: Problem · Base B · Complement · M − B · Add · Answer.</a:t>
+            </a:r>
+            <a:endParaRPr lang="en-US" sz="1200" dirty="0"/>
+          </a:p>
+        </p:txBody>
+      </p:sp>
+      <p:sp>
+        <p:nvSpPr>
+          <p:cNvPr id="21" name="Text 19"/>
+          <p:cNvSpPr/>
+          <p:nvPr/>
+        </p:nvSpPr>
+        <p:spPr>
+          <a:xfrm>
+            <a:off x="634901" y="5606207"/>
+            <a:ext cx="8102798" cy="1013222"/>
+          </a:xfrm>
+          <a:prstGeom prst="rect">
+            <a:avLst/>
+          </a:prstGeom>
+          <a:noFill/>
+          <a:ln/>
+        </p:spPr>
+        <p:txBody>
+          <a:bodyPr wrap="square" lIns="0" tIns="0" rIns="0" bIns="0" rtlCol="0" anchor="t"/>
+          <a:lstStyle/>
+          <a:p>
             <a:pPr algn="l" marL="342900" indent="-342900">
               <a:lnSpc>
                 <a:spcPts val="1620"/>
@@ -5010,6 +5058,284 @@
                 <a:ea typeface="Arial" pitchFamily="34" charset="-122"/>
                 <a:cs typeface="Arial" pitchFamily="34" charset="-120"/>
               </a:rPr>
+              <a:t>8243 − 567</a:t>
+            </a:r>
+            <a:pPr algn="l" indent="0" marL="0">
+              <a:lnSpc>
+                <a:spcPts val="1620"/>
+              </a:lnSpc>
+              <a:spcAft>
+                <a:spcPts val="300"/>
+              </a:spcAft>
+              <a:buNone/>
+            </a:pPr>
+            <a:r>
+              <a:rPr lang="en-US" sz="1200" dirty="0">
+                <a:solidFill>
+                  <a:srgbClr val="1C2833"/>
+                </a:solidFill>
+                <a:latin typeface="Arial" pitchFamily="34" charset="0"/>
+                <a:ea typeface="Arial" pitchFamily="34" charset="-122"/>
+                <a:cs typeface="Arial" pitchFamily="34" charset="-120"/>
+              </a:rPr>
+              <a:t> — 1000 · 433 · 7243 · 7243 + 433 · </a:t>
+            </a:r>
+            <a:pPr algn="l" indent="0" marL="0">
+              <a:lnSpc>
+                <a:spcPts val="1620"/>
+              </a:lnSpc>
+              <a:spcAft>
+                <a:spcPts val="300"/>
+              </a:spcAft>
+              <a:buNone/>
+            </a:pPr>
+            <a:r>
+              <a:rPr lang="en-US" sz="1200" b="1" dirty="0">
+                <a:solidFill>
+                  <a:srgbClr val="1C2833"/>
+                </a:solidFill>
+                <a:latin typeface="Arial" pitchFamily="34" charset="0"/>
+                <a:ea typeface="Arial" pitchFamily="34" charset="-122"/>
+                <a:cs typeface="Arial" pitchFamily="34" charset="-120"/>
+              </a:rPr>
+              <a:t>7676</a:t>
+            </a:r>
+            <a:endParaRPr lang="en-US" sz="1200" dirty="0"/>
+          </a:p>
+          <a:p>
+            <a:pPr algn="l" marL="342900" indent="-342900">
+              <a:lnSpc>
+                <a:spcPts val="1620"/>
+              </a:lnSpc>
+              <a:spcAft>
+                <a:spcPts val="300"/>
+              </a:spcAft>
+              <a:buSzPct val="100000"/>
+              <a:buChar char="•"/>
+            </a:pPr>
+            <a:r>
+              <a:rPr lang="en-US" sz="1200" b="1" dirty="0">
+                <a:solidFill>
+                  <a:srgbClr val="1C2833"/>
+                </a:solidFill>
+                <a:latin typeface="Arial" pitchFamily="34" charset="0"/>
+                <a:ea typeface="Arial" pitchFamily="34" charset="-122"/>
+                <a:cs typeface="Arial" pitchFamily="34" charset="-120"/>
+              </a:rPr>
+              <a:t>5172 − 89</a:t>
+            </a:r>
+            <a:pPr algn="l" indent="0" marL="0">
+              <a:lnSpc>
+                <a:spcPts val="1620"/>
+              </a:lnSpc>
+              <a:spcAft>
+                <a:spcPts val="300"/>
+              </a:spcAft>
+              <a:buNone/>
+            </a:pPr>
+            <a:r>
+              <a:rPr lang="en-US" sz="1200" dirty="0">
+                <a:solidFill>
+                  <a:srgbClr val="1C2833"/>
+                </a:solidFill>
+                <a:latin typeface="Arial" pitchFamily="34" charset="0"/>
+                <a:ea typeface="Arial" pitchFamily="34" charset="-122"/>
+                <a:cs typeface="Arial" pitchFamily="34" charset="-120"/>
+              </a:rPr>
+              <a:t> — 100 · 11 · 5072 · 5072 + 11 · </a:t>
+            </a:r>
+            <a:pPr algn="l" indent="0" marL="0">
+              <a:lnSpc>
+                <a:spcPts val="1620"/>
+              </a:lnSpc>
+              <a:spcAft>
+                <a:spcPts val="300"/>
+              </a:spcAft>
+              <a:buNone/>
+            </a:pPr>
+            <a:r>
+              <a:rPr lang="en-US" sz="1200" b="1" dirty="0">
+                <a:solidFill>
+                  <a:srgbClr val="1C2833"/>
+                </a:solidFill>
+                <a:latin typeface="Arial" pitchFamily="34" charset="0"/>
+                <a:ea typeface="Arial" pitchFamily="34" charset="-122"/>
+                <a:cs typeface="Arial" pitchFamily="34" charset="-120"/>
+              </a:rPr>
+              <a:t>5083</a:t>
+            </a:r>
+            <a:endParaRPr lang="en-US" sz="1200" dirty="0"/>
+          </a:p>
+          <a:p>
+            <a:pPr algn="l" marL="342900" indent="-342900">
+              <a:lnSpc>
+                <a:spcPts val="1620"/>
+              </a:lnSpc>
+              <a:spcAft>
+                <a:spcPts val="300"/>
+              </a:spcAft>
+              <a:buSzPct val="100000"/>
+              <a:buChar char="•"/>
+            </a:pPr>
+            <a:r>
+              <a:rPr lang="en-US" sz="1200" b="1" dirty="0">
+                <a:solidFill>
+                  <a:srgbClr val="1C2833"/>
+                </a:solidFill>
+                <a:latin typeface="Arial" pitchFamily="34" charset="0"/>
+                <a:ea typeface="Arial" pitchFamily="34" charset="-122"/>
+                <a:cs typeface="Arial" pitchFamily="34" charset="-120"/>
+              </a:rPr>
+              <a:t>6300 − 248</a:t>
+            </a:r>
+            <a:pPr algn="l" indent="0" marL="0">
+              <a:lnSpc>
+                <a:spcPts val="1620"/>
+              </a:lnSpc>
+              <a:spcAft>
+                <a:spcPts val="300"/>
+              </a:spcAft>
+              <a:buNone/>
+            </a:pPr>
+            <a:r>
+              <a:rPr lang="en-US" sz="1200" dirty="0">
+                <a:solidFill>
+                  <a:srgbClr val="1C2833"/>
+                </a:solidFill>
+                <a:latin typeface="Arial" pitchFamily="34" charset="0"/>
+                <a:ea typeface="Arial" pitchFamily="34" charset="-122"/>
+                <a:cs typeface="Arial" pitchFamily="34" charset="-120"/>
+              </a:rPr>
+              <a:t> — 1000 · 752 · 5300 · 5300 + 752 · </a:t>
+            </a:r>
+            <a:pPr algn="l" indent="0" marL="0">
+              <a:lnSpc>
+                <a:spcPts val="1620"/>
+              </a:lnSpc>
+              <a:spcAft>
+                <a:spcPts val="300"/>
+              </a:spcAft>
+              <a:buNone/>
+            </a:pPr>
+            <a:r>
+              <a:rPr lang="en-US" sz="1200" b="1" dirty="0">
+                <a:solidFill>
+                  <a:srgbClr val="1C2833"/>
+                </a:solidFill>
+                <a:latin typeface="Arial" pitchFamily="34" charset="0"/>
+                <a:ea typeface="Arial" pitchFamily="34" charset="-122"/>
+                <a:cs typeface="Arial" pitchFamily="34" charset="-120"/>
+              </a:rPr>
+              <a:t>6052</a:t>
+            </a:r>
+            <a:endParaRPr lang="en-US" sz="1200" dirty="0"/>
+          </a:p>
+          <a:p>
+            <a:pPr algn="l" marL="342900" indent="-342900">
+              <a:lnSpc>
+                <a:spcPts val="1620"/>
+              </a:lnSpc>
+              <a:spcAft>
+                <a:spcPts val="300"/>
+              </a:spcAft>
+              <a:buSzPct val="100000"/>
+              <a:buChar char="•"/>
+            </a:pPr>
+            <a:r>
+              <a:rPr lang="en-US" sz="1200" b="1" dirty="0">
+                <a:solidFill>
+                  <a:srgbClr val="1C2833"/>
+                </a:solidFill>
+                <a:latin typeface="Arial" pitchFamily="34" charset="0"/>
+                <a:ea typeface="Arial" pitchFamily="34" charset="-122"/>
+                <a:cs typeface="Arial" pitchFamily="34" charset="-120"/>
+              </a:rPr>
+              <a:t>12 000 − 4 567</a:t>
+            </a:r>
+            <a:pPr algn="l" indent="0" marL="0">
+              <a:lnSpc>
+                <a:spcPts val="1620"/>
+              </a:lnSpc>
+              <a:spcAft>
+                <a:spcPts val="300"/>
+              </a:spcAft>
+              <a:buNone/>
+            </a:pPr>
+            <a:r>
+              <a:rPr lang="en-US" sz="1200" dirty="0">
+                <a:solidFill>
+                  <a:srgbClr val="1C2833"/>
+                </a:solidFill>
+                <a:latin typeface="Arial" pitchFamily="34" charset="0"/>
+                <a:ea typeface="Arial" pitchFamily="34" charset="-122"/>
+                <a:cs typeface="Arial" pitchFamily="34" charset="-120"/>
+              </a:rPr>
+              <a:t> — 10 000 · 5 433 · 2 000 · 2 000 + 5 433 · </a:t>
+            </a:r>
+            <a:pPr algn="l" indent="0" marL="0">
+              <a:lnSpc>
+                <a:spcPts val="1620"/>
+              </a:lnSpc>
+              <a:spcAft>
+                <a:spcPts val="300"/>
+              </a:spcAft>
+              <a:buNone/>
+            </a:pPr>
+            <a:r>
+              <a:rPr lang="en-US" sz="1200" b="1" dirty="0">
+                <a:solidFill>
+                  <a:srgbClr val="1C2833"/>
+                </a:solidFill>
+                <a:latin typeface="Arial" pitchFamily="34" charset="0"/>
+                <a:ea typeface="Arial" pitchFamily="34" charset="-122"/>
+                <a:cs typeface="Arial" pitchFamily="34" charset="-120"/>
+              </a:rPr>
+              <a:t>7 433</a:t>
+            </a:r>
+            <a:endParaRPr lang="en-US" sz="1200" dirty="0"/>
+          </a:p>
+        </p:txBody>
+      </p:sp>
+      <p:sp>
+        <p:nvSpPr>
+          <p:cNvPr id="22" name="Text 20"/>
+          <p:cNvSpPr/>
+          <p:nvPr/>
+        </p:nvSpPr>
+        <p:spPr>
+          <a:xfrm>
+            <a:off x="634901" y="6720929"/>
+            <a:ext cx="8102798" cy="898922"/>
+          </a:xfrm>
+          <a:prstGeom prst="rect">
+            <a:avLst/>
+          </a:prstGeom>
+          <a:noFill/>
+          <a:ln/>
+        </p:spPr>
+        <p:txBody>
+          <a:bodyPr wrap="square" lIns="0" tIns="0" rIns="0" bIns="0" rtlCol="0" anchor="t"/>
+          <a:lstStyle/>
+          <a:p>
+            <a:pPr algn="l" marL="342900" indent="-342900">
+              <a:lnSpc>
+                <a:spcPts val="1620"/>
+              </a:lnSpc>
+              <a:spcAft>
+                <a:spcPts val="300"/>
+              </a:spcAft>
+              <a:buSzPct val="100000"/>
+              <a:buChar char="•"/>
+            </a:pPr>
+            <a:r>
+              <a:rPr lang="en-US" sz="1200" b="1" dirty="0">
+                <a:solidFill>
+                  <a:srgbClr val="1C2833"/>
+                </a:solidFill>
+                <a:latin typeface="Arial" pitchFamily="34" charset="0"/>
+                <a:ea typeface="Arial" pitchFamily="34" charset="-122"/>
+                <a:cs typeface="Arial" pitchFamily="34" charset="-120"/>
+              </a:rPr>
               <a:t>When is this faster than standard borrowing?</a:t>
             </a:r>
             <a:pPr algn="l" indent="0" marL="0">
@@ -5058,13 +5384,13 @@
       </p:sp>
       <p:sp>
         <p:nvSpPr>
-          <p:cNvPr id="21" name="Text 19"/>
-          <p:cNvSpPr/>
-          <p:nvPr/>
-        </p:nvSpPr>
-        <p:spPr>
-          <a:xfrm>
-            <a:off x="406301" y="7808863"/>
+          <p:cNvPr id="23" name="Text 21"/>
+          <p:cNvSpPr/>
+          <p:nvPr/>
+        </p:nvSpPr>
+        <p:spPr>
+          <a:xfrm>
+            <a:off x="406301" y="7784902"/>
             <a:ext cx="8498026" cy="213271"/>
           </a:xfrm>
           <a:prstGeom prst="rect">

--- a/exports/pptx/lessons/middle-module-09-subtraction-nikhilam/day-08-general-subtraction.pptx
+++ b/exports/pptx/lessons/middle-module-09-subtraction-nikhilam/day-08-general-subtraction.pptx
@@ -17,9 +17,15 @@
     <p:sldId id="265" r:id="rId11"/>
     <p:sldId id="266" r:id="rId12"/>
     <p:sldId id="267" r:id="rId13"/>
+    <p:sldId id="268" r:id="rId14"/>
+    <p:sldId id="269" r:id="rId15"/>
+    <p:sldId id="270" r:id="rId16"/>
+    <p:sldId id="271" r:id="rId17"/>
+    <p:sldId id="272" r:id="rId18"/>
+    <p:sldId id="273" r:id="rId19"/>
   </p:sldIdLst>
   <p:notesMasterIdLst>
-    <p:notesMasterId r:id="rId14"/>
+    <p:notesMasterId r:id="rId20"/>
   </p:notesMasterIdLst>
   <p:sldSz cx="9144000" cy="5143500"/>
   <p:notesSz cx="5143500" cy="9144000"/>
@@ -801,6 +807,534 @@
             <a:fld id="{F7021451-1387-4CA6-816F-3879F97B5CBC}" type="slidenum">
               <a:rPr lang="en-US"/>
               <a:t>12</a:t>
+            </a:fld>
+            <a:endParaRPr lang="en-US"/>
+          </a:p>
+        </p:txBody>
+      </p:sp>
+    </p:spTree>
+    <p:extLst>
+      <p:ext uri="{BB962C8B-B14F-4D97-AF65-F5344CB8AC3E}">
+        <p14:creationId xmlns:p14="http://schemas.microsoft.com/office/powerpoint/2010/main" val="1024086991"/>
+      </p:ext>
+    </p:extLst>
+  </p:cSld>
+  <p:clrMapOvr>
+    <a:masterClrMapping/>
+  </p:clrMapOvr>
+</p:notes>
+</file>
+
+<file path=ppt/notesSlides/notesSlide13.xml><?xml version="1.0" encoding="utf-8"?>
+<p:notes xmlns:a="http://schemas.openxmlformats.org/drawingml/2006/main" xmlns:r="http://schemas.openxmlformats.org/officeDocument/2006/relationships" xmlns:p="http://schemas.openxmlformats.org/presentationml/2006/main">
+  <p:cSld>
+    <p:spTree>
+      <p:nvGrpSpPr>
+        <p:cNvPr id="1" name=""/>
+        <p:cNvGrpSpPr/>
+        <p:nvPr/>
+      </p:nvGrpSpPr>
+      <p:grpSpPr>
+        <a:xfrm>
+          <a:off x="0" y="0"/>
+          <a:ext cx="0" cy="0"/>
+          <a:chOff x="0" y="0"/>
+          <a:chExt cx="0" cy="0"/>
+        </a:xfrm>
+      </p:grpSpPr>
+      <p:sp>
+        <p:nvSpPr>
+          <p:cNvPr id="2" name="Slide Image Placeholder 1"/>
+          <p:cNvSpPr>
+            <a:spLocks noGrp="1" noRot="1" noChangeAspect="1"/>
+          </p:cNvSpPr>
+          <p:nvPr>
+            <p:ph type="sldImg"/>
+          </p:nvPr>
+        </p:nvSpPr>
+        <p:spPr/>
+      </p:sp>
+      <p:sp>
+        <p:nvSpPr>
+          <p:cNvPr id="3" name="Notes Placeholder 2"/>
+          <p:cNvSpPr>
+            <a:spLocks noGrp="1"/>
+          </p:cNvSpPr>
+          <p:nvPr>
+            <p:ph type="body" idx="1"/>
+          </p:nvPr>
+        </p:nvSpPr>
+        <p:spPr/>
+        <p:txBody>
+          <a:bodyPr/>
+          <a:lstStyle/>
+          <a:p>
+            <a:r>
+              <a:rPr lang="en-US" dirty="0"/>
+              <a:t/>
+            </a:r>
+            <a:endParaRPr lang="en-US" dirty="0"/>
+          </a:p>
+        </p:txBody>
+      </p:sp>
+      <p:sp>
+        <p:nvSpPr>
+          <p:cNvPr id="4" name="Slide Number Placeholder 3"/>
+          <p:cNvSpPr>
+            <a:spLocks noGrp="1"/>
+          </p:cNvSpPr>
+          <p:nvPr>
+            <p:ph type="sldNum" sz="quarter" idx="10"/>
+          </p:nvPr>
+        </p:nvSpPr>
+        <p:spPr/>
+        <p:txBody>
+          <a:bodyPr/>
+          <a:lstStyle/>
+          <a:p>
+            <a:fld id="{F7021451-1387-4CA6-816F-3879F97B5CBC}" type="slidenum">
+              <a:rPr lang="en-US"/>
+              <a:t>13</a:t>
+            </a:fld>
+            <a:endParaRPr lang="en-US"/>
+          </a:p>
+        </p:txBody>
+      </p:sp>
+    </p:spTree>
+    <p:extLst>
+      <p:ext uri="{BB962C8B-B14F-4D97-AF65-F5344CB8AC3E}">
+        <p14:creationId xmlns:p14="http://schemas.microsoft.com/office/powerpoint/2010/main" val="1024086991"/>
+      </p:ext>
+    </p:extLst>
+  </p:cSld>
+  <p:clrMapOvr>
+    <a:masterClrMapping/>
+  </p:clrMapOvr>
+</p:notes>
+</file>
+
+<file path=ppt/notesSlides/notesSlide14.xml><?xml version="1.0" encoding="utf-8"?>
+<p:notes xmlns:a="http://schemas.openxmlformats.org/drawingml/2006/main" xmlns:r="http://schemas.openxmlformats.org/officeDocument/2006/relationships" xmlns:p="http://schemas.openxmlformats.org/presentationml/2006/main">
+  <p:cSld>
+    <p:spTree>
+      <p:nvGrpSpPr>
+        <p:cNvPr id="1" name=""/>
+        <p:cNvGrpSpPr/>
+        <p:nvPr/>
+      </p:nvGrpSpPr>
+      <p:grpSpPr>
+        <a:xfrm>
+          <a:off x="0" y="0"/>
+          <a:ext cx="0" cy="0"/>
+          <a:chOff x="0" y="0"/>
+          <a:chExt cx="0" cy="0"/>
+        </a:xfrm>
+      </p:grpSpPr>
+      <p:sp>
+        <p:nvSpPr>
+          <p:cNvPr id="2" name="Slide Image Placeholder 1"/>
+          <p:cNvSpPr>
+            <a:spLocks noGrp="1" noRot="1" noChangeAspect="1"/>
+          </p:cNvSpPr>
+          <p:nvPr>
+            <p:ph type="sldImg"/>
+          </p:nvPr>
+        </p:nvSpPr>
+        <p:spPr/>
+      </p:sp>
+      <p:sp>
+        <p:nvSpPr>
+          <p:cNvPr id="3" name="Notes Placeholder 2"/>
+          <p:cNvSpPr>
+            <a:spLocks noGrp="1"/>
+          </p:cNvSpPr>
+          <p:nvPr>
+            <p:ph type="body" idx="1"/>
+          </p:nvPr>
+        </p:nvSpPr>
+        <p:spPr/>
+        <p:txBody>
+          <a:bodyPr/>
+          <a:lstStyle/>
+          <a:p>
+            <a:r>
+              <a:rPr lang="en-US" dirty="0"/>
+              <a:t/>
+            </a:r>
+            <a:endParaRPr lang="en-US" dirty="0"/>
+          </a:p>
+        </p:txBody>
+      </p:sp>
+      <p:sp>
+        <p:nvSpPr>
+          <p:cNvPr id="4" name="Slide Number Placeholder 3"/>
+          <p:cNvSpPr>
+            <a:spLocks noGrp="1"/>
+          </p:cNvSpPr>
+          <p:nvPr>
+            <p:ph type="sldNum" sz="quarter" idx="10"/>
+          </p:nvPr>
+        </p:nvSpPr>
+        <p:spPr/>
+        <p:txBody>
+          <a:bodyPr/>
+          <a:lstStyle/>
+          <a:p>
+            <a:fld id="{F7021451-1387-4CA6-816F-3879F97B5CBC}" type="slidenum">
+              <a:rPr lang="en-US"/>
+              <a:t>14</a:t>
+            </a:fld>
+            <a:endParaRPr lang="en-US"/>
+          </a:p>
+        </p:txBody>
+      </p:sp>
+    </p:spTree>
+    <p:extLst>
+      <p:ext uri="{BB962C8B-B14F-4D97-AF65-F5344CB8AC3E}">
+        <p14:creationId xmlns:p14="http://schemas.microsoft.com/office/powerpoint/2010/main" val="1024086991"/>
+      </p:ext>
+    </p:extLst>
+  </p:cSld>
+  <p:clrMapOvr>
+    <a:masterClrMapping/>
+  </p:clrMapOvr>
+</p:notes>
+</file>
+
+<file path=ppt/notesSlides/notesSlide15.xml><?xml version="1.0" encoding="utf-8"?>
+<p:notes xmlns:a="http://schemas.openxmlformats.org/drawingml/2006/main" xmlns:r="http://schemas.openxmlformats.org/officeDocument/2006/relationships" xmlns:p="http://schemas.openxmlformats.org/presentationml/2006/main">
+  <p:cSld>
+    <p:spTree>
+      <p:nvGrpSpPr>
+        <p:cNvPr id="1" name=""/>
+        <p:cNvGrpSpPr/>
+        <p:nvPr/>
+      </p:nvGrpSpPr>
+      <p:grpSpPr>
+        <a:xfrm>
+          <a:off x="0" y="0"/>
+          <a:ext cx="0" cy="0"/>
+          <a:chOff x="0" y="0"/>
+          <a:chExt cx="0" cy="0"/>
+        </a:xfrm>
+      </p:grpSpPr>
+      <p:sp>
+        <p:nvSpPr>
+          <p:cNvPr id="2" name="Slide Image Placeholder 1"/>
+          <p:cNvSpPr>
+            <a:spLocks noGrp="1" noRot="1" noChangeAspect="1"/>
+          </p:cNvSpPr>
+          <p:nvPr>
+            <p:ph type="sldImg"/>
+          </p:nvPr>
+        </p:nvSpPr>
+        <p:spPr/>
+      </p:sp>
+      <p:sp>
+        <p:nvSpPr>
+          <p:cNvPr id="3" name="Notes Placeholder 2"/>
+          <p:cNvSpPr>
+            <a:spLocks noGrp="1"/>
+          </p:cNvSpPr>
+          <p:nvPr>
+            <p:ph type="body" idx="1"/>
+          </p:nvPr>
+        </p:nvSpPr>
+        <p:spPr/>
+        <p:txBody>
+          <a:bodyPr/>
+          <a:lstStyle/>
+          <a:p>
+            <a:r>
+              <a:rPr lang="en-US" dirty="0"/>
+              <a:t/>
+            </a:r>
+            <a:endParaRPr lang="en-US" dirty="0"/>
+          </a:p>
+        </p:txBody>
+      </p:sp>
+      <p:sp>
+        <p:nvSpPr>
+          <p:cNvPr id="4" name="Slide Number Placeholder 3"/>
+          <p:cNvSpPr>
+            <a:spLocks noGrp="1"/>
+          </p:cNvSpPr>
+          <p:nvPr>
+            <p:ph type="sldNum" sz="quarter" idx="10"/>
+          </p:nvPr>
+        </p:nvSpPr>
+        <p:spPr/>
+        <p:txBody>
+          <a:bodyPr/>
+          <a:lstStyle/>
+          <a:p>
+            <a:fld id="{F7021451-1387-4CA6-816F-3879F97B5CBC}" type="slidenum">
+              <a:rPr lang="en-US"/>
+              <a:t>15</a:t>
+            </a:fld>
+            <a:endParaRPr lang="en-US"/>
+          </a:p>
+        </p:txBody>
+      </p:sp>
+    </p:spTree>
+    <p:extLst>
+      <p:ext uri="{BB962C8B-B14F-4D97-AF65-F5344CB8AC3E}">
+        <p14:creationId xmlns:p14="http://schemas.microsoft.com/office/powerpoint/2010/main" val="1024086991"/>
+      </p:ext>
+    </p:extLst>
+  </p:cSld>
+  <p:clrMapOvr>
+    <a:masterClrMapping/>
+  </p:clrMapOvr>
+</p:notes>
+</file>
+
+<file path=ppt/notesSlides/notesSlide16.xml><?xml version="1.0" encoding="utf-8"?>
+<p:notes xmlns:a="http://schemas.openxmlformats.org/drawingml/2006/main" xmlns:r="http://schemas.openxmlformats.org/officeDocument/2006/relationships" xmlns:p="http://schemas.openxmlformats.org/presentationml/2006/main">
+  <p:cSld>
+    <p:spTree>
+      <p:nvGrpSpPr>
+        <p:cNvPr id="1" name=""/>
+        <p:cNvGrpSpPr/>
+        <p:nvPr/>
+      </p:nvGrpSpPr>
+      <p:grpSpPr>
+        <a:xfrm>
+          <a:off x="0" y="0"/>
+          <a:ext cx="0" cy="0"/>
+          <a:chOff x="0" y="0"/>
+          <a:chExt cx="0" cy="0"/>
+        </a:xfrm>
+      </p:grpSpPr>
+      <p:sp>
+        <p:nvSpPr>
+          <p:cNvPr id="2" name="Slide Image Placeholder 1"/>
+          <p:cNvSpPr>
+            <a:spLocks noGrp="1" noRot="1" noChangeAspect="1"/>
+          </p:cNvSpPr>
+          <p:nvPr>
+            <p:ph type="sldImg"/>
+          </p:nvPr>
+        </p:nvSpPr>
+        <p:spPr/>
+      </p:sp>
+      <p:sp>
+        <p:nvSpPr>
+          <p:cNvPr id="3" name="Notes Placeholder 2"/>
+          <p:cNvSpPr>
+            <a:spLocks noGrp="1"/>
+          </p:cNvSpPr>
+          <p:nvPr>
+            <p:ph type="body" idx="1"/>
+          </p:nvPr>
+        </p:nvSpPr>
+        <p:spPr/>
+        <p:txBody>
+          <a:bodyPr/>
+          <a:lstStyle/>
+          <a:p>
+            <a:r>
+              <a:rPr lang="en-US" dirty="0"/>
+              <a:t/>
+            </a:r>
+            <a:endParaRPr lang="en-US" dirty="0"/>
+          </a:p>
+        </p:txBody>
+      </p:sp>
+      <p:sp>
+        <p:nvSpPr>
+          <p:cNvPr id="4" name="Slide Number Placeholder 3"/>
+          <p:cNvSpPr>
+            <a:spLocks noGrp="1"/>
+          </p:cNvSpPr>
+          <p:nvPr>
+            <p:ph type="sldNum" sz="quarter" idx="10"/>
+          </p:nvPr>
+        </p:nvSpPr>
+        <p:spPr/>
+        <p:txBody>
+          <a:bodyPr/>
+          <a:lstStyle/>
+          <a:p>
+            <a:fld id="{F7021451-1387-4CA6-816F-3879F97B5CBC}" type="slidenum">
+              <a:rPr lang="en-US"/>
+              <a:t>16</a:t>
+            </a:fld>
+            <a:endParaRPr lang="en-US"/>
+          </a:p>
+        </p:txBody>
+      </p:sp>
+    </p:spTree>
+    <p:extLst>
+      <p:ext uri="{BB962C8B-B14F-4D97-AF65-F5344CB8AC3E}">
+        <p14:creationId xmlns:p14="http://schemas.microsoft.com/office/powerpoint/2010/main" val="1024086991"/>
+      </p:ext>
+    </p:extLst>
+  </p:cSld>
+  <p:clrMapOvr>
+    <a:masterClrMapping/>
+  </p:clrMapOvr>
+</p:notes>
+</file>
+
+<file path=ppt/notesSlides/notesSlide17.xml><?xml version="1.0" encoding="utf-8"?>
+<p:notes xmlns:a="http://schemas.openxmlformats.org/drawingml/2006/main" xmlns:r="http://schemas.openxmlformats.org/officeDocument/2006/relationships" xmlns:p="http://schemas.openxmlformats.org/presentationml/2006/main">
+  <p:cSld>
+    <p:spTree>
+      <p:nvGrpSpPr>
+        <p:cNvPr id="1" name=""/>
+        <p:cNvGrpSpPr/>
+        <p:nvPr/>
+      </p:nvGrpSpPr>
+      <p:grpSpPr>
+        <a:xfrm>
+          <a:off x="0" y="0"/>
+          <a:ext cx="0" cy="0"/>
+          <a:chOff x="0" y="0"/>
+          <a:chExt cx="0" cy="0"/>
+        </a:xfrm>
+      </p:grpSpPr>
+      <p:sp>
+        <p:nvSpPr>
+          <p:cNvPr id="2" name="Slide Image Placeholder 1"/>
+          <p:cNvSpPr>
+            <a:spLocks noGrp="1" noRot="1" noChangeAspect="1"/>
+          </p:cNvSpPr>
+          <p:nvPr>
+            <p:ph type="sldImg"/>
+          </p:nvPr>
+        </p:nvSpPr>
+        <p:spPr/>
+      </p:sp>
+      <p:sp>
+        <p:nvSpPr>
+          <p:cNvPr id="3" name="Notes Placeholder 2"/>
+          <p:cNvSpPr>
+            <a:spLocks noGrp="1"/>
+          </p:cNvSpPr>
+          <p:nvPr>
+            <p:ph type="body" idx="1"/>
+          </p:nvPr>
+        </p:nvSpPr>
+        <p:spPr/>
+        <p:txBody>
+          <a:bodyPr/>
+          <a:lstStyle/>
+          <a:p>
+            <a:r>
+              <a:rPr lang="en-US" dirty="0"/>
+              <a:t/>
+            </a:r>
+            <a:endParaRPr lang="en-US" dirty="0"/>
+          </a:p>
+        </p:txBody>
+      </p:sp>
+      <p:sp>
+        <p:nvSpPr>
+          <p:cNvPr id="4" name="Slide Number Placeholder 3"/>
+          <p:cNvSpPr>
+            <a:spLocks noGrp="1"/>
+          </p:cNvSpPr>
+          <p:nvPr>
+            <p:ph type="sldNum" sz="quarter" idx="10"/>
+          </p:nvPr>
+        </p:nvSpPr>
+        <p:spPr/>
+        <p:txBody>
+          <a:bodyPr/>
+          <a:lstStyle/>
+          <a:p>
+            <a:fld id="{F7021451-1387-4CA6-816F-3879F97B5CBC}" type="slidenum">
+              <a:rPr lang="en-US"/>
+              <a:t>17</a:t>
+            </a:fld>
+            <a:endParaRPr lang="en-US"/>
+          </a:p>
+        </p:txBody>
+      </p:sp>
+    </p:spTree>
+    <p:extLst>
+      <p:ext uri="{BB962C8B-B14F-4D97-AF65-F5344CB8AC3E}">
+        <p14:creationId xmlns:p14="http://schemas.microsoft.com/office/powerpoint/2010/main" val="1024086991"/>
+      </p:ext>
+    </p:extLst>
+  </p:cSld>
+  <p:clrMapOvr>
+    <a:masterClrMapping/>
+  </p:clrMapOvr>
+</p:notes>
+</file>
+
+<file path=ppt/notesSlides/notesSlide18.xml><?xml version="1.0" encoding="utf-8"?>
+<p:notes xmlns:a="http://schemas.openxmlformats.org/drawingml/2006/main" xmlns:r="http://schemas.openxmlformats.org/officeDocument/2006/relationships" xmlns:p="http://schemas.openxmlformats.org/presentationml/2006/main">
+  <p:cSld>
+    <p:spTree>
+      <p:nvGrpSpPr>
+        <p:cNvPr id="1" name=""/>
+        <p:cNvGrpSpPr/>
+        <p:nvPr/>
+      </p:nvGrpSpPr>
+      <p:grpSpPr>
+        <a:xfrm>
+          <a:off x="0" y="0"/>
+          <a:ext cx="0" cy="0"/>
+          <a:chOff x="0" y="0"/>
+          <a:chExt cx="0" cy="0"/>
+        </a:xfrm>
+      </p:grpSpPr>
+      <p:sp>
+        <p:nvSpPr>
+          <p:cNvPr id="2" name="Slide Image Placeholder 1"/>
+          <p:cNvSpPr>
+            <a:spLocks noGrp="1" noRot="1" noChangeAspect="1"/>
+          </p:cNvSpPr>
+          <p:nvPr>
+            <p:ph type="sldImg"/>
+          </p:nvPr>
+        </p:nvSpPr>
+        <p:spPr/>
+      </p:sp>
+      <p:sp>
+        <p:nvSpPr>
+          <p:cNvPr id="3" name="Notes Placeholder 2"/>
+          <p:cNvSpPr>
+            <a:spLocks noGrp="1"/>
+          </p:cNvSpPr>
+          <p:nvPr>
+            <p:ph type="body" idx="1"/>
+          </p:nvPr>
+        </p:nvSpPr>
+        <p:spPr/>
+        <p:txBody>
+          <a:bodyPr/>
+          <a:lstStyle/>
+          <a:p>
+            <a:r>
+              <a:rPr lang="en-US" dirty="0"/>
+              <a:t/>
+            </a:r>
+            <a:endParaRPr lang="en-US" dirty="0"/>
+          </a:p>
+        </p:txBody>
+      </p:sp>
+      <p:sp>
+        <p:nvSpPr>
+          <p:cNvPr id="4" name="Slide Number Placeholder 3"/>
+          <p:cNvSpPr>
+            <a:spLocks noGrp="1"/>
+          </p:cNvSpPr>
+          <p:nvPr>
+            <p:ph type="sldNum" sz="quarter" idx="10"/>
+          </p:nvPr>
+        </p:nvSpPr>
+        <p:spPr/>
+        <p:txBody>
+          <a:bodyPr/>
+          <a:lstStyle/>
+          <a:p>
+            <a:fld id="{F7021451-1387-4CA6-816F-3879F97B5CBC}" type="slidenum">
+              <a:rPr lang="en-US"/>
+              <a:t>18</a:t>
             </a:fld>
             <a:endParaRPr lang="en-US"/>
           </a:p>
@@ -2100,148 +2634,6 @@
         </p:nvSpPr>
         <p:spPr>
           <a:xfrm>
-            <a:off x="406301" y="1223963"/>
-            <a:ext cx="8498026" cy="274290"/>
-          </a:xfrm>
-          <a:prstGeom prst="rect">
-            <a:avLst/>
-          </a:prstGeom>
-          <a:noFill/>
-          <a:ln/>
-        </p:spPr>
-        <p:txBody>
-          <a:bodyPr wrap="square" lIns="0" tIns="0" rIns="0" bIns="0" rtlCol="0" anchor="t"/>
-          <a:lstStyle/>
-          <a:p>
-            <a:pPr algn="l" indent="0" marL="0">
-              <a:lnSpc>
-                <a:spcPts val="2160"/>
-              </a:lnSpc>
-              <a:spcBef>
-                <a:spcPts val="600"/>
-              </a:spcBef>
-              <a:spcAft>
-                <a:spcPts val="800"/>
-              </a:spcAft>
-              <a:buNone/>
-            </a:pPr>
-            <a:r>
-              <a:rPr lang="en-US" sz="1800" b="1" dirty="0">
-                <a:solidFill>
-                  <a:srgbClr val="FE4447"/>
-                </a:solidFill>
-                <a:latin typeface="Georgia" pitchFamily="34" charset="0"/>
-                <a:ea typeface="Georgia" pitchFamily="34" charset="-122"/>
-                <a:cs typeface="Georgia" pitchFamily="34" charset="-120"/>
-              </a:rPr>
-              <a:t>Learning objective</a:t>
-            </a:r>
-            <a:endParaRPr lang="en-US" sz="1800" dirty="0"/>
-          </a:p>
-        </p:txBody>
-      </p:sp>
-      <p:sp>
-        <p:nvSpPr>
-          <p:cNvPr id="6" name="Text 4"/>
-          <p:cNvSpPr/>
-          <p:nvPr/>
-        </p:nvSpPr>
-        <p:spPr>
-          <a:xfrm>
-            <a:off x="406301" y="1637854"/>
-            <a:ext cx="8498026" cy="639812"/>
-          </a:xfrm>
-          <a:prstGeom prst="rect">
-            <a:avLst/>
-          </a:prstGeom>
-          <a:noFill/>
-          <a:ln/>
-        </p:spPr>
-        <p:txBody>
-          <a:bodyPr wrap="square" lIns="0" tIns="0" rIns="0" bIns="0" rtlCol="0" anchor="t"/>
-          <a:lstStyle/>
-          <a:p>
-            <a:pPr algn="l" indent="0" marL="0">
-              <a:lnSpc>
-                <a:spcPts val="1680"/>
-              </a:lnSpc>
-              <a:spcBef>
-                <a:spcPts val="300"/>
-              </a:spcBef>
-              <a:spcAft>
-                <a:spcPts val="300"/>
-              </a:spcAft>
-              <a:buNone/>
-            </a:pPr>
-            <a:r>
-              <a:rPr lang="en-US" sz="1200" dirty="0">
-                <a:solidFill>
-                  <a:srgbClr val="1C2833"/>
-                </a:solidFill>
-                <a:latin typeface="Arial" pitchFamily="34" charset="0"/>
-                <a:ea typeface="Arial" pitchFamily="34" charset="-122"/>
-                <a:cs typeface="Arial" pitchFamily="34" charset="-120"/>
-              </a:rPr>
-              <a:t>By the end of this lesson, students will subtract a number from any larger number (not necessarily a power of ten) using a </a:t>
-            </a:r>
-            <a:pPr algn="l" indent="0" marL="0">
-              <a:lnSpc>
-                <a:spcPts val="1680"/>
-              </a:lnSpc>
-              <a:spcBef>
-                <a:spcPts val="300"/>
-              </a:spcBef>
-              <a:spcAft>
-                <a:spcPts val="300"/>
-              </a:spcAft>
-              <a:buNone/>
-            </a:pPr>
-            <a:r>
-              <a:rPr lang="en-US" sz="1200" i="1" dirty="0">
-                <a:solidFill>
-                  <a:srgbClr val="1C2833"/>
-                </a:solidFill>
-                <a:latin typeface="Arial" pitchFamily="34" charset="0"/>
-                <a:ea typeface="Arial" pitchFamily="34" charset="-122"/>
-                <a:cs typeface="Arial" pitchFamily="34" charset="-120"/>
-              </a:rPr>
-              <a:t>combined</a:t>
-            </a:r>
-            <a:pPr algn="l" indent="0" marL="0">
-              <a:lnSpc>
-                <a:spcPts val="1680"/>
-              </a:lnSpc>
-              <a:spcBef>
-                <a:spcPts val="300"/>
-              </a:spcBef>
-              <a:spcAft>
-                <a:spcPts val="300"/>
-              </a:spcAft>
-              <a:buNone/>
-            </a:pPr>
-            <a:r>
-              <a:rPr lang="en-US" sz="1200" dirty="0">
-                <a:solidFill>
-                  <a:srgbClr val="1C2833"/>
-                </a:solidFill>
-                <a:latin typeface="Arial" pitchFamily="34" charset="0"/>
-                <a:ea typeface="Arial" pitchFamily="34" charset="-122"/>
-                <a:cs typeface="Arial" pitchFamily="34" charset="-120"/>
-              </a:rPr>
-              <a:t> method: take the complement of the subtrahend to a nearby base, add it to the minuend, and adjust by the difference.</a:t>
-            </a:r>
-            <a:endParaRPr lang="en-US" sz="1200" dirty="0"/>
-          </a:p>
-        </p:txBody>
-      </p:sp>
-      <p:sp>
-        <p:nvSpPr>
-          <p:cNvPr id="7" name="Text 5"/>
-          <p:cNvSpPr/>
-          <p:nvPr/>
-        </p:nvSpPr>
-        <p:spPr>
-          <a:xfrm>
             <a:off x="406301" y="4434929"/>
             <a:ext cx="8498026" cy="213271"/>
           </a:xfrm>
@@ -2386,7 +2778,7 @@
                 <a:ea typeface="Georgia" pitchFamily="34" charset="-122"/>
                 <a:cs typeface="Georgia" pitchFamily="34" charset="-120"/>
               </a:rPr>
-              <a:t>Differentiation</a:t>
+              <a:t>Core (15 min) — Beyond clean bases (cont.)</a:t>
             </a:r>
             <a:endParaRPr lang="en-US" sz="1800" dirty="0"/>
           </a:p>
@@ -2401,7 +2793,7 @@
         <p:spPr>
           <a:xfrm>
             <a:off x="634901" y="883593"/>
-            <a:ext cx="8102798" cy="975122"/>
+            <a:ext cx="8102798" cy="1013222"/>
           </a:xfrm>
           <a:prstGeom prst="rect">
             <a:avLst/>
@@ -2432,7 +2824,7 @@
                 <a:ea typeface="Arial" pitchFamily="34" charset="-122"/>
                 <a:cs typeface="Arial" pitchFamily="34" charset="-120"/>
               </a:rPr>
-              <a:t>Tier up:</a:t>
+              <a:t>8243 − 567</a:t>
             </a:r>
             <a:pPr algn="l" indent="0" marL="0">
               <a:lnSpc>
@@ -2452,7 +2844,7 @@
                 <a:ea typeface="Arial" pitchFamily="34" charset="-122"/>
                 <a:cs typeface="Arial" pitchFamily="34" charset="-120"/>
               </a:rPr>
-              <a:t> What if the subtrahend has </a:t>
+              <a:t> — 1000 · 433 · 7243 · 7243 + 433 · </a:t>
             </a:r>
             <a:pPr algn="l" indent="0" marL="0">
               <a:lnSpc>
@@ -2464,155 +2856,15 @@
               <a:buNone/>
             </a:pPr>
             <a:r>
-              <a:rPr lang="en-US" sz="1200" i="1" dirty="0">
-                <a:solidFill>
-                  <a:srgbClr val="1C2833"/>
-                </a:solidFill>
-                <a:latin typeface="Arial" pitchFamily="34" charset="0"/>
-                <a:ea typeface="Arial" pitchFamily="34" charset="-122"/>
-                <a:cs typeface="Arial" pitchFamily="34" charset="-120"/>
-              </a:rPr>
-              <a:t>more</a:t>
-            </a:r>
-            <a:pPr algn="l" indent="0" marL="0">
-              <a:lnSpc>
-                <a:spcPts val="1620"/>
-              </a:lnSpc>
-              <a:spcAft>
-                <a:spcPts val="300"/>
-              </a:spcAft>
-              <a:buNone/>
-            </a:pPr>
-            <a:r>
-              <a:rPr lang="en-US" sz="1200" dirty="0">
-                <a:solidFill>
-                  <a:srgbClr val="1C2833"/>
-                </a:solidFill>
-                <a:latin typeface="Arial" pitchFamily="34" charset="0"/>
-                <a:ea typeface="Arial" pitchFamily="34" charset="-122"/>
-                <a:cs typeface="Arial" pitchFamily="34" charset="-120"/>
-              </a:rPr>
-              <a:t> digits than the base needs? E.g. </a:t>
-            </a:r>
-            <a:pPr algn="l" indent="0" marL="0">
-              <a:lnSpc>
-                <a:spcPts val="1620"/>
-              </a:lnSpc>
-              <a:spcAft>
-                <a:spcPts val="300"/>
-              </a:spcAft>
-              <a:buNone/>
-            </a:pPr>
-            <a:r>
-              <a:rPr lang="en-US" sz="1200" dirty="0">
-                <a:solidFill>
-                  <a:srgbClr val="1C2833"/>
-                </a:solidFill>
-                <a:latin typeface="Arial" pitchFamily="34" charset="0"/>
-                <a:ea typeface="Arial" pitchFamily="34" charset="-122"/>
-                <a:cs typeface="Arial" pitchFamily="34" charset="-120"/>
-              </a:rPr>
-              <a:t>8243 − 5567</a:t>
-            </a:r>
-            <a:pPr algn="l" indent="0" marL="0">
-              <a:lnSpc>
-                <a:spcPts val="1620"/>
-              </a:lnSpc>
-              <a:spcAft>
-                <a:spcPts val="300"/>
-              </a:spcAft>
-              <a:buNone/>
-            </a:pPr>
-            <a:r>
-              <a:rPr lang="en-US" sz="1200" dirty="0">
-                <a:solidFill>
-                  <a:srgbClr val="1C2833"/>
-                </a:solidFill>
-                <a:latin typeface="Arial" pitchFamily="34" charset="0"/>
-                <a:ea typeface="Arial" pitchFamily="34" charset="-122"/>
-                <a:cs typeface="Arial" pitchFamily="34" charset="-120"/>
-              </a:rPr>
-              <a:t> — using base 10 000, complement of 5567 is 4433, and </a:t>
-            </a:r>
-            <a:pPr algn="l" indent="0" marL="0">
-              <a:lnSpc>
-                <a:spcPts val="1620"/>
-              </a:lnSpc>
-              <a:spcAft>
-                <a:spcPts val="300"/>
-              </a:spcAft>
-              <a:buNone/>
-            </a:pPr>
-            <a:r>
-              <a:rPr lang="en-US" sz="1200" dirty="0">
-                <a:solidFill>
-                  <a:srgbClr val="1C2833"/>
-                </a:solidFill>
-                <a:latin typeface="Arial" pitchFamily="34" charset="0"/>
-                <a:ea typeface="Arial" pitchFamily="34" charset="-122"/>
-                <a:cs typeface="Arial" pitchFamily="34" charset="-120"/>
-              </a:rPr>
-              <a:t>8243 − 10 000 = −1757</a:t>
-            </a:r>
-            <a:pPr algn="l" indent="0" marL="0">
-              <a:lnSpc>
-                <a:spcPts val="1620"/>
-              </a:lnSpc>
-              <a:spcAft>
-                <a:spcPts val="300"/>
-              </a:spcAft>
-              <a:buNone/>
-            </a:pPr>
-            <a:r>
-              <a:rPr lang="en-US" sz="1200" dirty="0">
-                <a:solidFill>
-                  <a:srgbClr val="1C2833"/>
-                </a:solidFill>
-                <a:latin typeface="Arial" pitchFamily="34" charset="0"/>
-                <a:ea typeface="Arial" pitchFamily="34" charset="-122"/>
-                <a:cs typeface="Arial" pitchFamily="34" charset="-120"/>
-              </a:rPr>
-              <a:t>, so answer = </a:t>
-            </a:r>
-            <a:pPr algn="l" indent="0" marL="0">
-              <a:lnSpc>
-                <a:spcPts val="1620"/>
-              </a:lnSpc>
-              <a:spcAft>
-                <a:spcPts val="300"/>
-              </a:spcAft>
-              <a:buNone/>
-            </a:pPr>
-            <a:r>
-              <a:rPr lang="en-US" sz="1200" dirty="0">
-                <a:solidFill>
-                  <a:srgbClr val="1C2833"/>
-                </a:solidFill>
-                <a:latin typeface="Arial" pitchFamily="34" charset="0"/>
-                <a:ea typeface="Arial" pitchFamily="34" charset="-122"/>
-                <a:cs typeface="Arial" pitchFamily="34" charset="-120"/>
-              </a:rPr>
-              <a:t>−1757 + 4433 = 2676</a:t>
-            </a:r>
-            <a:pPr algn="l" indent="0" marL="0">
-              <a:lnSpc>
-                <a:spcPts val="1620"/>
-              </a:lnSpc>
-              <a:spcAft>
-                <a:spcPts val="300"/>
-              </a:spcAft>
-              <a:buNone/>
-            </a:pPr>
-            <a:r>
-              <a:rPr lang="en-US" sz="1200" dirty="0">
-                <a:solidFill>
-                  <a:srgbClr val="1C2833"/>
-                </a:solidFill>
-                <a:latin typeface="Arial" pitchFamily="34" charset="0"/>
-                <a:ea typeface="Arial" pitchFamily="34" charset="-122"/>
-                <a:cs typeface="Arial" pitchFamily="34" charset="-120"/>
-              </a:rPr>
-              <a:t>. Verify: 8243 − 5567 = 2676. ✓. Negative intermediate results are fine.</a:t>
+              <a:rPr lang="en-US" sz="1200" b="1" dirty="0">
+                <a:solidFill>
+                  <a:srgbClr val="1C2833"/>
+                </a:solidFill>
+                <a:latin typeface="Arial" pitchFamily="34" charset="0"/>
+                <a:ea typeface="Arial" pitchFamily="34" charset="-122"/>
+                <a:cs typeface="Arial" pitchFamily="34" charset="-120"/>
+              </a:rPr>
+              <a:t>7676</a:t>
             </a:r>
             <a:endParaRPr lang="en-US" sz="1200" dirty="0"/>
           </a:p>
@@ -2636,7 +2888,7 @@
                 <a:ea typeface="Arial" pitchFamily="34" charset="-122"/>
                 <a:cs typeface="Arial" pitchFamily="34" charset="-120"/>
               </a:rPr>
-              <a:t>Tier down:</a:t>
+              <a:t>5172 − 89</a:t>
             </a:r>
             <a:pPr algn="l" indent="0" marL="0">
               <a:lnSpc>
@@ -2656,7 +2908,155 @@
                 <a:ea typeface="Arial" pitchFamily="34" charset="-122"/>
                 <a:cs typeface="Arial" pitchFamily="34" charset="-120"/>
               </a:rPr>
-              <a:t> Use base 100 for everything. Only graduate to 1000 when comfortable.</a:t>
+              <a:t> — 100 · 11 · 5072 · 5072 + 11 · </a:t>
+            </a:r>
+            <a:pPr algn="l" indent="0" marL="0">
+              <a:lnSpc>
+                <a:spcPts val="1620"/>
+              </a:lnSpc>
+              <a:spcAft>
+                <a:spcPts val="300"/>
+              </a:spcAft>
+              <a:buNone/>
+            </a:pPr>
+            <a:r>
+              <a:rPr lang="en-US" sz="1200" b="1" dirty="0">
+                <a:solidFill>
+                  <a:srgbClr val="1C2833"/>
+                </a:solidFill>
+                <a:latin typeface="Arial" pitchFamily="34" charset="0"/>
+                <a:ea typeface="Arial" pitchFamily="34" charset="-122"/>
+                <a:cs typeface="Arial" pitchFamily="34" charset="-120"/>
+              </a:rPr>
+              <a:t>5083</a:t>
+            </a:r>
+            <a:endParaRPr lang="en-US" sz="1200" dirty="0"/>
+          </a:p>
+          <a:p>
+            <a:pPr algn="l" marL="342900" indent="-342900">
+              <a:lnSpc>
+                <a:spcPts val="1620"/>
+              </a:lnSpc>
+              <a:spcAft>
+                <a:spcPts val="300"/>
+              </a:spcAft>
+              <a:buSzPct val="100000"/>
+              <a:buChar char="•"/>
+            </a:pPr>
+            <a:r>
+              <a:rPr lang="en-US" sz="1200" b="1" dirty="0">
+                <a:solidFill>
+                  <a:srgbClr val="1C2833"/>
+                </a:solidFill>
+                <a:latin typeface="Arial" pitchFamily="34" charset="0"/>
+                <a:ea typeface="Arial" pitchFamily="34" charset="-122"/>
+                <a:cs typeface="Arial" pitchFamily="34" charset="-120"/>
+              </a:rPr>
+              <a:t>6300 − 248</a:t>
+            </a:r>
+            <a:pPr algn="l" indent="0" marL="0">
+              <a:lnSpc>
+                <a:spcPts val="1620"/>
+              </a:lnSpc>
+              <a:spcAft>
+                <a:spcPts val="300"/>
+              </a:spcAft>
+              <a:buNone/>
+            </a:pPr>
+            <a:r>
+              <a:rPr lang="en-US" sz="1200" dirty="0">
+                <a:solidFill>
+                  <a:srgbClr val="1C2833"/>
+                </a:solidFill>
+                <a:latin typeface="Arial" pitchFamily="34" charset="0"/>
+                <a:ea typeface="Arial" pitchFamily="34" charset="-122"/>
+                <a:cs typeface="Arial" pitchFamily="34" charset="-120"/>
+              </a:rPr>
+              <a:t> — 1000 · 752 · 5300 · 5300 + 752 · </a:t>
+            </a:r>
+            <a:pPr algn="l" indent="0" marL="0">
+              <a:lnSpc>
+                <a:spcPts val="1620"/>
+              </a:lnSpc>
+              <a:spcAft>
+                <a:spcPts val="300"/>
+              </a:spcAft>
+              <a:buNone/>
+            </a:pPr>
+            <a:r>
+              <a:rPr lang="en-US" sz="1200" b="1" dirty="0">
+                <a:solidFill>
+                  <a:srgbClr val="1C2833"/>
+                </a:solidFill>
+                <a:latin typeface="Arial" pitchFamily="34" charset="0"/>
+                <a:ea typeface="Arial" pitchFamily="34" charset="-122"/>
+                <a:cs typeface="Arial" pitchFamily="34" charset="-120"/>
+              </a:rPr>
+              <a:t>6052</a:t>
+            </a:r>
+            <a:endParaRPr lang="en-US" sz="1200" dirty="0"/>
+          </a:p>
+          <a:p>
+            <a:pPr algn="l" marL="342900" indent="-342900">
+              <a:lnSpc>
+                <a:spcPts val="1620"/>
+              </a:lnSpc>
+              <a:spcAft>
+                <a:spcPts val="300"/>
+              </a:spcAft>
+              <a:buSzPct val="100000"/>
+              <a:buChar char="•"/>
+            </a:pPr>
+            <a:r>
+              <a:rPr lang="en-US" sz="1200" b="1" dirty="0">
+                <a:solidFill>
+                  <a:srgbClr val="1C2833"/>
+                </a:solidFill>
+                <a:latin typeface="Arial" pitchFamily="34" charset="0"/>
+                <a:ea typeface="Arial" pitchFamily="34" charset="-122"/>
+                <a:cs typeface="Arial" pitchFamily="34" charset="-120"/>
+              </a:rPr>
+              <a:t>12 000 − 4 567</a:t>
+            </a:r>
+            <a:pPr algn="l" indent="0" marL="0">
+              <a:lnSpc>
+                <a:spcPts val="1620"/>
+              </a:lnSpc>
+              <a:spcAft>
+                <a:spcPts val="300"/>
+              </a:spcAft>
+              <a:buNone/>
+            </a:pPr>
+            <a:r>
+              <a:rPr lang="en-US" sz="1200" dirty="0">
+                <a:solidFill>
+                  <a:srgbClr val="1C2833"/>
+                </a:solidFill>
+                <a:latin typeface="Arial" pitchFamily="34" charset="0"/>
+                <a:ea typeface="Arial" pitchFamily="34" charset="-122"/>
+                <a:cs typeface="Arial" pitchFamily="34" charset="-120"/>
+              </a:rPr>
+              <a:t> — 10 000 · 5 433 · 2 000 · 2 000 + 5 433 · </a:t>
+            </a:r>
+            <a:pPr algn="l" indent="0" marL="0">
+              <a:lnSpc>
+                <a:spcPts val="1620"/>
+              </a:lnSpc>
+              <a:spcAft>
+                <a:spcPts val="300"/>
+              </a:spcAft>
+              <a:buNone/>
+            </a:pPr>
+            <a:r>
+              <a:rPr lang="en-US" sz="1200" b="1" dirty="0">
+                <a:solidFill>
+                  <a:srgbClr val="1C2833"/>
+                </a:solidFill>
+                <a:latin typeface="Arial" pitchFamily="34" charset="0"/>
+                <a:ea typeface="Arial" pitchFamily="34" charset="-122"/>
+                <a:cs typeface="Arial" pitchFamily="34" charset="-120"/>
+              </a:rPr>
+              <a:t>7 433</a:t>
             </a:r>
             <a:endParaRPr lang="en-US" sz="1200" dirty="0"/>
           </a:p>
@@ -2814,7 +3214,7 @@
                 <a:ea typeface="Georgia" pitchFamily="34" charset="-122"/>
                 <a:cs typeface="Georgia" pitchFamily="34" charset="-120"/>
               </a:rPr>
-              <a:t>Teacher notes</a:t>
+              <a:t>Core (15 min) — Beyond clean bases (cont.)</a:t>
             </a:r>
             <a:endParaRPr lang="en-US" sz="1800" dirty="0"/>
           </a:p>
@@ -2828,8 +3228,8 @@
         </p:nvSpPr>
         <p:spPr>
           <a:xfrm>
-            <a:off x="406301" y="870942"/>
-            <a:ext cx="8498026" cy="1289149"/>
+            <a:off x="634901" y="883593"/>
+            <a:ext cx="8102798" cy="898922"/>
           </a:xfrm>
           <a:prstGeom prst="rect">
             <a:avLst/>
@@ -2841,13 +3241,31 @@
           <a:bodyPr wrap="square" lIns="0" tIns="0" rIns="0" bIns="0" rtlCol="0" anchor="t"/>
           <a:lstStyle/>
           <a:p>
-            <a:pPr algn="l" indent="0" marL="0">
-              <a:lnSpc>
-                <a:spcPts val="1680"/>
-              </a:lnSpc>
-              <a:spcBef>
-                <a:spcPts val="300"/>
-              </a:spcBef>
+            <a:pPr algn="l" marL="342900" indent="-342900">
+              <a:lnSpc>
+                <a:spcPts val="1620"/>
+              </a:lnSpc>
+              <a:spcAft>
+                <a:spcPts val="300"/>
+              </a:spcAft>
+              <a:buSzPct val="100000"/>
+              <a:buChar char="•"/>
+            </a:pPr>
+            <a:r>
+              <a:rPr lang="en-US" sz="1200" b="1" dirty="0">
+                <a:solidFill>
+                  <a:srgbClr val="1C2833"/>
+                </a:solidFill>
+                <a:latin typeface="Arial" pitchFamily="34" charset="0"/>
+                <a:ea typeface="Arial" pitchFamily="34" charset="-122"/>
+                <a:cs typeface="Arial" pitchFamily="34" charset="-120"/>
+              </a:rPr>
+              <a:t>When is this faster than standard borrowing?</a:t>
+            </a:r>
+            <a:pPr algn="l" indent="0" marL="0">
+              <a:lnSpc>
+                <a:spcPts val="1620"/>
+              </a:lnSpc>
               <a:spcAft>
                 <a:spcPts val="300"/>
               </a:spcAft>
@@ -2862,99 +3280,27 @@
                 <a:ea typeface="Arial" pitchFamily="34" charset="-122"/>
                 <a:cs typeface="Arial" pitchFamily="34" charset="-120"/>
               </a:rPr>
-              <a:t>– The combined method introduces a real subtlety: students must now choose a base. Some over-pick (use 10 000 for </a:t>
-            </a:r>
-            <a:pPr algn="l" indent="0" marL="0">
-              <a:lnSpc>
-                <a:spcPts val="1680"/>
-              </a:lnSpc>
-              <a:spcBef>
-                <a:spcPts val="300"/>
-              </a:spcBef>
-              <a:spcAft>
-                <a:spcPts val="300"/>
-              </a:spcAft>
-              <a:buNone/>
-            </a:pPr>
-            <a:r>
-              <a:rPr lang="en-US" sz="1200" dirty="0">
-                <a:solidFill>
-                  <a:srgbClr val="1C2833"/>
-                </a:solidFill>
-                <a:latin typeface="Arial" pitchFamily="34" charset="0"/>
-                <a:ea typeface="Arial" pitchFamily="34" charset="-122"/>
-                <a:cs typeface="Arial" pitchFamily="34" charset="-120"/>
-              </a:rPr>
-              <a:t>5172 − 89</a:t>
-            </a:r>
-            <a:pPr algn="l" indent="0" marL="0">
-              <a:lnSpc>
-                <a:spcPts val="1680"/>
-              </a:lnSpc>
-              <a:spcBef>
-                <a:spcPts val="300"/>
-              </a:spcBef>
-              <a:spcAft>
-                <a:spcPts val="300"/>
-              </a:spcAft>
-              <a:buNone/>
-            </a:pPr>
-            <a:r>
-              <a:rPr lang="en-US" sz="1200" dirty="0">
-                <a:solidFill>
-                  <a:srgbClr val="1C2833"/>
-                </a:solidFill>
-                <a:latin typeface="Arial" pitchFamily="34" charset="0"/>
-                <a:ea typeface="Arial" pitchFamily="34" charset="-122"/>
-                <a:cs typeface="Arial" pitchFamily="34" charset="-120"/>
-              </a:rPr>
-              <a:t> when 100 would do). Some under-pick (use 100 for </a:t>
-            </a:r>
-            <a:pPr algn="l" indent="0" marL="0">
-              <a:lnSpc>
-                <a:spcPts val="1680"/>
-              </a:lnSpc>
-              <a:spcBef>
-                <a:spcPts val="300"/>
-              </a:spcBef>
-              <a:spcAft>
-                <a:spcPts val="300"/>
-              </a:spcAft>
-              <a:buNone/>
-            </a:pPr>
-            <a:r>
-              <a:rPr lang="en-US" sz="1200" dirty="0">
-                <a:solidFill>
-                  <a:srgbClr val="1C2833"/>
-                </a:solidFill>
-                <a:latin typeface="Arial" pitchFamily="34" charset="0"/>
-                <a:ea typeface="Arial" pitchFamily="34" charset="-122"/>
-                <a:cs typeface="Arial" pitchFamily="34" charset="-120"/>
-              </a:rPr>
-              <a:t>8243 − 567</a:t>
-            </a:r>
-            <a:pPr algn="l" indent="0" marL="0">
-              <a:lnSpc>
-                <a:spcPts val="1680"/>
-              </a:lnSpc>
-              <a:spcBef>
-                <a:spcPts val="300"/>
-              </a:spcBef>
-              <a:spcAft>
-                <a:spcPts val="300"/>
-              </a:spcAft>
-              <a:buNone/>
-            </a:pPr>
-            <a:r>
-              <a:rPr lang="en-US" sz="1200" dirty="0">
-                <a:solidFill>
-                  <a:srgbClr val="1C2833"/>
-                </a:solidFill>
-                <a:latin typeface="Arial" pitchFamily="34" charset="0"/>
-                <a:ea typeface="Arial" pitchFamily="34" charset="-122"/>
-                <a:cs typeface="Arial" pitchFamily="34" charset="-120"/>
-              </a:rPr>
-              <a:t>). Either causes errors. Teach: "pick the smallest base that still exceeds the subtrahend." – The shopkeeper role-play tends to make this concrete. Make sure the "round notes" are physically present — the mental model "I have 1000 in my hand, I need to give 567 of it" makes the algebra intuitive. – Some classes will benefit from spending the whole lesson on the shopkeeper drill and pushing the algebra to Day 9. That's a fine reordering.</a:t>
+              <a:t> </a:t>
+            </a:r>
+            <a:pPr algn="l" indent="0" marL="0">
+              <a:lnSpc>
+                <a:spcPts val="1620"/>
+              </a:lnSpc>
+              <a:spcAft>
+                <a:spcPts val="300"/>
+              </a:spcAft>
+              <a:buNone/>
+            </a:pPr>
+            <a:r>
+              <a:rPr lang="en-US" sz="1200" i="1" dirty="0">
+                <a:solidFill>
+                  <a:srgbClr val="1C2833"/>
+                </a:solidFill>
+                <a:latin typeface="Arial" pitchFamily="34" charset="0"/>
+                <a:ea typeface="Arial" pitchFamily="34" charset="-122"/>
+                <a:cs typeface="Arial" pitchFamily="34" charset="-120"/>
+              </a:rPr>
+              <a:t>"When the subtrahend is close to a base — say 567 to 1000 — Nikhilam-with-adjustment is genuinely faster. When the subtrahend is in the middle (like 4567 from 8243, where 4567 is not close to any clean base), standard borrowing is competitive. The mature mental-arithmetic move is to know both and pick."</a:t>
             </a:r>
             <a:endParaRPr lang="en-US" sz="1200" dirty="0"/>
           </a:p>
@@ -3112,7 +3458,7 @@
                 <a:ea typeface="Georgia" pitchFamily="34" charset="-122"/>
                 <a:cs typeface="Georgia" pitchFamily="34" charset="-120"/>
               </a:rPr>
-              <a:t>Citation(s) used in this lesson</a:t>
+              <a:t>Activity (20 min) — Shopkeeper role-play</a:t>
             </a:r>
             <a:endParaRPr lang="en-US" sz="1800" dirty="0"/>
           </a:p>
@@ -3127,7 +3473,7 @@
         <p:spPr>
           <a:xfrm>
             <a:off x="406301" y="870942"/>
-            <a:ext cx="8498026" cy="213271"/>
+            <a:ext cx="8498026" cy="222796"/>
           </a:xfrm>
           <a:prstGeom prst="rect">
             <a:avLst/>
@@ -3160,7 +3506,7 @@
                 <a:ea typeface="Arial" pitchFamily="34" charset="-122"/>
                 <a:cs typeface="Arial" pitchFamily="34" charset="-120"/>
               </a:rPr>
-              <a:t>– Tirthaji, </a:t>
+              <a:t>See </a:t>
             </a:r>
             <a:pPr algn="l" indent="0" marL="0">
               <a:lnSpc>
@@ -3175,15 +3521,15 @@
               <a:buNone/>
             </a:pPr>
             <a:r>
-              <a:rPr lang="en-US" sz="1200" i="1" dirty="0">
-                <a:solidFill>
-                  <a:srgbClr val="1C2833"/>
-                </a:solidFill>
-                <a:latin typeface="Arial" pitchFamily="34" charset="0"/>
-                <a:ea typeface="Arial" pitchFamily="34" charset="-122"/>
-                <a:cs typeface="Arial" pitchFamily="34" charset="-120"/>
-              </a:rPr>
-              <a:t>Vedic Mathematics</a:t>
+              <a:rPr lang="en-US" sz="1200" dirty="0">
+                <a:solidFill>
+                  <a:srgbClr val="1C2833"/>
+                </a:solidFill>
+                <a:latin typeface="Arial" pitchFamily="34" charset="0"/>
+                <a:ea typeface="Arial" pitchFamily="34" charset="-122"/>
+                <a:cs typeface="Arial" pitchFamily="34" charset="-120"/>
+              </a:rPr>
+              <a:t>activities/activity-02-shopkeeper.md</a:t>
             </a:r>
             <a:pPr algn="l" indent="0" marL="0">
               <a:lnSpc>
@@ -3206,7 +3552,7 @@
                 <a:ea typeface="Arial" pitchFamily="34" charset="-122"/>
                 <a:cs typeface="Arial" pitchFamily="34" charset="-120"/>
               </a:rPr>
-              <a:t> (1965), sūtra Nikhilam (#2) — primary source.</a:t>
+              <a:t>.</a:t>
             </a:r>
             <a:endParaRPr lang="en-US" sz="1200" dirty="0"/>
           </a:p>
@@ -3220,8 +3566,8 @@
         </p:nvSpPr>
         <p:spPr>
           <a:xfrm>
-            <a:off x="634901" y="1173063"/>
-            <a:ext cx="8102798" cy="487561"/>
+            <a:off x="634901" y="1182588"/>
+            <a:ext cx="8102798" cy="1257002"/>
           </a:xfrm>
           <a:prstGeom prst="rect">
             <a:avLst/>
@@ -3244,6 +3590,326 @@
               <a:buChar char="•"/>
             </a:pPr>
             <a:r>
+              <a:rPr lang="en-US" sz="1200" dirty="0">
+                <a:solidFill>
+                  <a:srgbClr val="1C2833"/>
+                </a:solidFill>
+                <a:latin typeface="Arial" pitchFamily="34" charset="0"/>
+                <a:ea typeface="Arial" pitchFamily="34" charset="-122"/>
+                <a:cs typeface="Arial" pitchFamily="34" charset="-120"/>
+              </a:rPr>
+              <a:t>In pairs, one is the shopkeeper, one is the customer.</a:t>
+            </a:r>
+            <a:endParaRPr lang="en-US" sz="1200" dirty="0"/>
+          </a:p>
+          <a:p>
+            <a:pPr algn="l" marL="342900" indent="-342900">
+              <a:lnSpc>
+                <a:spcPts val="1620"/>
+              </a:lnSpc>
+              <a:spcAft>
+                <a:spcPts val="300"/>
+              </a:spcAft>
+              <a:buSzPct val="100000"/>
+              <a:buChar char="•"/>
+            </a:pPr>
+            <a:r>
+              <a:rPr lang="en-US" sz="1200" dirty="0">
+                <a:solidFill>
+                  <a:srgbClr val="1C2833"/>
+                </a:solidFill>
+                <a:latin typeface="Arial" pitchFamily="34" charset="0"/>
+                <a:ea typeface="Arial" pitchFamily="34" charset="-122"/>
+                <a:cs typeface="Arial" pitchFamily="34" charset="-120"/>
+              </a:rPr>
+              <a:t>Customer hands over a "round" note (100, 500, 1000, or 2000 rupees).</a:t>
+            </a:r>
+            <a:endParaRPr lang="en-US" sz="1200" dirty="0"/>
+          </a:p>
+          <a:p>
+            <a:pPr algn="l" marL="342900" indent="-342900">
+              <a:lnSpc>
+                <a:spcPts val="1620"/>
+              </a:lnSpc>
+              <a:spcAft>
+                <a:spcPts val="300"/>
+              </a:spcAft>
+              <a:buSzPct val="100000"/>
+              <a:buChar char="•"/>
+            </a:pPr>
+            <a:r>
+              <a:rPr lang="en-US" sz="1200" dirty="0">
+                <a:solidFill>
+                  <a:srgbClr val="1C2833"/>
+                </a:solidFill>
+                <a:latin typeface="Arial" pitchFamily="34" charset="0"/>
+                <a:ea typeface="Arial" pitchFamily="34" charset="-122"/>
+                <a:cs typeface="Arial" pitchFamily="34" charset="-120"/>
+              </a:rPr>
+              <a:t>Shopkeeper computes the change using Nikhilam (mental).</a:t>
+            </a:r>
+            <a:endParaRPr lang="en-US" sz="1200" dirty="0"/>
+          </a:p>
+          <a:p>
+            <a:pPr algn="l" marL="342900" indent="-342900">
+              <a:lnSpc>
+                <a:spcPts val="1620"/>
+              </a:lnSpc>
+              <a:spcAft>
+                <a:spcPts val="300"/>
+              </a:spcAft>
+              <a:buSzPct val="100000"/>
+              <a:buChar char="•"/>
+            </a:pPr>
+            <a:r>
+              <a:rPr lang="en-US" sz="1200" dirty="0">
+                <a:solidFill>
+                  <a:srgbClr val="1C2833"/>
+                </a:solidFill>
+                <a:latin typeface="Arial" pitchFamily="34" charset="0"/>
+                <a:ea typeface="Arial" pitchFamily="34" charset="-122"/>
+                <a:cs typeface="Arial" pitchFamily="34" charset="-120"/>
+              </a:rPr>
+              <a:t>Swap roles every 3 rounds.</a:t>
+            </a:r>
+            <a:endParaRPr lang="en-US" sz="1200" dirty="0"/>
+          </a:p>
+          <a:p>
+            <a:pPr algn="l" marL="342900" indent="-342900">
+              <a:lnSpc>
+                <a:spcPts val="1620"/>
+              </a:lnSpc>
+              <a:spcAft>
+                <a:spcPts val="300"/>
+              </a:spcAft>
+              <a:buSzPct val="100000"/>
+              <a:buChar char="•"/>
+            </a:pPr>
+            <a:r>
+              <a:rPr lang="en-US" sz="1200" dirty="0">
+                <a:solidFill>
+                  <a:srgbClr val="1C2833"/>
+                </a:solidFill>
+                <a:latin typeface="Arial" pitchFamily="34" charset="0"/>
+                <a:ea typeface="Arial" pitchFamily="34" charset="-122"/>
+                <a:cs typeface="Arial" pitchFamily="34" charset="-120"/>
+              </a:rPr>
+              <a:t>10 scenarios per pair. Times recorded.</a:t>
+            </a:r>
+            <a:endParaRPr lang="en-US" sz="1200" dirty="0"/>
+          </a:p>
+        </p:txBody>
+      </p:sp>
+      <p:sp>
+        <p:nvSpPr>
+          <p:cNvPr id="6" name="Text 4"/>
+          <p:cNvSpPr/>
+          <p:nvPr/>
+        </p:nvSpPr>
+        <p:spPr>
+          <a:xfrm>
+            <a:off x="406301" y="4434929"/>
+            <a:ext cx="8498026" cy="213271"/>
+          </a:xfrm>
+          <a:prstGeom prst="rect">
+            <a:avLst/>
+          </a:prstGeom>
+          <a:noFill/>
+          <a:ln/>
+        </p:spPr>
+        <p:txBody>
+          <a:bodyPr wrap="square" lIns="0" tIns="0" rIns="0" bIns="0" rtlCol="0" anchor="t"/>
+          <a:lstStyle/>
+          <a:p>
+            <a:pPr algn="l" indent="0" marL="0">
+              <a:lnSpc>
+                <a:spcPts val="1680"/>
+              </a:lnSpc>
+              <a:spcBef>
+                <a:spcPts val="300"/>
+              </a:spcBef>
+              <a:spcAft>
+                <a:spcPts val="300"/>
+              </a:spcAft>
+              <a:buNone/>
+            </a:pPr>
+            <a:r>
+              <a:rPr lang="en-US" sz="1200" dirty="0">
+                <a:solidFill>
+                  <a:srgbClr val="1C2833"/>
+                </a:solidFill>
+                <a:latin typeface="Arial" pitchFamily="34" charset="0"/>
+                <a:ea typeface="Arial" pitchFamily="34" charset="-122"/>
+                <a:cs typeface="Arial" pitchFamily="34" charset="-120"/>
+              </a:rPr>
+              <a:t>Middle ·  · IKS Curriculum</a:t>
+            </a:r>
+            <a:endParaRPr lang="en-US" sz="1200" dirty="0"/>
+          </a:p>
+        </p:txBody>
+      </p:sp>
+    </p:spTree>
+  </p:cSld>
+  <p:clrMapOvr>
+    <a:masterClrMapping/>
+  </p:clrMapOvr>
+</p:sld>
+</file>
+
+<file path=ppt/slides/slide13.xml><?xml version="1.0" encoding="utf-8"?>
+<p:sld xmlns:a="http://schemas.openxmlformats.org/drawingml/2006/main" xmlns:r="http://schemas.openxmlformats.org/officeDocument/2006/relationships" xmlns:p="http://schemas.openxmlformats.org/presentationml/2006/main">
+  <p:cSld name="Slide 13">
+    <p:bg>
+      <p:bgPr>
+        <a:solidFill>
+          <a:srgbClr val="FFFFFF"/>
+        </a:solidFill>
+      </p:bgPr>
+    </p:bg>
+    <p:spTree>
+      <p:nvGrpSpPr>
+        <p:cNvPr id="1" name=""/>
+        <p:cNvGrpSpPr/>
+        <p:nvPr/>
+      </p:nvGrpSpPr>
+      <p:grpSpPr>
+        <a:xfrm>
+          <a:off x="0" y="0"/>
+          <a:ext cx="0" cy="0"/>
+          <a:chOff x="0" y="0"/>
+          <a:chExt cx="0" cy="0"/>
+        </a:xfrm>
+      </p:grpSpPr>
+      <p:sp>
+        <p:nvSpPr>
+          <p:cNvPr id="2" name="Text 0"/>
+          <p:cNvSpPr/>
+          <p:nvPr/>
+        </p:nvSpPr>
+        <p:spPr>
+          <a:xfrm>
+            <a:off x="0" y="0"/>
+            <a:ext cx="9144000" cy="101501"/>
+          </a:xfrm>
+          <a:prstGeom prst="rect">
+            <a:avLst/>
+          </a:prstGeom>
+          <a:solidFill>
+            <a:srgbClr val="277884"/>
+          </a:solidFill>
+          <a:ln/>
+        </p:spPr>
+        <p:txBody>
+          <a:bodyPr wrap="square" rtlCol="0" anchor="ctr"/>
+          <a:lstStyle/>
+          <a:p>
+            <a:pPr indent="0" marL="0">
+              <a:buNone/>
+            </a:pPr>
+            <a:endParaRPr lang="en-US" dirty="0"/>
+          </a:p>
+        </p:txBody>
+      </p:sp>
+      <p:sp>
+        <p:nvSpPr>
+          <p:cNvPr id="3" name="Text 1"/>
+          <p:cNvSpPr/>
+          <p:nvPr/>
+        </p:nvSpPr>
+        <p:spPr>
+          <a:xfrm>
+            <a:off x="406301" y="457051"/>
+            <a:ext cx="8498026" cy="274290"/>
+          </a:xfrm>
+          <a:prstGeom prst="rect">
+            <a:avLst/>
+          </a:prstGeom>
+          <a:noFill/>
+          <a:ln/>
+        </p:spPr>
+        <p:txBody>
+          <a:bodyPr wrap="square" lIns="0" tIns="0" rIns="0" bIns="0" rtlCol="0" anchor="t"/>
+          <a:lstStyle/>
+          <a:p>
+            <a:pPr algn="l" indent="0" marL="0">
+              <a:lnSpc>
+                <a:spcPts val="2160"/>
+              </a:lnSpc>
+              <a:spcBef>
+                <a:spcPts val="600"/>
+              </a:spcBef>
+              <a:spcAft>
+                <a:spcPts val="800"/>
+              </a:spcAft>
+              <a:buNone/>
+            </a:pPr>
+            <a:r>
+              <a:rPr lang="en-US" sz="1800" b="1" dirty="0">
+                <a:solidFill>
+                  <a:srgbClr val="FE4447"/>
+                </a:solidFill>
+                <a:latin typeface="Georgia" pitchFamily="34" charset="0"/>
+                <a:ea typeface="Georgia" pitchFamily="34" charset="-122"/>
+                <a:cs typeface="Georgia" pitchFamily="34" charset="-120"/>
+              </a:rPr>
+              <a:t>Wrap-up (5 min)</a:t>
+            </a:r>
+            <a:endParaRPr lang="en-US" sz="1800" dirty="0"/>
+          </a:p>
+        </p:txBody>
+      </p:sp>
+      <p:sp>
+        <p:nvSpPr>
+          <p:cNvPr id="4" name="Text 2"/>
+          <p:cNvSpPr/>
+          <p:nvPr/>
+        </p:nvSpPr>
+        <p:spPr>
+          <a:xfrm>
+            <a:off x="634901" y="883593"/>
+            <a:ext cx="8102798" cy="731341"/>
+          </a:xfrm>
+          <a:prstGeom prst="rect">
+            <a:avLst/>
+          </a:prstGeom>
+          <a:noFill/>
+          <a:ln/>
+        </p:spPr>
+        <p:txBody>
+          <a:bodyPr wrap="square" lIns="0" tIns="0" rIns="0" bIns="0" rtlCol="0" anchor="t"/>
+          <a:lstStyle/>
+          <a:p>
+            <a:pPr algn="l" marL="342900" indent="-342900">
+              <a:lnSpc>
+                <a:spcPts val="1620"/>
+              </a:lnSpc>
+              <a:spcAft>
+                <a:spcPts val="300"/>
+              </a:spcAft>
+              <a:buSzPct val="100000"/>
+              <a:buChar char="•"/>
+            </a:pPr>
+            <a:r>
+              <a:rPr lang="en-US" sz="1200" dirty="0">
+                <a:solidFill>
+                  <a:srgbClr val="1C2833"/>
+                </a:solidFill>
+                <a:latin typeface="Arial" pitchFamily="34" charset="0"/>
+                <a:ea typeface="Arial" pitchFamily="34" charset="-122"/>
+                <a:cs typeface="Arial" pitchFamily="34" charset="-120"/>
+              </a:rPr>
+              <a:t>Quick discussion: </a:t>
+            </a:r>
+            <a:pPr algn="l" indent="0" marL="0">
+              <a:lnSpc>
+                <a:spcPts val="1620"/>
+              </a:lnSpc>
+              <a:spcAft>
+                <a:spcPts val="300"/>
+              </a:spcAft>
+              <a:buNone/>
+            </a:pPr>
+            <a:r>
               <a:rPr lang="en-US" sz="1200" i="1" dirty="0">
                 <a:solidFill>
                   <a:srgbClr val="1C2833"/>
@@ -3252,6 +3918,2504 @@
                 <a:ea typeface="Arial" pitchFamily="34" charset="-122"/>
                 <a:cs typeface="Arial" pitchFamily="34" charset="-120"/>
               </a:rPr>
+              <a:t>"Where in real life does this method save time?"</a:t>
+            </a:r>
+            <a:pPr algn="l" indent="0" marL="0">
+              <a:lnSpc>
+                <a:spcPts val="1620"/>
+              </a:lnSpc>
+              <a:spcAft>
+                <a:spcPts val="300"/>
+              </a:spcAft>
+              <a:buNone/>
+            </a:pPr>
+            <a:r>
+              <a:rPr lang="en-US" sz="1200" dirty="0">
+                <a:solidFill>
+                  <a:srgbClr val="1C2833"/>
+                </a:solidFill>
+                <a:latin typeface="Arial" pitchFamily="34" charset="0"/>
+                <a:ea typeface="Arial" pitchFamily="34" charset="-122"/>
+                <a:cs typeface="Arial" pitchFamily="34" charset="-120"/>
+              </a:rPr>
+              <a:t> Most answers will be shop-related. Affirm and add: change-counting, expense splitting, deficit tracking.</a:t>
+            </a:r>
+            <a:endParaRPr lang="en-US" sz="1200" dirty="0"/>
+          </a:p>
+          <a:p>
+            <a:pPr algn="l" marL="342900" indent="-342900">
+              <a:lnSpc>
+                <a:spcPts val="1620"/>
+              </a:lnSpc>
+              <a:spcAft>
+                <a:spcPts val="300"/>
+              </a:spcAft>
+              <a:buSzPct val="100000"/>
+              <a:buChar char="•"/>
+            </a:pPr>
+            <a:r>
+              <a:rPr lang="en-US" sz="1200" dirty="0">
+                <a:solidFill>
+                  <a:srgbClr val="1C2833"/>
+                </a:solidFill>
+                <a:latin typeface="Arial" pitchFamily="34" charset="0"/>
+                <a:ea typeface="Arial" pitchFamily="34" charset="-122"/>
+                <a:cs typeface="Arial" pitchFamily="34" charset="-120"/>
+              </a:rPr>
+              <a:t>Preview Day 9: </a:t>
+            </a:r>
+            <a:pPr algn="l" indent="0" marL="0">
+              <a:lnSpc>
+                <a:spcPts val="1620"/>
+              </a:lnSpc>
+              <a:spcAft>
+                <a:spcPts val="300"/>
+              </a:spcAft>
+              <a:buNone/>
+            </a:pPr>
+            <a:r>
+              <a:rPr lang="en-US" sz="1200" i="1" dirty="0">
+                <a:solidFill>
+                  <a:srgbClr val="1C2833"/>
+                </a:solidFill>
+                <a:latin typeface="Arial" pitchFamily="34" charset="0"/>
+                <a:ea typeface="Arial" pitchFamily="34" charset="-122"/>
+                <a:cs typeface="Arial" pitchFamily="34" charset="-120"/>
+              </a:rPr>
+              <a:t>"Tomorrow — speed test, both methods, head-to-head."</a:t>
+            </a:r>
+            <a:endParaRPr lang="en-US" sz="1200" dirty="0"/>
+          </a:p>
+        </p:txBody>
+      </p:sp>
+      <p:sp>
+        <p:nvSpPr>
+          <p:cNvPr id="5" name="Text 3"/>
+          <p:cNvSpPr/>
+          <p:nvPr/>
+        </p:nvSpPr>
+        <p:spPr>
+          <a:xfrm>
+            <a:off x="406301" y="4434929"/>
+            <a:ext cx="8498026" cy="213271"/>
+          </a:xfrm>
+          <a:prstGeom prst="rect">
+            <a:avLst/>
+          </a:prstGeom>
+          <a:noFill/>
+          <a:ln/>
+        </p:spPr>
+        <p:txBody>
+          <a:bodyPr wrap="square" lIns="0" tIns="0" rIns="0" bIns="0" rtlCol="0" anchor="t"/>
+          <a:lstStyle/>
+          <a:p>
+            <a:pPr algn="l" indent="0" marL="0">
+              <a:lnSpc>
+                <a:spcPts val="1680"/>
+              </a:lnSpc>
+              <a:spcBef>
+                <a:spcPts val="300"/>
+              </a:spcBef>
+              <a:spcAft>
+                <a:spcPts val="300"/>
+              </a:spcAft>
+              <a:buNone/>
+            </a:pPr>
+            <a:r>
+              <a:rPr lang="en-US" sz="1200" dirty="0">
+                <a:solidFill>
+                  <a:srgbClr val="1C2833"/>
+                </a:solidFill>
+                <a:latin typeface="Arial" pitchFamily="34" charset="0"/>
+                <a:ea typeface="Arial" pitchFamily="34" charset="-122"/>
+                <a:cs typeface="Arial" pitchFamily="34" charset="-120"/>
+              </a:rPr>
+              <a:t>Middle ·  · IKS Curriculum</a:t>
+            </a:r>
+            <a:endParaRPr lang="en-US" sz="1200" dirty="0"/>
+          </a:p>
+        </p:txBody>
+      </p:sp>
+    </p:spTree>
+  </p:cSld>
+  <p:clrMapOvr>
+    <a:masterClrMapping/>
+  </p:clrMapOvr>
+</p:sld>
+</file>
+
+<file path=ppt/slides/slide14.xml><?xml version="1.0" encoding="utf-8"?>
+<p:sld xmlns:a="http://schemas.openxmlformats.org/drawingml/2006/main" xmlns:r="http://schemas.openxmlformats.org/officeDocument/2006/relationships" xmlns:p="http://schemas.openxmlformats.org/presentationml/2006/main">
+  <p:cSld name="Slide 14">
+    <p:bg>
+      <p:bgPr>
+        <a:solidFill>
+          <a:srgbClr val="FFFFFF"/>
+        </a:solidFill>
+      </p:bgPr>
+    </p:bg>
+    <p:spTree>
+      <p:nvGrpSpPr>
+        <p:cNvPr id="1" name=""/>
+        <p:cNvGrpSpPr/>
+        <p:nvPr/>
+      </p:nvGrpSpPr>
+      <p:grpSpPr>
+        <a:xfrm>
+          <a:off x="0" y="0"/>
+          <a:ext cx="0" cy="0"/>
+          <a:chOff x="0" y="0"/>
+          <a:chExt cx="0" cy="0"/>
+        </a:xfrm>
+      </p:grpSpPr>
+      <p:sp>
+        <p:nvSpPr>
+          <p:cNvPr id="2" name="Text 0"/>
+          <p:cNvSpPr/>
+          <p:nvPr/>
+        </p:nvSpPr>
+        <p:spPr>
+          <a:xfrm>
+            <a:off x="0" y="0"/>
+            <a:ext cx="9144000" cy="101501"/>
+          </a:xfrm>
+          <a:prstGeom prst="rect">
+            <a:avLst/>
+          </a:prstGeom>
+          <a:solidFill>
+            <a:srgbClr val="277884"/>
+          </a:solidFill>
+          <a:ln/>
+        </p:spPr>
+        <p:txBody>
+          <a:bodyPr wrap="square" rtlCol="0" anchor="ctr"/>
+          <a:lstStyle/>
+          <a:p>
+            <a:pPr indent="0" marL="0">
+              <a:buNone/>
+            </a:pPr>
+            <a:endParaRPr lang="en-US" dirty="0"/>
+          </a:p>
+        </p:txBody>
+      </p:sp>
+      <p:sp>
+        <p:nvSpPr>
+          <p:cNvPr id="3" name="Text 1"/>
+          <p:cNvSpPr/>
+          <p:nvPr/>
+        </p:nvSpPr>
+        <p:spPr>
+          <a:xfrm>
+            <a:off x="406301" y="457051"/>
+            <a:ext cx="8498026" cy="274290"/>
+          </a:xfrm>
+          <a:prstGeom prst="rect">
+            <a:avLst/>
+          </a:prstGeom>
+          <a:noFill/>
+          <a:ln/>
+        </p:spPr>
+        <p:txBody>
+          <a:bodyPr wrap="square" lIns="0" tIns="0" rIns="0" bIns="0" rtlCol="0" anchor="t"/>
+          <a:lstStyle/>
+          <a:p>
+            <a:pPr algn="l" indent="0" marL="0">
+              <a:lnSpc>
+                <a:spcPts val="2160"/>
+              </a:lnSpc>
+              <a:spcBef>
+                <a:spcPts val="600"/>
+              </a:spcBef>
+              <a:spcAft>
+                <a:spcPts val="800"/>
+              </a:spcAft>
+              <a:buNone/>
+            </a:pPr>
+            <a:r>
+              <a:rPr lang="en-US" sz="1800" b="1" dirty="0">
+                <a:solidFill>
+                  <a:srgbClr val="FE4447"/>
+                </a:solidFill>
+                <a:latin typeface="Georgia" pitchFamily="34" charset="0"/>
+                <a:ea typeface="Georgia" pitchFamily="34" charset="-122"/>
+                <a:cs typeface="Georgia" pitchFamily="34" charset="-120"/>
+              </a:rPr>
+              <a:t>Student-facing content</a:t>
+            </a:r>
+            <a:endParaRPr lang="en-US" sz="1800" dirty="0"/>
+          </a:p>
+        </p:txBody>
+      </p:sp>
+      <p:sp>
+        <p:nvSpPr>
+          <p:cNvPr id="4" name="Text 2"/>
+          <p:cNvSpPr/>
+          <p:nvPr/>
+        </p:nvSpPr>
+        <p:spPr>
+          <a:xfrm>
+            <a:off x="406301" y="883593"/>
+            <a:ext cx="8331398" cy="2859881"/>
+          </a:xfrm>
+          <a:prstGeom prst="rect">
+            <a:avLst/>
+          </a:prstGeom>
+          <a:solidFill>
+            <a:srgbClr val="F4F8F9"/>
+          </a:solidFill>
+          <a:ln/>
+        </p:spPr>
+        <p:txBody>
+          <a:bodyPr wrap="square" rtlCol="0" anchor="ctr"/>
+          <a:lstStyle/>
+          <a:p>
+            <a:pPr indent="0" marL="0">
+              <a:buNone/>
+            </a:pPr>
+            <a:endParaRPr lang="en-US" dirty="0"/>
+          </a:p>
+        </p:txBody>
+      </p:sp>
+      <p:sp>
+        <p:nvSpPr>
+          <p:cNvPr id="5" name="Shape 3"/>
+          <p:cNvSpPr/>
+          <p:nvPr/>
+        </p:nvSpPr>
+        <p:spPr>
+          <a:xfrm>
+            <a:off x="434876" y="883593"/>
+            <a:ext cx="0" cy="2859881"/>
+          </a:xfrm>
+          <a:prstGeom prst="line">
+            <a:avLst/>
+          </a:prstGeom>
+          <a:noFill/>
+          <a:ln w="57150">
+            <a:solidFill>
+              <a:srgbClr val="FE4447"/>
+            </a:solidFill>
+            <a:prstDash val="solid"/>
+          </a:ln>
+        </p:spPr>
+      </p:sp>
+      <p:sp>
+        <p:nvSpPr>
+          <p:cNvPr id="6" name="Text 4"/>
+          <p:cNvSpPr/>
+          <p:nvPr/>
+        </p:nvSpPr>
+        <p:spPr>
+          <a:xfrm>
+            <a:off x="692051" y="1074093"/>
+            <a:ext cx="7973389" cy="230981"/>
+          </a:xfrm>
+          <a:prstGeom prst="rect">
+            <a:avLst/>
+          </a:prstGeom>
+          <a:noFill/>
+          <a:ln/>
+        </p:spPr>
+        <p:txBody>
+          <a:bodyPr wrap="square" lIns="0" tIns="0" rIns="0" bIns="0" rtlCol="0" anchor="t"/>
+          <a:lstStyle/>
+          <a:p>
+            <a:pPr algn="l" indent="0" marL="0">
+              <a:lnSpc>
+                <a:spcPts val="1820"/>
+              </a:lnSpc>
+              <a:spcBef>
+                <a:spcPts val="300"/>
+              </a:spcBef>
+              <a:spcAft>
+                <a:spcPts val="300"/>
+              </a:spcAft>
+              <a:buNone/>
+            </a:pPr>
+            <a:r>
+              <a:rPr lang="en-US" sz="1300" b="1" i="1" dirty="0">
+                <a:solidFill>
+                  <a:srgbClr val="1C2833"/>
+                </a:solidFill>
+                <a:latin typeface="Georgia" pitchFamily="34" charset="0"/>
+                <a:ea typeface="Georgia" pitchFamily="34" charset="-122"/>
+                <a:cs typeface="Georgia" pitchFamily="34" charset="-120"/>
+              </a:rPr>
+              <a:t>General Subtraction with Complements</a:t>
+            </a:r>
+            <a:endParaRPr lang="en-US" sz="1300" dirty="0"/>
+          </a:p>
+        </p:txBody>
+      </p:sp>
+      <p:sp>
+        <p:nvSpPr>
+          <p:cNvPr id="7" name="Text 5"/>
+          <p:cNvSpPr/>
+          <p:nvPr/>
+        </p:nvSpPr>
+        <p:spPr>
+          <a:xfrm>
+            <a:off x="692051" y="1343174"/>
+            <a:ext cx="7973389" cy="250031"/>
+          </a:xfrm>
+          <a:prstGeom prst="rect">
+            <a:avLst/>
+          </a:prstGeom>
+          <a:noFill/>
+          <a:ln/>
+        </p:spPr>
+        <p:txBody>
+          <a:bodyPr wrap="square" lIns="0" tIns="0" rIns="0" bIns="0" rtlCol="0" anchor="t"/>
+          <a:lstStyle/>
+          <a:p>
+            <a:pPr algn="l" indent="0" marL="0">
+              <a:lnSpc>
+                <a:spcPts val="1820"/>
+              </a:lnSpc>
+              <a:spcBef>
+                <a:spcPts val="300"/>
+              </a:spcBef>
+              <a:spcAft>
+                <a:spcPts val="300"/>
+              </a:spcAft>
+              <a:buNone/>
+            </a:pPr>
+            <a:r>
+              <a:rPr lang="en-US" sz="1300" dirty="0">
+                <a:solidFill>
+                  <a:srgbClr val="1C2833"/>
+                </a:solidFill>
+                <a:latin typeface="Georgia" pitchFamily="34" charset="0"/>
+                <a:ea typeface="Georgia" pitchFamily="34" charset="-122"/>
+                <a:cs typeface="Georgia" pitchFamily="34" charset="-120"/>
+              </a:rPr>
+              <a:t>To compute </a:t>
+            </a:r>
+            <a:pPr algn="l" indent="0" marL="0">
+              <a:lnSpc>
+                <a:spcPts val="1820"/>
+              </a:lnSpc>
+              <a:spcBef>
+                <a:spcPts val="300"/>
+              </a:spcBef>
+              <a:spcAft>
+                <a:spcPts val="300"/>
+              </a:spcAft>
+              <a:buNone/>
+            </a:pPr>
+            <a:r>
+              <a:rPr lang="en-US" sz="1300" i="1" dirty="0">
+                <a:solidFill>
+                  <a:srgbClr val="1C2833"/>
+                </a:solidFill>
+                <a:latin typeface="Georgia" pitchFamily="34" charset="0"/>
+                <a:ea typeface="Georgia" pitchFamily="34" charset="-122"/>
+                <a:cs typeface="Georgia" pitchFamily="34" charset="-120"/>
+              </a:rPr>
+              <a:t>M − S</a:t>
+            </a:r>
+            <a:pPr algn="l" indent="0" marL="0">
+              <a:lnSpc>
+                <a:spcPts val="1820"/>
+              </a:lnSpc>
+              <a:spcBef>
+                <a:spcPts val="300"/>
+              </a:spcBef>
+              <a:spcAft>
+                <a:spcPts val="300"/>
+              </a:spcAft>
+              <a:buNone/>
+            </a:pPr>
+            <a:r>
+              <a:rPr lang="en-US" sz="1300" dirty="0">
+                <a:solidFill>
+                  <a:srgbClr val="1C2833"/>
+                </a:solidFill>
+                <a:latin typeface="Georgia" pitchFamily="34" charset="0"/>
+                <a:ea typeface="Georgia" pitchFamily="34" charset="-122"/>
+                <a:cs typeface="Georgia" pitchFamily="34" charset="-120"/>
+              </a:rPr>
+              <a:t>:</a:t>
+            </a:r>
+            <a:endParaRPr lang="en-US" sz="1300" dirty="0"/>
+          </a:p>
+        </p:txBody>
+      </p:sp>
+      <p:sp>
+        <p:nvSpPr>
+          <p:cNvPr id="8" name="Text 6"/>
+          <p:cNvSpPr/>
+          <p:nvPr/>
+        </p:nvSpPr>
+        <p:spPr>
+          <a:xfrm>
+            <a:off x="692051" y="1631305"/>
+            <a:ext cx="7973389" cy="250031"/>
+          </a:xfrm>
+          <a:prstGeom prst="rect">
+            <a:avLst/>
+          </a:prstGeom>
+          <a:noFill/>
+          <a:ln/>
+        </p:spPr>
+        <p:txBody>
+          <a:bodyPr wrap="square" lIns="0" tIns="0" rIns="0" bIns="0" rtlCol="0" anchor="t"/>
+          <a:lstStyle/>
+          <a:p>
+            <a:pPr algn="l" indent="0" marL="0">
+              <a:lnSpc>
+                <a:spcPts val="1820"/>
+              </a:lnSpc>
+              <a:spcBef>
+                <a:spcPts val="300"/>
+              </a:spcBef>
+              <a:spcAft>
+                <a:spcPts val="300"/>
+              </a:spcAft>
+              <a:buNone/>
+            </a:pPr>
+            <a:r>
+              <a:rPr lang="en-US" sz="1300" dirty="0">
+                <a:solidFill>
+                  <a:srgbClr val="1C2833"/>
+                </a:solidFill>
+                <a:latin typeface="Georgia" pitchFamily="34" charset="0"/>
+                <a:ea typeface="Georgia" pitchFamily="34" charset="-122"/>
+                <a:cs typeface="Georgia" pitchFamily="34" charset="-120"/>
+              </a:rPr>
+              <a:t>Pick a base </a:t>
+            </a:r>
+            <a:pPr algn="l" indent="0" marL="0">
+              <a:lnSpc>
+                <a:spcPts val="1820"/>
+              </a:lnSpc>
+              <a:spcBef>
+                <a:spcPts val="300"/>
+              </a:spcBef>
+              <a:spcAft>
+                <a:spcPts val="300"/>
+              </a:spcAft>
+              <a:buNone/>
+            </a:pPr>
+            <a:r>
+              <a:rPr lang="en-US" sz="1300" i="1" dirty="0">
+                <a:solidFill>
+                  <a:srgbClr val="1C2833"/>
+                </a:solidFill>
+                <a:latin typeface="Georgia" pitchFamily="34" charset="0"/>
+                <a:ea typeface="Georgia" pitchFamily="34" charset="-122"/>
+                <a:cs typeface="Georgia" pitchFamily="34" charset="-120"/>
+              </a:rPr>
+              <a:t>B</a:t>
+            </a:r>
+            <a:pPr algn="l" indent="0" marL="0">
+              <a:lnSpc>
+                <a:spcPts val="1820"/>
+              </a:lnSpc>
+              <a:spcBef>
+                <a:spcPts val="300"/>
+              </a:spcBef>
+              <a:spcAft>
+                <a:spcPts val="300"/>
+              </a:spcAft>
+              <a:buNone/>
+            </a:pPr>
+            <a:r>
+              <a:rPr lang="en-US" sz="1300" dirty="0">
+                <a:solidFill>
+                  <a:srgbClr val="1C2833"/>
+                </a:solidFill>
+                <a:latin typeface="Georgia" pitchFamily="34" charset="0"/>
+                <a:ea typeface="Georgia" pitchFamily="34" charset="-122"/>
+                <a:cs typeface="Georgia" pitchFamily="34" charset="-120"/>
+              </a:rPr>
+              <a:t> such that </a:t>
+            </a:r>
+            <a:pPr algn="l" indent="0" marL="0">
+              <a:lnSpc>
+                <a:spcPts val="1820"/>
+              </a:lnSpc>
+              <a:spcBef>
+                <a:spcPts val="300"/>
+              </a:spcBef>
+              <a:spcAft>
+                <a:spcPts val="300"/>
+              </a:spcAft>
+              <a:buNone/>
+            </a:pPr>
+            <a:r>
+              <a:rPr lang="en-US" sz="1300" i="1" dirty="0">
+                <a:solidFill>
+                  <a:srgbClr val="1C2833"/>
+                </a:solidFill>
+                <a:latin typeface="Georgia" pitchFamily="34" charset="0"/>
+                <a:ea typeface="Georgia" pitchFamily="34" charset="-122"/>
+                <a:cs typeface="Georgia" pitchFamily="34" charset="-120"/>
+              </a:rPr>
+              <a:t>B &gt; S</a:t>
+            </a:r>
+            <a:pPr algn="l" indent="0" marL="0">
+              <a:lnSpc>
+                <a:spcPts val="1820"/>
+              </a:lnSpc>
+              <a:spcBef>
+                <a:spcPts val="300"/>
+              </a:spcBef>
+              <a:spcAft>
+                <a:spcPts val="300"/>
+              </a:spcAft>
+              <a:buNone/>
+            </a:pPr>
+            <a:r>
+              <a:rPr lang="en-US" sz="1300" dirty="0">
+                <a:solidFill>
+                  <a:srgbClr val="1C2833"/>
+                </a:solidFill>
+                <a:latin typeface="Georgia" pitchFamily="34" charset="0"/>
+                <a:ea typeface="Georgia" pitchFamily="34" charset="-122"/>
+                <a:cs typeface="Georgia" pitchFamily="34" charset="-120"/>
+              </a:rPr>
+              <a:t> and </a:t>
+            </a:r>
+            <a:pPr algn="l" indent="0" marL="0">
+              <a:lnSpc>
+                <a:spcPts val="1820"/>
+              </a:lnSpc>
+              <a:spcBef>
+                <a:spcPts val="300"/>
+              </a:spcBef>
+              <a:spcAft>
+                <a:spcPts val="300"/>
+              </a:spcAft>
+              <a:buNone/>
+            </a:pPr>
+            <a:r>
+              <a:rPr lang="en-US" sz="1300" i="1" dirty="0">
+                <a:solidFill>
+                  <a:srgbClr val="1C2833"/>
+                </a:solidFill>
+                <a:latin typeface="Georgia" pitchFamily="34" charset="0"/>
+                <a:ea typeface="Georgia" pitchFamily="34" charset="-122"/>
+                <a:cs typeface="Georgia" pitchFamily="34" charset="-120"/>
+              </a:rPr>
+              <a:t>B</a:t>
+            </a:r>
+            <a:pPr algn="l" indent="0" marL="0">
+              <a:lnSpc>
+                <a:spcPts val="1820"/>
+              </a:lnSpc>
+              <a:spcBef>
+                <a:spcPts val="300"/>
+              </a:spcBef>
+              <a:spcAft>
+                <a:spcPts val="300"/>
+              </a:spcAft>
+              <a:buNone/>
+            </a:pPr>
+            <a:r>
+              <a:rPr lang="en-US" sz="1300" dirty="0">
+                <a:solidFill>
+                  <a:srgbClr val="1C2833"/>
+                </a:solidFill>
+                <a:latin typeface="Georgia" pitchFamily="34" charset="0"/>
+                <a:ea typeface="Georgia" pitchFamily="34" charset="-122"/>
+                <a:cs typeface="Georgia" pitchFamily="34" charset="-120"/>
+              </a:rPr>
+              <a:t> is a power of 10 (so 100, 1000, 10 000, ...).</a:t>
+            </a:r>
+            <a:endParaRPr lang="en-US" sz="1300" dirty="0"/>
+          </a:p>
+        </p:txBody>
+      </p:sp>
+      <p:sp>
+        <p:nvSpPr>
+          <p:cNvPr id="9" name="Text 7"/>
+          <p:cNvSpPr/>
+          <p:nvPr/>
+        </p:nvSpPr>
+        <p:spPr>
+          <a:xfrm>
+            <a:off x="692051" y="1919436"/>
+            <a:ext cx="7973389" cy="230981"/>
+          </a:xfrm>
+          <a:prstGeom prst="rect">
+            <a:avLst/>
+          </a:prstGeom>
+          <a:noFill/>
+          <a:ln/>
+        </p:spPr>
+        <p:txBody>
+          <a:bodyPr wrap="square" lIns="0" tIns="0" rIns="0" bIns="0" rtlCol="0" anchor="t"/>
+          <a:lstStyle/>
+          <a:p>
+            <a:pPr algn="l" indent="0" marL="0">
+              <a:lnSpc>
+                <a:spcPts val="1820"/>
+              </a:lnSpc>
+              <a:spcBef>
+                <a:spcPts val="300"/>
+              </a:spcBef>
+              <a:spcAft>
+                <a:spcPts val="300"/>
+              </a:spcAft>
+              <a:buNone/>
+            </a:pPr>
+            <a:r>
+              <a:rPr lang="en-US" sz="1300" i="1" dirty="0">
+                <a:solidFill>
+                  <a:srgbClr val="1C2833"/>
+                </a:solidFill>
+                <a:latin typeface="Georgia" pitchFamily="34" charset="0"/>
+                <a:ea typeface="Georgia" pitchFamily="34" charset="-122"/>
+                <a:cs typeface="Georgia" pitchFamily="34" charset="-120"/>
+              </a:rPr>
+              <a:t>Compute the complement of S to B (using Nikhilam) — call it C.</a:t>
+            </a:r>
+            <a:endParaRPr lang="en-US" sz="1300" dirty="0"/>
+          </a:p>
+        </p:txBody>
+      </p:sp>
+      <p:sp>
+        <p:nvSpPr>
+          <p:cNvPr id="10" name="Text 8"/>
+          <p:cNvSpPr/>
+          <p:nvPr/>
+        </p:nvSpPr>
+        <p:spPr>
+          <a:xfrm>
+            <a:off x="692051" y="2188518"/>
+            <a:ext cx="7973389" cy="250031"/>
+          </a:xfrm>
+          <a:prstGeom prst="rect">
+            <a:avLst/>
+          </a:prstGeom>
+          <a:noFill/>
+          <a:ln/>
+        </p:spPr>
+        <p:txBody>
+          <a:bodyPr wrap="square" lIns="0" tIns="0" rIns="0" bIns="0" rtlCol="0" anchor="t"/>
+          <a:lstStyle/>
+          <a:p>
+            <a:pPr algn="l" indent="0" marL="0">
+              <a:lnSpc>
+                <a:spcPts val="1820"/>
+              </a:lnSpc>
+              <a:spcBef>
+                <a:spcPts val="300"/>
+              </a:spcBef>
+              <a:spcAft>
+                <a:spcPts val="300"/>
+              </a:spcAft>
+              <a:buNone/>
+            </a:pPr>
+            <a:r>
+              <a:rPr lang="en-US" sz="1300" dirty="0">
+                <a:solidFill>
+                  <a:srgbClr val="1C2833"/>
+                </a:solidFill>
+                <a:latin typeface="Georgia" pitchFamily="34" charset="0"/>
+                <a:ea typeface="Georgia" pitchFamily="34" charset="-122"/>
+                <a:cs typeface="Georgia" pitchFamily="34" charset="-120"/>
+              </a:rPr>
+              <a:t>Compute </a:t>
+            </a:r>
+            <a:pPr algn="l" indent="0" marL="0">
+              <a:lnSpc>
+                <a:spcPts val="1820"/>
+              </a:lnSpc>
+              <a:spcBef>
+                <a:spcPts val="300"/>
+              </a:spcBef>
+              <a:spcAft>
+                <a:spcPts val="300"/>
+              </a:spcAft>
+              <a:buNone/>
+            </a:pPr>
+            <a:r>
+              <a:rPr lang="en-US" sz="1300" i="1" dirty="0">
+                <a:solidFill>
+                  <a:srgbClr val="1C2833"/>
+                </a:solidFill>
+                <a:latin typeface="Georgia" pitchFamily="34" charset="0"/>
+                <a:ea typeface="Georgia" pitchFamily="34" charset="-122"/>
+                <a:cs typeface="Georgia" pitchFamily="34" charset="-120"/>
+              </a:rPr>
+              <a:t>M − B</a:t>
+            </a:r>
+            <a:pPr algn="l" indent="0" marL="0">
+              <a:lnSpc>
+                <a:spcPts val="1820"/>
+              </a:lnSpc>
+              <a:spcBef>
+                <a:spcPts val="300"/>
+              </a:spcBef>
+              <a:spcAft>
+                <a:spcPts val="300"/>
+              </a:spcAft>
+              <a:buNone/>
+            </a:pPr>
+            <a:r>
+              <a:rPr lang="en-US" sz="1300" dirty="0">
+                <a:solidFill>
+                  <a:srgbClr val="1C2833"/>
+                </a:solidFill>
+                <a:latin typeface="Georgia" pitchFamily="34" charset="0"/>
+                <a:ea typeface="Georgia" pitchFamily="34" charset="-122"/>
+                <a:cs typeface="Georgia" pitchFamily="34" charset="-120"/>
+              </a:rPr>
+              <a:t> (which is easy, since B is a round number).</a:t>
+            </a:r>
+            <a:endParaRPr lang="en-US" sz="1300" dirty="0"/>
+          </a:p>
+        </p:txBody>
+      </p:sp>
+      <p:sp>
+        <p:nvSpPr>
+          <p:cNvPr id="11" name="Text 9"/>
+          <p:cNvSpPr/>
+          <p:nvPr/>
+        </p:nvSpPr>
+        <p:spPr>
+          <a:xfrm>
+            <a:off x="692051" y="2476649"/>
+            <a:ext cx="7973389" cy="250031"/>
+          </a:xfrm>
+          <a:prstGeom prst="rect">
+            <a:avLst/>
+          </a:prstGeom>
+          <a:noFill/>
+          <a:ln/>
+        </p:spPr>
+        <p:txBody>
+          <a:bodyPr wrap="square" lIns="0" tIns="0" rIns="0" bIns="0" rtlCol="0" anchor="t"/>
+          <a:lstStyle/>
+          <a:p>
+            <a:pPr algn="l" indent="0" marL="0">
+              <a:lnSpc>
+                <a:spcPts val="1820"/>
+              </a:lnSpc>
+              <a:spcBef>
+                <a:spcPts val="300"/>
+              </a:spcBef>
+              <a:spcAft>
+                <a:spcPts val="300"/>
+              </a:spcAft>
+              <a:buNone/>
+            </a:pPr>
+            <a:r>
+              <a:rPr lang="en-US" sz="1300" dirty="0">
+                <a:solidFill>
+                  <a:srgbClr val="1C2833"/>
+                </a:solidFill>
+                <a:latin typeface="Georgia" pitchFamily="34" charset="0"/>
+                <a:ea typeface="Georgia" pitchFamily="34" charset="-122"/>
+                <a:cs typeface="Georgia" pitchFamily="34" charset="-120"/>
+              </a:rPr>
+              <a:t>Answer = </a:t>
+            </a:r>
+            <a:pPr algn="l" indent="0" marL="0">
+              <a:lnSpc>
+                <a:spcPts val="1820"/>
+              </a:lnSpc>
+              <a:spcBef>
+                <a:spcPts val="300"/>
+              </a:spcBef>
+              <a:spcAft>
+                <a:spcPts val="300"/>
+              </a:spcAft>
+              <a:buNone/>
+            </a:pPr>
+            <a:r>
+              <a:rPr lang="en-US" sz="1300" i="1" dirty="0">
+                <a:solidFill>
+                  <a:srgbClr val="1C2833"/>
+                </a:solidFill>
+                <a:latin typeface="Georgia" pitchFamily="34" charset="0"/>
+                <a:ea typeface="Georgia" pitchFamily="34" charset="-122"/>
+                <a:cs typeface="Georgia" pitchFamily="34" charset="-120"/>
+              </a:rPr>
+              <a:t>(M − B) + C</a:t>
+            </a:r>
+            <a:pPr algn="l" indent="0" marL="0">
+              <a:lnSpc>
+                <a:spcPts val="1820"/>
+              </a:lnSpc>
+              <a:spcBef>
+                <a:spcPts val="300"/>
+              </a:spcBef>
+              <a:spcAft>
+                <a:spcPts val="300"/>
+              </a:spcAft>
+              <a:buNone/>
+            </a:pPr>
+            <a:r>
+              <a:rPr lang="en-US" sz="1300" dirty="0">
+                <a:solidFill>
+                  <a:srgbClr val="1C2833"/>
+                </a:solidFill>
+                <a:latin typeface="Georgia" pitchFamily="34" charset="0"/>
+                <a:ea typeface="Georgia" pitchFamily="34" charset="-122"/>
+                <a:cs typeface="Georgia" pitchFamily="34" charset="-120"/>
+              </a:rPr>
+              <a:t>.</a:t>
+            </a:r>
+            <a:endParaRPr lang="en-US" sz="1300" dirty="0"/>
+          </a:p>
+        </p:txBody>
+      </p:sp>
+      <p:sp>
+        <p:nvSpPr>
+          <p:cNvPr id="12" name="Text 10"/>
+          <p:cNvSpPr/>
+          <p:nvPr/>
+        </p:nvSpPr>
+        <p:spPr>
+          <a:xfrm>
+            <a:off x="692051" y="2764780"/>
+            <a:ext cx="7973389" cy="230981"/>
+          </a:xfrm>
+          <a:prstGeom prst="rect">
+            <a:avLst/>
+          </a:prstGeom>
+          <a:noFill/>
+          <a:ln/>
+        </p:spPr>
+        <p:txBody>
+          <a:bodyPr wrap="square" lIns="0" tIns="0" rIns="0" bIns="0" rtlCol="0" anchor="t"/>
+          <a:lstStyle/>
+          <a:p>
+            <a:pPr algn="l" indent="0" marL="0">
+              <a:lnSpc>
+                <a:spcPts val="1820"/>
+              </a:lnSpc>
+              <a:spcBef>
+                <a:spcPts val="300"/>
+              </a:spcBef>
+              <a:spcAft>
+                <a:spcPts val="300"/>
+              </a:spcAft>
+              <a:buNone/>
+            </a:pPr>
+            <a:r>
+              <a:rPr lang="en-US" sz="1300" dirty="0">
+                <a:solidFill>
+                  <a:srgbClr val="1C2833"/>
+                </a:solidFill>
+                <a:latin typeface="Georgia" pitchFamily="34" charset="0"/>
+                <a:ea typeface="Georgia" pitchFamily="34" charset="-122"/>
+                <a:cs typeface="Georgia" pitchFamily="34" charset="-120"/>
+              </a:rPr>
+              <a:t>Algebraic identity: </a:t>
+            </a:r>
+            <a:pPr algn="l" indent="0" marL="0">
+              <a:lnSpc>
+                <a:spcPts val="1820"/>
+              </a:lnSpc>
+              <a:spcBef>
+                <a:spcPts val="300"/>
+              </a:spcBef>
+              <a:spcAft>
+                <a:spcPts val="300"/>
+              </a:spcAft>
+              <a:buNone/>
+            </a:pPr>
+            <a:r>
+              <a:rPr lang="en-US" sz="1300" b="1" i="1" dirty="0">
+                <a:solidFill>
+                  <a:srgbClr val="1C2833"/>
+                </a:solidFill>
+                <a:latin typeface="Georgia" pitchFamily="34" charset="0"/>
+                <a:ea typeface="Georgia" pitchFamily="34" charset="-122"/>
+                <a:cs typeface="Georgia" pitchFamily="34" charset="-120"/>
+              </a:rPr>
+              <a:t>M − S = (M − B) + (B − S)</a:t>
+            </a:r>
+            <a:endParaRPr lang="en-US" sz="1300" dirty="0"/>
+          </a:p>
+        </p:txBody>
+      </p:sp>
+      <p:sp>
+        <p:nvSpPr>
+          <p:cNvPr id="13" name="Text 11"/>
+          <p:cNvSpPr/>
+          <p:nvPr/>
+        </p:nvSpPr>
+        <p:spPr>
+          <a:xfrm>
+            <a:off x="692051" y="3033861"/>
+            <a:ext cx="7973389" cy="250031"/>
+          </a:xfrm>
+          <a:prstGeom prst="rect">
+            <a:avLst/>
+          </a:prstGeom>
+          <a:noFill/>
+          <a:ln/>
+        </p:spPr>
+        <p:txBody>
+          <a:bodyPr wrap="square" lIns="0" tIns="0" rIns="0" bIns="0" rtlCol="0" anchor="t"/>
+          <a:lstStyle/>
+          <a:p>
+            <a:pPr algn="l" indent="0" marL="0">
+              <a:lnSpc>
+                <a:spcPts val="1820"/>
+              </a:lnSpc>
+              <a:spcBef>
+                <a:spcPts val="300"/>
+              </a:spcBef>
+              <a:spcAft>
+                <a:spcPts val="300"/>
+              </a:spcAft>
+              <a:buNone/>
+            </a:pPr>
+            <a:r>
+              <a:rPr lang="en-US" sz="1300" dirty="0">
+                <a:solidFill>
+                  <a:srgbClr val="1C2833"/>
+                </a:solidFill>
+                <a:latin typeface="Georgia" pitchFamily="34" charset="0"/>
+                <a:ea typeface="Georgia" pitchFamily="34" charset="-122"/>
+                <a:cs typeface="Georgia" pitchFamily="34" charset="-120"/>
+              </a:rPr>
+              <a:t>Verify by checking: </a:t>
+            </a:r>
+            <a:pPr algn="l" indent="0" marL="0">
+              <a:lnSpc>
+                <a:spcPts val="1820"/>
+              </a:lnSpc>
+              <a:spcBef>
+                <a:spcPts val="300"/>
+              </a:spcBef>
+              <a:spcAft>
+                <a:spcPts val="300"/>
+              </a:spcAft>
+              <a:buNone/>
+            </a:pPr>
+            <a:r>
+              <a:rPr lang="en-US" sz="1300" i="1" dirty="0">
+                <a:solidFill>
+                  <a:srgbClr val="1C2833"/>
+                </a:solidFill>
+                <a:latin typeface="Georgia" pitchFamily="34" charset="0"/>
+                <a:ea typeface="Georgia" pitchFamily="34" charset="-122"/>
+                <a:cs typeface="Georgia" pitchFamily="34" charset="-120"/>
+              </a:rPr>
+              <a:t>M − S</a:t>
+            </a:r>
+            <a:pPr algn="l" indent="0" marL="0">
+              <a:lnSpc>
+                <a:spcPts val="1820"/>
+              </a:lnSpc>
+              <a:spcBef>
+                <a:spcPts val="300"/>
+              </a:spcBef>
+              <a:spcAft>
+                <a:spcPts val="300"/>
+              </a:spcAft>
+              <a:buNone/>
+            </a:pPr>
+            <a:r>
+              <a:rPr lang="en-US" sz="1300" dirty="0">
+                <a:solidFill>
+                  <a:srgbClr val="1C2833"/>
+                </a:solidFill>
+                <a:latin typeface="Georgia" pitchFamily="34" charset="0"/>
+                <a:ea typeface="Georgia" pitchFamily="34" charset="-122"/>
+                <a:cs typeface="Georgia" pitchFamily="34" charset="-120"/>
+              </a:rPr>
+              <a:t> should equal your answer.</a:t>
+            </a:r>
+            <a:endParaRPr lang="en-US" sz="1300" dirty="0"/>
+          </a:p>
+        </p:txBody>
+      </p:sp>
+      <p:sp>
+        <p:nvSpPr>
+          <p:cNvPr id="14" name="Text 12"/>
+          <p:cNvSpPr/>
+          <p:nvPr/>
+        </p:nvSpPr>
+        <p:spPr>
+          <a:xfrm>
+            <a:off x="692051" y="3321993"/>
+            <a:ext cx="7973389" cy="230981"/>
+          </a:xfrm>
+          <a:prstGeom prst="rect">
+            <a:avLst/>
+          </a:prstGeom>
+          <a:noFill/>
+          <a:ln/>
+        </p:spPr>
+        <p:txBody>
+          <a:bodyPr wrap="square" lIns="0" tIns="0" rIns="0" bIns="0" rtlCol="0" anchor="t"/>
+          <a:lstStyle/>
+          <a:p>
+            <a:pPr algn="l" indent="0" marL="0">
+              <a:lnSpc>
+                <a:spcPts val="1820"/>
+              </a:lnSpc>
+              <a:spcBef>
+                <a:spcPts val="300"/>
+              </a:spcBef>
+              <a:spcAft>
+                <a:spcPts val="300"/>
+              </a:spcAft>
+              <a:buNone/>
+            </a:pPr>
+            <a:r>
+              <a:rPr lang="en-US" sz="1300" dirty="0">
+                <a:solidFill>
+                  <a:srgbClr val="1C2833"/>
+                </a:solidFill>
+                <a:latin typeface="Georgia" pitchFamily="34" charset="0"/>
+                <a:ea typeface="Georgia" pitchFamily="34" charset="-122"/>
+                <a:cs typeface="Georgia" pitchFamily="34" charset="-120"/>
+              </a:rPr>
+              <a:t>Example: 8243 − 567 = (8243 − 1000) + 433 = 7243 + 433 = </a:t>
+            </a:r>
+            <a:pPr algn="l" indent="0" marL="0">
+              <a:lnSpc>
+                <a:spcPts val="1820"/>
+              </a:lnSpc>
+              <a:spcBef>
+                <a:spcPts val="300"/>
+              </a:spcBef>
+              <a:spcAft>
+                <a:spcPts val="300"/>
+              </a:spcAft>
+              <a:buNone/>
+            </a:pPr>
+            <a:r>
+              <a:rPr lang="en-US" sz="1300" b="1" i="1" dirty="0">
+                <a:solidFill>
+                  <a:srgbClr val="1C2833"/>
+                </a:solidFill>
+                <a:latin typeface="Georgia" pitchFamily="34" charset="0"/>
+                <a:ea typeface="Georgia" pitchFamily="34" charset="-122"/>
+                <a:cs typeface="Georgia" pitchFamily="34" charset="-120"/>
+              </a:rPr>
+              <a:t>7676</a:t>
+            </a:r>
+            <a:pPr algn="l" indent="0" marL="0">
+              <a:lnSpc>
+                <a:spcPts val="1820"/>
+              </a:lnSpc>
+              <a:spcBef>
+                <a:spcPts val="300"/>
+              </a:spcBef>
+              <a:spcAft>
+                <a:spcPts val="300"/>
+              </a:spcAft>
+              <a:buNone/>
+            </a:pPr>
+            <a:r>
+              <a:rPr lang="en-US" sz="1300" dirty="0">
+                <a:solidFill>
+                  <a:srgbClr val="1C2833"/>
+                </a:solidFill>
+                <a:latin typeface="Georgia" pitchFamily="34" charset="0"/>
+                <a:ea typeface="Georgia" pitchFamily="34" charset="-122"/>
+                <a:cs typeface="Georgia" pitchFamily="34" charset="-120"/>
+              </a:rPr>
+              <a:t>.</a:t>
+            </a:r>
+            <a:endParaRPr lang="en-US" sz="1300" dirty="0"/>
+          </a:p>
+        </p:txBody>
+      </p:sp>
+      <p:sp>
+        <p:nvSpPr>
+          <p:cNvPr id="15" name="Text 13"/>
+          <p:cNvSpPr/>
+          <p:nvPr/>
+        </p:nvSpPr>
+        <p:spPr>
+          <a:xfrm>
+            <a:off x="406301" y="4434929"/>
+            <a:ext cx="8498026" cy="213271"/>
+          </a:xfrm>
+          <a:prstGeom prst="rect">
+            <a:avLst/>
+          </a:prstGeom>
+          <a:noFill/>
+          <a:ln/>
+        </p:spPr>
+        <p:txBody>
+          <a:bodyPr wrap="square" lIns="0" tIns="0" rIns="0" bIns="0" rtlCol="0" anchor="t"/>
+          <a:lstStyle/>
+          <a:p>
+            <a:pPr algn="l" indent="0" marL="0">
+              <a:lnSpc>
+                <a:spcPts val="1680"/>
+              </a:lnSpc>
+              <a:spcBef>
+                <a:spcPts val="300"/>
+              </a:spcBef>
+              <a:spcAft>
+                <a:spcPts val="300"/>
+              </a:spcAft>
+              <a:buNone/>
+            </a:pPr>
+            <a:r>
+              <a:rPr lang="en-US" sz="1200" dirty="0">
+                <a:solidFill>
+                  <a:srgbClr val="1C2833"/>
+                </a:solidFill>
+                <a:latin typeface="Arial" pitchFamily="34" charset="0"/>
+                <a:ea typeface="Arial" pitchFamily="34" charset="-122"/>
+                <a:cs typeface="Arial" pitchFamily="34" charset="-120"/>
+              </a:rPr>
+              <a:t>Middle ·  · IKS Curriculum</a:t>
+            </a:r>
+            <a:endParaRPr lang="en-US" sz="1200" dirty="0"/>
+          </a:p>
+        </p:txBody>
+      </p:sp>
+    </p:spTree>
+  </p:cSld>
+  <p:clrMapOvr>
+    <a:masterClrMapping/>
+  </p:clrMapOvr>
+</p:sld>
+</file>
+
+<file path=ppt/slides/slide15.xml><?xml version="1.0" encoding="utf-8"?>
+<p:sld xmlns:a="http://schemas.openxmlformats.org/drawingml/2006/main" xmlns:r="http://schemas.openxmlformats.org/officeDocument/2006/relationships" xmlns:p="http://schemas.openxmlformats.org/presentationml/2006/main">
+  <p:cSld name="Slide 15">
+    <p:bg>
+      <p:bgPr>
+        <a:solidFill>
+          <a:srgbClr val="FFFFFF"/>
+        </a:solidFill>
+      </p:bgPr>
+    </p:bg>
+    <p:spTree>
+      <p:nvGrpSpPr>
+        <p:cNvPr id="1" name=""/>
+        <p:cNvGrpSpPr/>
+        <p:nvPr/>
+      </p:nvGrpSpPr>
+      <p:grpSpPr>
+        <a:xfrm>
+          <a:off x="0" y="0"/>
+          <a:ext cx="0" cy="0"/>
+          <a:chOff x="0" y="0"/>
+          <a:chExt cx="0" cy="0"/>
+        </a:xfrm>
+      </p:grpSpPr>
+      <p:sp>
+        <p:nvSpPr>
+          <p:cNvPr id="2" name="Text 0"/>
+          <p:cNvSpPr/>
+          <p:nvPr/>
+        </p:nvSpPr>
+        <p:spPr>
+          <a:xfrm>
+            <a:off x="0" y="0"/>
+            <a:ext cx="9144000" cy="101501"/>
+          </a:xfrm>
+          <a:prstGeom prst="rect">
+            <a:avLst/>
+          </a:prstGeom>
+          <a:solidFill>
+            <a:srgbClr val="277884"/>
+          </a:solidFill>
+          <a:ln/>
+        </p:spPr>
+        <p:txBody>
+          <a:bodyPr wrap="square" rtlCol="0" anchor="ctr"/>
+          <a:lstStyle/>
+          <a:p>
+            <a:pPr indent="0" marL="0">
+              <a:buNone/>
+            </a:pPr>
+            <a:endParaRPr lang="en-US" dirty="0"/>
+          </a:p>
+        </p:txBody>
+      </p:sp>
+      <p:sp>
+        <p:nvSpPr>
+          <p:cNvPr id="3" name="Text 1"/>
+          <p:cNvSpPr/>
+          <p:nvPr/>
+        </p:nvSpPr>
+        <p:spPr>
+          <a:xfrm>
+            <a:off x="406301" y="457051"/>
+            <a:ext cx="8498026" cy="274290"/>
+          </a:xfrm>
+          <a:prstGeom prst="rect">
+            <a:avLst/>
+          </a:prstGeom>
+          <a:noFill/>
+          <a:ln/>
+        </p:spPr>
+        <p:txBody>
+          <a:bodyPr wrap="square" lIns="0" tIns="0" rIns="0" bIns="0" rtlCol="0" anchor="t"/>
+          <a:lstStyle/>
+          <a:p>
+            <a:pPr algn="l" indent="0" marL="0">
+              <a:lnSpc>
+                <a:spcPts val="2160"/>
+              </a:lnSpc>
+              <a:spcBef>
+                <a:spcPts val="600"/>
+              </a:spcBef>
+              <a:spcAft>
+                <a:spcPts val="800"/>
+              </a:spcAft>
+              <a:buNone/>
+            </a:pPr>
+            <a:r>
+              <a:rPr lang="en-US" sz="1800" b="1" dirty="0">
+                <a:solidFill>
+                  <a:srgbClr val="FE4447"/>
+                </a:solidFill>
+                <a:latin typeface="Georgia" pitchFamily="34" charset="0"/>
+                <a:ea typeface="Georgia" pitchFamily="34" charset="-122"/>
+                <a:cs typeface="Georgia" pitchFamily="34" charset="-120"/>
+              </a:rPr>
+              <a:t>Homework</a:t>
+            </a:r>
+            <a:endParaRPr lang="en-US" sz="1800" dirty="0"/>
+          </a:p>
+        </p:txBody>
+      </p:sp>
+      <p:sp>
+        <p:nvSpPr>
+          <p:cNvPr id="4" name="Text 2"/>
+          <p:cNvSpPr/>
+          <p:nvPr/>
+        </p:nvSpPr>
+        <p:spPr>
+          <a:xfrm>
+            <a:off x="634901" y="883593"/>
+            <a:ext cx="8102798" cy="1988344"/>
+          </a:xfrm>
+          <a:prstGeom prst="rect">
+            <a:avLst/>
+          </a:prstGeom>
+          <a:noFill/>
+          <a:ln/>
+        </p:spPr>
+        <p:txBody>
+          <a:bodyPr wrap="square" lIns="0" tIns="0" rIns="0" bIns="0" rtlCol="0" anchor="t"/>
+          <a:lstStyle/>
+          <a:p>
+            <a:pPr algn="l" marL="342900" indent="-342900">
+              <a:lnSpc>
+                <a:spcPts val="1620"/>
+              </a:lnSpc>
+              <a:spcAft>
+                <a:spcPts val="300"/>
+              </a:spcAft>
+              <a:buSzPct val="100000"/>
+              <a:buChar char="•"/>
+            </a:pPr>
+            <a:r>
+              <a:rPr lang="en-US" sz="1200" dirty="0">
+                <a:solidFill>
+                  <a:srgbClr val="1C2833"/>
+                </a:solidFill>
+                <a:latin typeface="Arial" pitchFamily="34" charset="0"/>
+                <a:ea typeface="Arial" pitchFamily="34" charset="-122"/>
+                <a:cs typeface="Arial" pitchFamily="34" charset="-120"/>
+              </a:rPr>
+              <a:t>Solve 6 mixed subtractions using the combined method:</a:t>
+            </a:r>
+            <a:endParaRPr lang="en-US" sz="1200" dirty="0"/>
+          </a:p>
+          <a:p>
+            <a:pPr algn="l" marL="342900" indent="-342900">
+              <a:lnSpc>
+                <a:spcPts val="1620"/>
+              </a:lnSpc>
+              <a:spcAft>
+                <a:spcPts val="300"/>
+              </a:spcAft>
+              <a:buSzPct val="100000"/>
+              <a:buChar char="•"/>
+            </a:pPr>
+            <a:r>
+              <a:rPr lang="en-US" sz="1200" dirty="0">
+                <a:solidFill>
+                  <a:srgbClr val="1C2833"/>
+                </a:solidFill>
+                <a:latin typeface="Arial" pitchFamily="34" charset="0"/>
+                <a:ea typeface="Arial" pitchFamily="34" charset="-122"/>
+                <a:cs typeface="Arial" pitchFamily="34" charset="-120"/>
+              </a:rPr>
+              <a:t>7234 − 587 (base 1000)</a:t>
+            </a:r>
+            <a:endParaRPr lang="en-US" sz="1200" dirty="0"/>
+          </a:p>
+          <a:p>
+            <a:pPr algn="l" marL="342900" indent="-342900">
+              <a:lnSpc>
+                <a:spcPts val="1620"/>
+              </a:lnSpc>
+              <a:spcAft>
+                <a:spcPts val="300"/>
+              </a:spcAft>
+              <a:buSzPct val="100000"/>
+              <a:buChar char="•"/>
+            </a:pPr>
+            <a:r>
+              <a:rPr lang="en-US" sz="1200" dirty="0">
+                <a:solidFill>
+                  <a:srgbClr val="1C2833"/>
+                </a:solidFill>
+                <a:latin typeface="Arial" pitchFamily="34" charset="0"/>
+                <a:ea typeface="Arial" pitchFamily="34" charset="-122"/>
+                <a:cs typeface="Arial" pitchFamily="34" charset="-120"/>
+              </a:rPr>
+              <a:t>9 612 − 3 458 (base 10 000)</a:t>
+            </a:r>
+            <a:endParaRPr lang="en-US" sz="1200" dirty="0"/>
+          </a:p>
+          <a:p>
+            <a:pPr algn="l" marL="342900" indent="-342900">
+              <a:lnSpc>
+                <a:spcPts val="1620"/>
+              </a:lnSpc>
+              <a:spcAft>
+                <a:spcPts val="300"/>
+              </a:spcAft>
+              <a:buSzPct val="100000"/>
+              <a:buChar char="•"/>
+            </a:pPr>
+            <a:r>
+              <a:rPr lang="en-US" sz="1200" dirty="0">
+                <a:solidFill>
+                  <a:srgbClr val="1C2833"/>
+                </a:solidFill>
+                <a:latin typeface="Arial" pitchFamily="34" charset="0"/>
+                <a:ea typeface="Arial" pitchFamily="34" charset="-122"/>
+                <a:cs typeface="Arial" pitchFamily="34" charset="-120"/>
+              </a:rPr>
+              <a:t>5 100 − 67 (base 100)</a:t>
+            </a:r>
+            <a:endParaRPr lang="en-US" sz="1200" dirty="0"/>
+          </a:p>
+          <a:p>
+            <a:pPr algn="l" marL="342900" indent="-342900">
+              <a:lnSpc>
+                <a:spcPts val="1620"/>
+              </a:lnSpc>
+              <a:spcAft>
+                <a:spcPts val="300"/>
+              </a:spcAft>
+              <a:buSzPct val="100000"/>
+              <a:buChar char="•"/>
+            </a:pPr>
+            <a:r>
+              <a:rPr lang="en-US" sz="1200" dirty="0">
+                <a:solidFill>
+                  <a:srgbClr val="1C2833"/>
+                </a:solidFill>
+                <a:latin typeface="Arial" pitchFamily="34" charset="0"/>
+                <a:ea typeface="Arial" pitchFamily="34" charset="-122"/>
+                <a:cs typeface="Arial" pitchFamily="34" charset="-120"/>
+              </a:rPr>
+              <a:t>13 405 − 2 850 (base 10 000)</a:t>
+            </a:r>
+            <a:endParaRPr lang="en-US" sz="1200" dirty="0"/>
+          </a:p>
+          <a:p>
+            <a:pPr algn="l" marL="342900" indent="-342900">
+              <a:lnSpc>
+                <a:spcPts val="1620"/>
+              </a:lnSpc>
+              <a:spcAft>
+                <a:spcPts val="300"/>
+              </a:spcAft>
+              <a:buSzPct val="100000"/>
+              <a:buChar char="•"/>
+            </a:pPr>
+            <a:r>
+              <a:rPr lang="en-US" sz="1200" dirty="0">
+                <a:solidFill>
+                  <a:srgbClr val="1C2833"/>
+                </a:solidFill>
+                <a:latin typeface="Arial" pitchFamily="34" charset="0"/>
+                <a:ea typeface="Arial" pitchFamily="34" charset="-122"/>
+                <a:cs typeface="Arial" pitchFamily="34" charset="-120"/>
+              </a:rPr>
+              <a:t>800 − 39 (base 100)</a:t>
+            </a:r>
+            <a:endParaRPr lang="en-US" sz="1200" dirty="0"/>
+          </a:p>
+          <a:p>
+            <a:pPr algn="l" marL="342900" indent="-342900">
+              <a:lnSpc>
+                <a:spcPts val="1620"/>
+              </a:lnSpc>
+              <a:spcAft>
+                <a:spcPts val="300"/>
+              </a:spcAft>
+              <a:buSzPct val="100000"/>
+              <a:buChar char="•"/>
+            </a:pPr>
+            <a:r>
+              <a:rPr lang="en-US" sz="1200" dirty="0">
+                <a:solidFill>
+                  <a:srgbClr val="1C2833"/>
+                </a:solidFill>
+                <a:latin typeface="Arial" pitchFamily="34" charset="0"/>
+                <a:ea typeface="Arial" pitchFamily="34" charset="-122"/>
+                <a:cs typeface="Arial" pitchFamily="34" charset="-120"/>
+              </a:rPr>
+              <a:t>25 000 − 4 999 (base 10 000)</a:t>
+            </a:r>
+            <a:endParaRPr lang="en-US" sz="1200" dirty="0"/>
+          </a:p>
+          <a:p>
+            <a:pPr algn="l" marL="342900" indent="-342900">
+              <a:lnSpc>
+                <a:spcPts val="1620"/>
+              </a:lnSpc>
+              <a:spcAft>
+                <a:spcPts val="300"/>
+              </a:spcAft>
+              <a:buSzPct val="100000"/>
+              <a:buChar char="•"/>
+            </a:pPr>
+            <a:r>
+              <a:rPr lang="en-US" sz="1200" dirty="0">
+                <a:solidFill>
+                  <a:srgbClr val="1C2833"/>
+                </a:solidFill>
+                <a:latin typeface="Arial" pitchFamily="34" charset="0"/>
+                <a:ea typeface="Arial" pitchFamily="34" charset="-122"/>
+                <a:cs typeface="Arial" pitchFamily="34" charset="-120"/>
+              </a:rPr>
+              <a:t>For each, show the base, the complement, and the final answer.</a:t>
+            </a:r>
+            <a:endParaRPr lang="en-US" sz="1200" dirty="0"/>
+          </a:p>
+        </p:txBody>
+      </p:sp>
+      <p:sp>
+        <p:nvSpPr>
+          <p:cNvPr id="5" name="Text 3"/>
+          <p:cNvSpPr/>
+          <p:nvPr/>
+        </p:nvSpPr>
+        <p:spPr>
+          <a:xfrm>
+            <a:off x="406301" y="4434929"/>
+            <a:ext cx="8498026" cy="213271"/>
+          </a:xfrm>
+          <a:prstGeom prst="rect">
+            <a:avLst/>
+          </a:prstGeom>
+          <a:noFill/>
+          <a:ln/>
+        </p:spPr>
+        <p:txBody>
+          <a:bodyPr wrap="square" lIns="0" tIns="0" rIns="0" bIns="0" rtlCol="0" anchor="t"/>
+          <a:lstStyle/>
+          <a:p>
+            <a:pPr algn="l" indent="0" marL="0">
+              <a:lnSpc>
+                <a:spcPts val="1680"/>
+              </a:lnSpc>
+              <a:spcBef>
+                <a:spcPts val="300"/>
+              </a:spcBef>
+              <a:spcAft>
+                <a:spcPts val="300"/>
+              </a:spcAft>
+              <a:buNone/>
+            </a:pPr>
+            <a:r>
+              <a:rPr lang="en-US" sz="1200" dirty="0">
+                <a:solidFill>
+                  <a:srgbClr val="1C2833"/>
+                </a:solidFill>
+                <a:latin typeface="Arial" pitchFamily="34" charset="0"/>
+                <a:ea typeface="Arial" pitchFamily="34" charset="-122"/>
+                <a:cs typeface="Arial" pitchFamily="34" charset="-120"/>
+              </a:rPr>
+              <a:t>Middle ·  · IKS Curriculum</a:t>
+            </a:r>
+            <a:endParaRPr lang="en-US" sz="1200" dirty="0"/>
+          </a:p>
+        </p:txBody>
+      </p:sp>
+    </p:spTree>
+  </p:cSld>
+  <p:clrMapOvr>
+    <a:masterClrMapping/>
+  </p:clrMapOvr>
+</p:sld>
+</file>
+
+<file path=ppt/slides/slide16.xml><?xml version="1.0" encoding="utf-8"?>
+<p:sld xmlns:a="http://schemas.openxmlformats.org/drawingml/2006/main" xmlns:r="http://schemas.openxmlformats.org/officeDocument/2006/relationships" xmlns:p="http://schemas.openxmlformats.org/presentationml/2006/main">
+  <p:cSld name="Slide 16">
+    <p:bg>
+      <p:bgPr>
+        <a:solidFill>
+          <a:srgbClr val="FFFFFF"/>
+        </a:solidFill>
+      </p:bgPr>
+    </p:bg>
+    <p:spTree>
+      <p:nvGrpSpPr>
+        <p:cNvPr id="1" name=""/>
+        <p:cNvGrpSpPr/>
+        <p:nvPr/>
+      </p:nvGrpSpPr>
+      <p:grpSpPr>
+        <a:xfrm>
+          <a:off x="0" y="0"/>
+          <a:ext cx="0" cy="0"/>
+          <a:chOff x="0" y="0"/>
+          <a:chExt cx="0" cy="0"/>
+        </a:xfrm>
+      </p:grpSpPr>
+      <p:sp>
+        <p:nvSpPr>
+          <p:cNvPr id="2" name="Text 0"/>
+          <p:cNvSpPr/>
+          <p:nvPr/>
+        </p:nvSpPr>
+        <p:spPr>
+          <a:xfrm>
+            <a:off x="0" y="0"/>
+            <a:ext cx="9144000" cy="101501"/>
+          </a:xfrm>
+          <a:prstGeom prst="rect">
+            <a:avLst/>
+          </a:prstGeom>
+          <a:solidFill>
+            <a:srgbClr val="277884"/>
+          </a:solidFill>
+          <a:ln/>
+        </p:spPr>
+        <p:txBody>
+          <a:bodyPr wrap="square" rtlCol="0" anchor="ctr"/>
+          <a:lstStyle/>
+          <a:p>
+            <a:pPr indent="0" marL="0">
+              <a:buNone/>
+            </a:pPr>
+            <a:endParaRPr lang="en-US" dirty="0"/>
+          </a:p>
+        </p:txBody>
+      </p:sp>
+      <p:sp>
+        <p:nvSpPr>
+          <p:cNvPr id="3" name="Text 1"/>
+          <p:cNvSpPr/>
+          <p:nvPr/>
+        </p:nvSpPr>
+        <p:spPr>
+          <a:xfrm>
+            <a:off x="406301" y="457051"/>
+            <a:ext cx="8498026" cy="274290"/>
+          </a:xfrm>
+          <a:prstGeom prst="rect">
+            <a:avLst/>
+          </a:prstGeom>
+          <a:noFill/>
+          <a:ln/>
+        </p:spPr>
+        <p:txBody>
+          <a:bodyPr wrap="square" lIns="0" tIns="0" rIns="0" bIns="0" rtlCol="0" anchor="t"/>
+          <a:lstStyle/>
+          <a:p>
+            <a:pPr algn="l" indent="0" marL="0">
+              <a:lnSpc>
+                <a:spcPts val="2160"/>
+              </a:lnSpc>
+              <a:spcBef>
+                <a:spcPts val="600"/>
+              </a:spcBef>
+              <a:spcAft>
+                <a:spcPts val="800"/>
+              </a:spcAft>
+              <a:buNone/>
+            </a:pPr>
+            <a:r>
+              <a:rPr lang="en-US" sz="1800" b="1" dirty="0">
+                <a:solidFill>
+                  <a:srgbClr val="FE4447"/>
+                </a:solidFill>
+                <a:latin typeface="Georgia" pitchFamily="34" charset="0"/>
+                <a:ea typeface="Georgia" pitchFamily="34" charset="-122"/>
+                <a:cs typeface="Georgia" pitchFamily="34" charset="-120"/>
+              </a:rPr>
+              <a:t>Differentiation</a:t>
+            </a:r>
+            <a:endParaRPr lang="en-US" sz="1800" dirty="0"/>
+          </a:p>
+        </p:txBody>
+      </p:sp>
+      <p:sp>
+        <p:nvSpPr>
+          <p:cNvPr id="4" name="Text 2"/>
+          <p:cNvSpPr/>
+          <p:nvPr/>
+        </p:nvSpPr>
+        <p:spPr>
+          <a:xfrm>
+            <a:off x="634901" y="883593"/>
+            <a:ext cx="8102798" cy="975122"/>
+          </a:xfrm>
+          <a:prstGeom prst="rect">
+            <a:avLst/>
+          </a:prstGeom>
+          <a:noFill/>
+          <a:ln/>
+        </p:spPr>
+        <p:txBody>
+          <a:bodyPr wrap="square" lIns="0" tIns="0" rIns="0" bIns="0" rtlCol="0" anchor="t"/>
+          <a:lstStyle/>
+          <a:p>
+            <a:pPr algn="l" marL="342900" indent="-342900">
+              <a:lnSpc>
+                <a:spcPts val="1620"/>
+              </a:lnSpc>
+              <a:spcAft>
+                <a:spcPts val="300"/>
+              </a:spcAft>
+              <a:buSzPct val="100000"/>
+              <a:buChar char="•"/>
+            </a:pPr>
+            <a:r>
+              <a:rPr lang="en-US" sz="1200" b="1" dirty="0">
+                <a:solidFill>
+                  <a:srgbClr val="1C2833"/>
+                </a:solidFill>
+                <a:latin typeface="Arial" pitchFamily="34" charset="0"/>
+                <a:ea typeface="Arial" pitchFamily="34" charset="-122"/>
+                <a:cs typeface="Arial" pitchFamily="34" charset="-120"/>
+              </a:rPr>
+              <a:t>Tier up:</a:t>
+            </a:r>
+            <a:pPr algn="l" indent="0" marL="0">
+              <a:lnSpc>
+                <a:spcPts val="1620"/>
+              </a:lnSpc>
+              <a:spcAft>
+                <a:spcPts val="300"/>
+              </a:spcAft>
+              <a:buNone/>
+            </a:pPr>
+            <a:r>
+              <a:rPr lang="en-US" sz="1200" dirty="0">
+                <a:solidFill>
+                  <a:srgbClr val="1C2833"/>
+                </a:solidFill>
+                <a:latin typeface="Arial" pitchFamily="34" charset="0"/>
+                <a:ea typeface="Arial" pitchFamily="34" charset="-122"/>
+                <a:cs typeface="Arial" pitchFamily="34" charset="-120"/>
+              </a:rPr>
+              <a:t> What if the subtrahend has </a:t>
+            </a:r>
+            <a:pPr algn="l" indent="0" marL="0">
+              <a:lnSpc>
+                <a:spcPts val="1620"/>
+              </a:lnSpc>
+              <a:spcAft>
+                <a:spcPts val="300"/>
+              </a:spcAft>
+              <a:buNone/>
+            </a:pPr>
+            <a:r>
+              <a:rPr lang="en-US" sz="1200" i="1" dirty="0">
+                <a:solidFill>
+                  <a:srgbClr val="1C2833"/>
+                </a:solidFill>
+                <a:latin typeface="Arial" pitchFamily="34" charset="0"/>
+                <a:ea typeface="Arial" pitchFamily="34" charset="-122"/>
+                <a:cs typeface="Arial" pitchFamily="34" charset="-120"/>
+              </a:rPr>
+              <a:t>more</a:t>
+            </a:r>
+            <a:pPr algn="l" indent="0" marL="0">
+              <a:lnSpc>
+                <a:spcPts val="1620"/>
+              </a:lnSpc>
+              <a:spcAft>
+                <a:spcPts val="300"/>
+              </a:spcAft>
+              <a:buNone/>
+            </a:pPr>
+            <a:r>
+              <a:rPr lang="en-US" sz="1200" dirty="0">
+                <a:solidFill>
+                  <a:srgbClr val="1C2833"/>
+                </a:solidFill>
+                <a:latin typeface="Arial" pitchFamily="34" charset="0"/>
+                <a:ea typeface="Arial" pitchFamily="34" charset="-122"/>
+                <a:cs typeface="Arial" pitchFamily="34" charset="-120"/>
+              </a:rPr>
+              <a:t> digits than the base needs? E.g. </a:t>
+            </a:r>
+            <a:pPr algn="l" indent="0" marL="0">
+              <a:lnSpc>
+                <a:spcPts val="1620"/>
+              </a:lnSpc>
+              <a:spcAft>
+                <a:spcPts val="300"/>
+              </a:spcAft>
+              <a:buNone/>
+            </a:pPr>
+            <a:r>
+              <a:rPr lang="en-US" sz="1200" dirty="0">
+                <a:solidFill>
+                  <a:srgbClr val="1C2833"/>
+                </a:solidFill>
+                <a:latin typeface="Arial" pitchFamily="34" charset="0"/>
+                <a:ea typeface="Arial" pitchFamily="34" charset="-122"/>
+                <a:cs typeface="Arial" pitchFamily="34" charset="-120"/>
+              </a:rPr>
+              <a:t>8243 − 5567</a:t>
+            </a:r>
+            <a:pPr algn="l" indent="0" marL="0">
+              <a:lnSpc>
+                <a:spcPts val="1620"/>
+              </a:lnSpc>
+              <a:spcAft>
+                <a:spcPts val="300"/>
+              </a:spcAft>
+              <a:buNone/>
+            </a:pPr>
+            <a:r>
+              <a:rPr lang="en-US" sz="1200" dirty="0">
+                <a:solidFill>
+                  <a:srgbClr val="1C2833"/>
+                </a:solidFill>
+                <a:latin typeface="Arial" pitchFamily="34" charset="0"/>
+                <a:ea typeface="Arial" pitchFamily="34" charset="-122"/>
+                <a:cs typeface="Arial" pitchFamily="34" charset="-120"/>
+              </a:rPr>
+              <a:t> — using base 10 000, complement of 5567 is 4433, and </a:t>
+            </a:r>
+            <a:pPr algn="l" indent="0" marL="0">
+              <a:lnSpc>
+                <a:spcPts val="1620"/>
+              </a:lnSpc>
+              <a:spcAft>
+                <a:spcPts val="300"/>
+              </a:spcAft>
+              <a:buNone/>
+            </a:pPr>
+            <a:r>
+              <a:rPr lang="en-US" sz="1200" dirty="0">
+                <a:solidFill>
+                  <a:srgbClr val="1C2833"/>
+                </a:solidFill>
+                <a:latin typeface="Arial" pitchFamily="34" charset="0"/>
+                <a:ea typeface="Arial" pitchFamily="34" charset="-122"/>
+                <a:cs typeface="Arial" pitchFamily="34" charset="-120"/>
+              </a:rPr>
+              <a:t>8243 − 10 000 = −1757</a:t>
+            </a:r>
+            <a:pPr algn="l" indent="0" marL="0">
+              <a:lnSpc>
+                <a:spcPts val="1620"/>
+              </a:lnSpc>
+              <a:spcAft>
+                <a:spcPts val="300"/>
+              </a:spcAft>
+              <a:buNone/>
+            </a:pPr>
+            <a:r>
+              <a:rPr lang="en-US" sz="1200" dirty="0">
+                <a:solidFill>
+                  <a:srgbClr val="1C2833"/>
+                </a:solidFill>
+                <a:latin typeface="Arial" pitchFamily="34" charset="0"/>
+                <a:ea typeface="Arial" pitchFamily="34" charset="-122"/>
+                <a:cs typeface="Arial" pitchFamily="34" charset="-120"/>
+              </a:rPr>
+              <a:t>, so answer = </a:t>
+            </a:r>
+            <a:pPr algn="l" indent="0" marL="0">
+              <a:lnSpc>
+                <a:spcPts val="1620"/>
+              </a:lnSpc>
+              <a:spcAft>
+                <a:spcPts val="300"/>
+              </a:spcAft>
+              <a:buNone/>
+            </a:pPr>
+            <a:r>
+              <a:rPr lang="en-US" sz="1200" dirty="0">
+                <a:solidFill>
+                  <a:srgbClr val="1C2833"/>
+                </a:solidFill>
+                <a:latin typeface="Arial" pitchFamily="34" charset="0"/>
+                <a:ea typeface="Arial" pitchFamily="34" charset="-122"/>
+                <a:cs typeface="Arial" pitchFamily="34" charset="-120"/>
+              </a:rPr>
+              <a:t>−1757 + 4433 = 2676</a:t>
+            </a:r>
+            <a:pPr algn="l" indent="0" marL="0">
+              <a:lnSpc>
+                <a:spcPts val="1620"/>
+              </a:lnSpc>
+              <a:spcAft>
+                <a:spcPts val="300"/>
+              </a:spcAft>
+              <a:buNone/>
+            </a:pPr>
+            <a:r>
+              <a:rPr lang="en-US" sz="1200" dirty="0">
+                <a:solidFill>
+                  <a:srgbClr val="1C2833"/>
+                </a:solidFill>
+                <a:latin typeface="Arial" pitchFamily="34" charset="0"/>
+                <a:ea typeface="Arial" pitchFamily="34" charset="-122"/>
+                <a:cs typeface="Arial" pitchFamily="34" charset="-120"/>
+              </a:rPr>
+              <a:t>. Verify: 8243 − 5567 = 2676. ✓. Negative intermediate results are fine.</a:t>
+            </a:r>
+            <a:endParaRPr lang="en-US" sz="1200" dirty="0"/>
+          </a:p>
+          <a:p>
+            <a:pPr algn="l" marL="342900" indent="-342900">
+              <a:lnSpc>
+                <a:spcPts val="1620"/>
+              </a:lnSpc>
+              <a:spcAft>
+                <a:spcPts val="300"/>
+              </a:spcAft>
+              <a:buSzPct val="100000"/>
+              <a:buChar char="•"/>
+            </a:pPr>
+            <a:r>
+              <a:rPr lang="en-US" sz="1200" b="1" dirty="0">
+                <a:solidFill>
+                  <a:srgbClr val="1C2833"/>
+                </a:solidFill>
+                <a:latin typeface="Arial" pitchFamily="34" charset="0"/>
+                <a:ea typeface="Arial" pitchFamily="34" charset="-122"/>
+                <a:cs typeface="Arial" pitchFamily="34" charset="-120"/>
+              </a:rPr>
+              <a:t>Tier down:</a:t>
+            </a:r>
+            <a:pPr algn="l" indent="0" marL="0">
+              <a:lnSpc>
+                <a:spcPts val="1620"/>
+              </a:lnSpc>
+              <a:spcAft>
+                <a:spcPts val="300"/>
+              </a:spcAft>
+              <a:buNone/>
+            </a:pPr>
+            <a:r>
+              <a:rPr lang="en-US" sz="1200" dirty="0">
+                <a:solidFill>
+                  <a:srgbClr val="1C2833"/>
+                </a:solidFill>
+                <a:latin typeface="Arial" pitchFamily="34" charset="0"/>
+                <a:ea typeface="Arial" pitchFamily="34" charset="-122"/>
+                <a:cs typeface="Arial" pitchFamily="34" charset="-120"/>
+              </a:rPr>
+              <a:t> Use base 100 for everything. Only graduate to 1000 when comfortable.</a:t>
+            </a:r>
+            <a:endParaRPr lang="en-US" sz="1200" dirty="0"/>
+          </a:p>
+        </p:txBody>
+      </p:sp>
+      <p:sp>
+        <p:nvSpPr>
+          <p:cNvPr id="5" name="Text 3"/>
+          <p:cNvSpPr/>
+          <p:nvPr/>
+        </p:nvSpPr>
+        <p:spPr>
+          <a:xfrm>
+            <a:off x="406301" y="4434929"/>
+            <a:ext cx="8498026" cy="213271"/>
+          </a:xfrm>
+          <a:prstGeom prst="rect">
+            <a:avLst/>
+          </a:prstGeom>
+          <a:noFill/>
+          <a:ln/>
+        </p:spPr>
+        <p:txBody>
+          <a:bodyPr wrap="square" lIns="0" tIns="0" rIns="0" bIns="0" rtlCol="0" anchor="t"/>
+          <a:lstStyle/>
+          <a:p>
+            <a:pPr algn="l" indent="0" marL="0">
+              <a:lnSpc>
+                <a:spcPts val="1680"/>
+              </a:lnSpc>
+              <a:spcBef>
+                <a:spcPts val="300"/>
+              </a:spcBef>
+              <a:spcAft>
+                <a:spcPts val="300"/>
+              </a:spcAft>
+              <a:buNone/>
+            </a:pPr>
+            <a:r>
+              <a:rPr lang="en-US" sz="1200" dirty="0">
+                <a:solidFill>
+                  <a:srgbClr val="1C2833"/>
+                </a:solidFill>
+                <a:latin typeface="Arial" pitchFamily="34" charset="0"/>
+                <a:ea typeface="Arial" pitchFamily="34" charset="-122"/>
+                <a:cs typeface="Arial" pitchFamily="34" charset="-120"/>
+              </a:rPr>
+              <a:t>Middle ·  · IKS Curriculum</a:t>
+            </a:r>
+            <a:endParaRPr lang="en-US" sz="1200" dirty="0"/>
+          </a:p>
+        </p:txBody>
+      </p:sp>
+    </p:spTree>
+  </p:cSld>
+  <p:clrMapOvr>
+    <a:masterClrMapping/>
+  </p:clrMapOvr>
+</p:sld>
+</file>
+
+<file path=ppt/slides/slide17.xml><?xml version="1.0" encoding="utf-8"?>
+<p:sld xmlns:a="http://schemas.openxmlformats.org/drawingml/2006/main" xmlns:r="http://schemas.openxmlformats.org/officeDocument/2006/relationships" xmlns:p="http://schemas.openxmlformats.org/presentationml/2006/main">
+  <p:cSld name="Slide 17">
+    <p:bg>
+      <p:bgPr>
+        <a:solidFill>
+          <a:srgbClr val="FFFFFF"/>
+        </a:solidFill>
+      </p:bgPr>
+    </p:bg>
+    <p:spTree>
+      <p:nvGrpSpPr>
+        <p:cNvPr id="1" name=""/>
+        <p:cNvGrpSpPr/>
+        <p:nvPr/>
+      </p:nvGrpSpPr>
+      <p:grpSpPr>
+        <a:xfrm>
+          <a:off x="0" y="0"/>
+          <a:ext cx="0" cy="0"/>
+          <a:chOff x="0" y="0"/>
+          <a:chExt cx="0" cy="0"/>
+        </a:xfrm>
+      </p:grpSpPr>
+      <p:sp>
+        <p:nvSpPr>
+          <p:cNvPr id="2" name="Text 0"/>
+          <p:cNvSpPr/>
+          <p:nvPr/>
+        </p:nvSpPr>
+        <p:spPr>
+          <a:xfrm>
+            <a:off x="0" y="0"/>
+            <a:ext cx="9144000" cy="101501"/>
+          </a:xfrm>
+          <a:prstGeom prst="rect">
+            <a:avLst/>
+          </a:prstGeom>
+          <a:solidFill>
+            <a:srgbClr val="277884"/>
+          </a:solidFill>
+          <a:ln/>
+        </p:spPr>
+        <p:txBody>
+          <a:bodyPr wrap="square" rtlCol="0" anchor="ctr"/>
+          <a:lstStyle/>
+          <a:p>
+            <a:pPr indent="0" marL="0">
+              <a:buNone/>
+            </a:pPr>
+            <a:endParaRPr lang="en-US" dirty="0"/>
+          </a:p>
+        </p:txBody>
+      </p:sp>
+      <p:sp>
+        <p:nvSpPr>
+          <p:cNvPr id="3" name="Text 1"/>
+          <p:cNvSpPr/>
+          <p:nvPr/>
+        </p:nvSpPr>
+        <p:spPr>
+          <a:xfrm>
+            <a:off x="406301" y="457051"/>
+            <a:ext cx="8498026" cy="274290"/>
+          </a:xfrm>
+          <a:prstGeom prst="rect">
+            <a:avLst/>
+          </a:prstGeom>
+          <a:noFill/>
+          <a:ln/>
+        </p:spPr>
+        <p:txBody>
+          <a:bodyPr wrap="square" lIns="0" tIns="0" rIns="0" bIns="0" rtlCol="0" anchor="t"/>
+          <a:lstStyle/>
+          <a:p>
+            <a:pPr algn="l" indent="0" marL="0">
+              <a:lnSpc>
+                <a:spcPts val="2160"/>
+              </a:lnSpc>
+              <a:spcBef>
+                <a:spcPts val="600"/>
+              </a:spcBef>
+              <a:spcAft>
+                <a:spcPts val="800"/>
+              </a:spcAft>
+              <a:buNone/>
+            </a:pPr>
+            <a:r>
+              <a:rPr lang="en-US" sz="1800" b="1" dirty="0">
+                <a:solidFill>
+                  <a:srgbClr val="FE4447"/>
+                </a:solidFill>
+                <a:latin typeface="Georgia" pitchFamily="34" charset="0"/>
+                <a:ea typeface="Georgia" pitchFamily="34" charset="-122"/>
+                <a:cs typeface="Georgia" pitchFamily="34" charset="-120"/>
+              </a:rPr>
+              <a:t>Teacher notes</a:t>
+            </a:r>
+            <a:endParaRPr lang="en-US" sz="1800" dirty="0"/>
+          </a:p>
+        </p:txBody>
+      </p:sp>
+      <p:sp>
+        <p:nvSpPr>
+          <p:cNvPr id="4" name="Text 2"/>
+          <p:cNvSpPr/>
+          <p:nvPr/>
+        </p:nvSpPr>
+        <p:spPr>
+          <a:xfrm>
+            <a:off x="634901" y="883593"/>
+            <a:ext cx="8102798" cy="1611213"/>
+          </a:xfrm>
+          <a:prstGeom prst="rect">
+            <a:avLst/>
+          </a:prstGeom>
+          <a:noFill/>
+          <a:ln/>
+        </p:spPr>
+        <p:txBody>
+          <a:bodyPr wrap="square" lIns="0" tIns="0" rIns="0" bIns="0" rtlCol="0" anchor="t"/>
+          <a:lstStyle/>
+          <a:p>
+            <a:pPr algn="l" marL="342900" indent="-342900">
+              <a:lnSpc>
+                <a:spcPts val="1620"/>
+              </a:lnSpc>
+              <a:spcAft>
+                <a:spcPts val="300"/>
+              </a:spcAft>
+              <a:buSzPct val="100000"/>
+              <a:buChar char="•"/>
+            </a:pPr>
+            <a:r>
+              <a:rPr lang="en-US" sz="1200" dirty="0">
+                <a:solidFill>
+                  <a:srgbClr val="1C2833"/>
+                </a:solidFill>
+                <a:latin typeface="Arial" pitchFamily="34" charset="0"/>
+                <a:ea typeface="Arial" pitchFamily="34" charset="-122"/>
+                <a:cs typeface="Arial" pitchFamily="34" charset="-120"/>
+              </a:rPr>
+              <a:t>The combined method introduces a real subtlety: students must now choose a base. Some over-pick (use 10 000 for </a:t>
+            </a:r>
+            <a:pPr algn="l" indent="0" marL="0">
+              <a:lnSpc>
+                <a:spcPts val="1620"/>
+              </a:lnSpc>
+              <a:spcAft>
+                <a:spcPts val="300"/>
+              </a:spcAft>
+              <a:buNone/>
+            </a:pPr>
+            <a:r>
+              <a:rPr lang="en-US" sz="1200" dirty="0">
+                <a:solidFill>
+                  <a:srgbClr val="1C2833"/>
+                </a:solidFill>
+                <a:latin typeface="Arial" pitchFamily="34" charset="0"/>
+                <a:ea typeface="Arial" pitchFamily="34" charset="-122"/>
+                <a:cs typeface="Arial" pitchFamily="34" charset="-120"/>
+              </a:rPr>
+              <a:t>5172 − 89</a:t>
+            </a:r>
+            <a:pPr algn="l" indent="0" marL="0">
+              <a:lnSpc>
+                <a:spcPts val="1620"/>
+              </a:lnSpc>
+              <a:spcAft>
+                <a:spcPts val="300"/>
+              </a:spcAft>
+              <a:buNone/>
+            </a:pPr>
+            <a:r>
+              <a:rPr lang="en-US" sz="1200" dirty="0">
+                <a:solidFill>
+                  <a:srgbClr val="1C2833"/>
+                </a:solidFill>
+                <a:latin typeface="Arial" pitchFamily="34" charset="0"/>
+                <a:ea typeface="Arial" pitchFamily="34" charset="-122"/>
+                <a:cs typeface="Arial" pitchFamily="34" charset="-120"/>
+              </a:rPr>
+              <a:t> when 100 would do). Some under-pick (use 100 for </a:t>
+            </a:r>
+            <a:pPr algn="l" indent="0" marL="0">
+              <a:lnSpc>
+                <a:spcPts val="1620"/>
+              </a:lnSpc>
+              <a:spcAft>
+                <a:spcPts val="300"/>
+              </a:spcAft>
+              <a:buNone/>
+            </a:pPr>
+            <a:r>
+              <a:rPr lang="en-US" sz="1200" dirty="0">
+                <a:solidFill>
+                  <a:srgbClr val="1C2833"/>
+                </a:solidFill>
+                <a:latin typeface="Arial" pitchFamily="34" charset="0"/>
+                <a:ea typeface="Arial" pitchFamily="34" charset="-122"/>
+                <a:cs typeface="Arial" pitchFamily="34" charset="-120"/>
+              </a:rPr>
+              <a:t>8243 − 567</a:t>
+            </a:r>
+            <a:pPr algn="l" indent="0" marL="0">
+              <a:lnSpc>
+                <a:spcPts val="1620"/>
+              </a:lnSpc>
+              <a:spcAft>
+                <a:spcPts val="300"/>
+              </a:spcAft>
+              <a:buNone/>
+            </a:pPr>
+            <a:r>
+              <a:rPr lang="en-US" sz="1200" dirty="0">
+                <a:solidFill>
+                  <a:srgbClr val="1C2833"/>
+                </a:solidFill>
+                <a:latin typeface="Arial" pitchFamily="34" charset="0"/>
+                <a:ea typeface="Arial" pitchFamily="34" charset="-122"/>
+                <a:cs typeface="Arial" pitchFamily="34" charset="-120"/>
+              </a:rPr>
+              <a:t>). Either causes errors. Teach: "pick the smallest base that still exceeds the subtrahend."</a:t>
+            </a:r>
+            <a:endParaRPr lang="en-US" sz="1200" dirty="0"/>
+          </a:p>
+          <a:p>
+            <a:pPr algn="l" marL="342900" indent="-342900">
+              <a:lnSpc>
+                <a:spcPts val="1620"/>
+              </a:lnSpc>
+              <a:spcAft>
+                <a:spcPts val="300"/>
+              </a:spcAft>
+              <a:buSzPct val="100000"/>
+              <a:buChar char="•"/>
+            </a:pPr>
+            <a:r>
+              <a:rPr lang="en-US" sz="1200" dirty="0">
+                <a:solidFill>
+                  <a:srgbClr val="1C2833"/>
+                </a:solidFill>
+                <a:latin typeface="Arial" pitchFamily="34" charset="0"/>
+                <a:ea typeface="Arial" pitchFamily="34" charset="-122"/>
+                <a:cs typeface="Arial" pitchFamily="34" charset="-120"/>
+              </a:rPr>
+              <a:t>The shopkeeper role-play tends to make this concrete. Make sure the "round notes" are physically present — the mental model "I have 1000 in my hand, I need to give 567 of it" makes the algebra intuitive.</a:t>
+            </a:r>
+            <a:endParaRPr lang="en-US" sz="1200" dirty="0"/>
+          </a:p>
+          <a:p>
+            <a:pPr algn="l" marL="342900" indent="-342900">
+              <a:lnSpc>
+                <a:spcPts val="1620"/>
+              </a:lnSpc>
+              <a:spcAft>
+                <a:spcPts val="300"/>
+              </a:spcAft>
+              <a:buSzPct val="100000"/>
+              <a:buChar char="•"/>
+            </a:pPr>
+            <a:r>
+              <a:rPr lang="en-US" sz="1200" dirty="0">
+                <a:solidFill>
+                  <a:srgbClr val="1C2833"/>
+                </a:solidFill>
+                <a:latin typeface="Arial" pitchFamily="34" charset="0"/>
+                <a:ea typeface="Arial" pitchFamily="34" charset="-122"/>
+                <a:cs typeface="Arial" pitchFamily="34" charset="-120"/>
+              </a:rPr>
+              <a:t>Some classes will benefit from spending the whole lesson on the shopkeeper drill and pushing the algebra to Day 9. That's a fine reordering.</a:t>
+            </a:r>
+            <a:endParaRPr lang="en-US" sz="1200" dirty="0"/>
+          </a:p>
+        </p:txBody>
+      </p:sp>
+      <p:sp>
+        <p:nvSpPr>
+          <p:cNvPr id="5" name="Text 3"/>
+          <p:cNvSpPr/>
+          <p:nvPr/>
+        </p:nvSpPr>
+        <p:spPr>
+          <a:xfrm>
+            <a:off x="406301" y="4434929"/>
+            <a:ext cx="8498026" cy="213271"/>
+          </a:xfrm>
+          <a:prstGeom prst="rect">
+            <a:avLst/>
+          </a:prstGeom>
+          <a:noFill/>
+          <a:ln/>
+        </p:spPr>
+        <p:txBody>
+          <a:bodyPr wrap="square" lIns="0" tIns="0" rIns="0" bIns="0" rtlCol="0" anchor="t"/>
+          <a:lstStyle/>
+          <a:p>
+            <a:pPr algn="l" indent="0" marL="0">
+              <a:lnSpc>
+                <a:spcPts val="1680"/>
+              </a:lnSpc>
+              <a:spcBef>
+                <a:spcPts val="300"/>
+              </a:spcBef>
+              <a:spcAft>
+                <a:spcPts val="300"/>
+              </a:spcAft>
+              <a:buNone/>
+            </a:pPr>
+            <a:r>
+              <a:rPr lang="en-US" sz="1200" dirty="0">
+                <a:solidFill>
+                  <a:srgbClr val="1C2833"/>
+                </a:solidFill>
+                <a:latin typeface="Arial" pitchFamily="34" charset="0"/>
+                <a:ea typeface="Arial" pitchFamily="34" charset="-122"/>
+                <a:cs typeface="Arial" pitchFamily="34" charset="-120"/>
+              </a:rPr>
+              <a:t>Middle ·  · IKS Curriculum</a:t>
+            </a:r>
+            <a:endParaRPr lang="en-US" sz="1200" dirty="0"/>
+          </a:p>
+        </p:txBody>
+      </p:sp>
+    </p:spTree>
+  </p:cSld>
+  <p:clrMapOvr>
+    <a:masterClrMapping/>
+  </p:clrMapOvr>
+</p:sld>
+</file>
+
+<file path=ppt/slides/slide18.xml><?xml version="1.0" encoding="utf-8"?>
+<p:sld xmlns:a="http://schemas.openxmlformats.org/drawingml/2006/main" xmlns:r="http://schemas.openxmlformats.org/officeDocument/2006/relationships" xmlns:p="http://schemas.openxmlformats.org/presentationml/2006/main">
+  <p:cSld name="Slide 18">
+    <p:bg>
+      <p:bgPr>
+        <a:solidFill>
+          <a:srgbClr val="FFFFFF"/>
+        </a:solidFill>
+      </p:bgPr>
+    </p:bg>
+    <p:spTree>
+      <p:nvGrpSpPr>
+        <p:cNvPr id="1" name=""/>
+        <p:cNvGrpSpPr/>
+        <p:nvPr/>
+      </p:nvGrpSpPr>
+      <p:grpSpPr>
+        <a:xfrm>
+          <a:off x="0" y="0"/>
+          <a:ext cx="0" cy="0"/>
+          <a:chOff x="0" y="0"/>
+          <a:chExt cx="0" cy="0"/>
+        </a:xfrm>
+      </p:grpSpPr>
+      <p:sp>
+        <p:nvSpPr>
+          <p:cNvPr id="2" name="Text 0"/>
+          <p:cNvSpPr/>
+          <p:nvPr/>
+        </p:nvSpPr>
+        <p:spPr>
+          <a:xfrm>
+            <a:off x="0" y="0"/>
+            <a:ext cx="9144000" cy="101501"/>
+          </a:xfrm>
+          <a:prstGeom prst="rect">
+            <a:avLst/>
+          </a:prstGeom>
+          <a:solidFill>
+            <a:srgbClr val="277884"/>
+          </a:solidFill>
+          <a:ln/>
+        </p:spPr>
+        <p:txBody>
+          <a:bodyPr wrap="square" rtlCol="0" anchor="ctr"/>
+          <a:lstStyle/>
+          <a:p>
+            <a:pPr indent="0" marL="0">
+              <a:buNone/>
+            </a:pPr>
+            <a:endParaRPr lang="en-US" dirty="0"/>
+          </a:p>
+        </p:txBody>
+      </p:sp>
+      <p:sp>
+        <p:nvSpPr>
+          <p:cNvPr id="3" name="Text 1"/>
+          <p:cNvSpPr/>
+          <p:nvPr/>
+        </p:nvSpPr>
+        <p:spPr>
+          <a:xfrm>
+            <a:off x="406301" y="457051"/>
+            <a:ext cx="8498026" cy="274290"/>
+          </a:xfrm>
+          <a:prstGeom prst="rect">
+            <a:avLst/>
+          </a:prstGeom>
+          <a:noFill/>
+          <a:ln/>
+        </p:spPr>
+        <p:txBody>
+          <a:bodyPr wrap="square" lIns="0" tIns="0" rIns="0" bIns="0" rtlCol="0" anchor="t"/>
+          <a:lstStyle/>
+          <a:p>
+            <a:pPr algn="l" indent="0" marL="0">
+              <a:lnSpc>
+                <a:spcPts val="2160"/>
+              </a:lnSpc>
+              <a:spcBef>
+                <a:spcPts val="600"/>
+              </a:spcBef>
+              <a:spcAft>
+                <a:spcPts val="800"/>
+              </a:spcAft>
+              <a:buNone/>
+            </a:pPr>
+            <a:r>
+              <a:rPr lang="en-US" sz="1800" b="1" dirty="0">
+                <a:solidFill>
+                  <a:srgbClr val="FE4447"/>
+                </a:solidFill>
+                <a:latin typeface="Georgia" pitchFamily="34" charset="0"/>
+                <a:ea typeface="Georgia" pitchFamily="34" charset="-122"/>
+                <a:cs typeface="Georgia" pitchFamily="34" charset="-120"/>
+              </a:rPr>
+              <a:t>Citation(s) used in this lesson</a:t>
+            </a:r>
+            <a:endParaRPr lang="en-US" sz="1800" dirty="0"/>
+          </a:p>
+        </p:txBody>
+      </p:sp>
+      <p:sp>
+        <p:nvSpPr>
+          <p:cNvPr id="4" name="Text 2"/>
+          <p:cNvSpPr/>
+          <p:nvPr/>
+        </p:nvSpPr>
+        <p:spPr>
+          <a:xfrm>
+            <a:off x="634901" y="883593"/>
+            <a:ext cx="8102798" cy="731341"/>
+          </a:xfrm>
+          <a:prstGeom prst="rect">
+            <a:avLst/>
+          </a:prstGeom>
+          <a:noFill/>
+          <a:ln/>
+        </p:spPr>
+        <p:txBody>
+          <a:bodyPr wrap="square" lIns="0" tIns="0" rIns="0" bIns="0" rtlCol="0" anchor="t"/>
+          <a:lstStyle/>
+          <a:p>
+            <a:pPr algn="l" marL="342900" indent="-342900">
+              <a:lnSpc>
+                <a:spcPts val="1620"/>
+              </a:lnSpc>
+              <a:spcAft>
+                <a:spcPts val="300"/>
+              </a:spcAft>
+              <a:buSzPct val="100000"/>
+              <a:buChar char="•"/>
+            </a:pPr>
+            <a:r>
+              <a:rPr lang="en-US" sz="1200" dirty="0">
+                <a:solidFill>
+                  <a:srgbClr val="1C2833"/>
+                </a:solidFill>
+                <a:latin typeface="Arial" pitchFamily="34" charset="0"/>
+                <a:ea typeface="Arial" pitchFamily="34" charset="-122"/>
+                <a:cs typeface="Arial" pitchFamily="34" charset="-120"/>
+              </a:rPr>
+              <a:t>Tirthaji, </a:t>
+            </a:r>
+            <a:pPr algn="l" indent="0" marL="0">
+              <a:lnSpc>
+                <a:spcPts val="1620"/>
+              </a:lnSpc>
+              <a:spcAft>
+                <a:spcPts val="300"/>
+              </a:spcAft>
+              <a:buNone/>
+            </a:pPr>
+            <a:r>
+              <a:rPr lang="en-US" sz="1200" i="1" dirty="0">
+                <a:solidFill>
+                  <a:srgbClr val="1C2833"/>
+                </a:solidFill>
+                <a:latin typeface="Arial" pitchFamily="34" charset="0"/>
+                <a:ea typeface="Arial" pitchFamily="34" charset="-122"/>
+                <a:cs typeface="Arial" pitchFamily="34" charset="-120"/>
+              </a:rPr>
+              <a:t>Vedic Mathematics</a:t>
+            </a:r>
+            <a:pPr algn="l" indent="0" marL="0">
+              <a:lnSpc>
+                <a:spcPts val="1620"/>
+              </a:lnSpc>
+              <a:spcAft>
+                <a:spcPts val="300"/>
+              </a:spcAft>
+              <a:buNone/>
+            </a:pPr>
+            <a:r>
+              <a:rPr lang="en-US" sz="1200" dirty="0">
+                <a:solidFill>
+                  <a:srgbClr val="1C2833"/>
+                </a:solidFill>
+                <a:latin typeface="Arial" pitchFamily="34" charset="0"/>
+                <a:ea typeface="Arial" pitchFamily="34" charset="-122"/>
+                <a:cs typeface="Arial" pitchFamily="34" charset="-120"/>
+              </a:rPr>
+              <a:t> (1965), sūtra Nikhilam (#2) — primary source.</a:t>
+            </a:r>
+            <a:endParaRPr lang="en-US" sz="1200" dirty="0"/>
+          </a:p>
+          <a:p>
+            <a:pPr algn="l" marL="342900" indent="-342900">
+              <a:lnSpc>
+                <a:spcPts val="1620"/>
+              </a:lnSpc>
+              <a:spcAft>
+                <a:spcPts val="300"/>
+              </a:spcAft>
+              <a:buSzPct val="100000"/>
+              <a:buChar char="•"/>
+            </a:pPr>
+            <a:r>
+              <a:rPr lang="en-US" sz="1200" i="1" dirty="0">
+                <a:solidFill>
+                  <a:srgbClr val="1C2833"/>
+                </a:solidFill>
+                <a:latin typeface="Arial" pitchFamily="34" charset="0"/>
+                <a:ea typeface="Arial" pitchFamily="34" charset="-122"/>
+                <a:cs typeface="Arial" pitchFamily="34" charset="-120"/>
+              </a:rPr>
               <a:t>FUNDAMENTAL AND VEDIC MATHEMATICS .pdf</a:t>
             </a:r>
             <a:pPr algn="l" indent="0" marL="0">
@@ -3280,7 +6444,7 @@
       </p:sp>
       <p:sp>
         <p:nvSpPr>
-          <p:cNvPr id="6" name="Text 4"/>
+          <p:cNvPr id="5" name="Text 3"/>
           <p:cNvSpPr/>
           <p:nvPr/>
         </p:nvSpPr>
@@ -3430,7 +6594,7 @@
                 <a:ea typeface="Georgia" pitchFamily="34" charset="-122"/>
                 <a:cs typeface="Georgia" pitchFamily="34" charset="-120"/>
               </a:rPr>
-              <a:t>Materials</a:t>
+              <a:t>Learning objective</a:t>
             </a:r>
             <a:endParaRPr lang="en-US" sz="1800" dirty="0"/>
           </a:p>
@@ -3445,7 +6609,7 @@
         <p:spPr>
           <a:xfrm>
             <a:off x="406301" y="870942"/>
-            <a:ext cx="8498026" cy="213271"/>
+            <a:ext cx="8498026" cy="639812"/>
           </a:xfrm>
           <a:prstGeom prst="rect">
             <a:avLst/>
@@ -3478,7 +6642,53 @@
                 <a:ea typeface="Arial" pitchFamily="34" charset="-122"/>
                 <a:cs typeface="Arial" pitchFamily="34" charset="-120"/>
               </a:rPr>
-              <a:t>– Whiteboard</a:t>
+              <a:t>By the end of this lesson, students will subtract a number from any larger number (not necessarily a power of ten) using a </a:t>
+            </a:r>
+            <a:pPr algn="l" indent="0" marL="0">
+              <a:lnSpc>
+                <a:spcPts val="1680"/>
+              </a:lnSpc>
+              <a:spcBef>
+                <a:spcPts val="300"/>
+              </a:spcBef>
+              <a:spcAft>
+                <a:spcPts val="300"/>
+              </a:spcAft>
+              <a:buNone/>
+            </a:pPr>
+            <a:r>
+              <a:rPr lang="en-US" sz="1200" i="1" dirty="0">
+                <a:solidFill>
+                  <a:srgbClr val="1C2833"/>
+                </a:solidFill>
+                <a:latin typeface="Arial" pitchFamily="34" charset="0"/>
+                <a:ea typeface="Arial" pitchFamily="34" charset="-122"/>
+                <a:cs typeface="Arial" pitchFamily="34" charset="-120"/>
+              </a:rPr>
+              <a:t>combined</a:t>
+            </a:r>
+            <a:pPr algn="l" indent="0" marL="0">
+              <a:lnSpc>
+                <a:spcPts val="1680"/>
+              </a:lnSpc>
+              <a:spcBef>
+                <a:spcPts val="300"/>
+              </a:spcBef>
+              <a:spcAft>
+                <a:spcPts val="300"/>
+              </a:spcAft>
+              <a:buNone/>
+            </a:pPr>
+            <a:r>
+              <a:rPr lang="en-US" sz="1200" dirty="0">
+                <a:solidFill>
+                  <a:srgbClr val="1C2833"/>
+                </a:solidFill>
+                <a:latin typeface="Arial" pitchFamily="34" charset="0"/>
+                <a:ea typeface="Arial" pitchFamily="34" charset="-122"/>
+                <a:cs typeface="Arial" pitchFamily="34" charset="-120"/>
+              </a:rPr>
+              <a:t> method: take the complement of the subtrahend to a nearby base, add it to the minuend, and adjust by the difference.</a:t>
             </a:r>
             <a:endParaRPr lang="en-US" sz="1200" dirty="0"/>
           </a:p>
@@ -3487,120 +6697,6 @@
       <p:sp>
         <p:nvSpPr>
           <p:cNvPr id="5" name="Text 3"/>
-          <p:cNvSpPr/>
-          <p:nvPr/>
-        </p:nvSpPr>
-        <p:spPr>
-          <a:xfrm>
-            <a:off x="634901" y="1173063"/>
-            <a:ext cx="8102798" cy="300930"/>
-          </a:xfrm>
-          <a:prstGeom prst="rect">
-            <a:avLst/>
-          </a:prstGeom>
-          <a:noFill/>
-          <a:ln/>
-        </p:spPr>
-        <p:txBody>
-          <a:bodyPr wrap="square" lIns="0" tIns="0" rIns="0" bIns="0" rtlCol="0" anchor="t"/>
-          <a:lstStyle/>
-          <a:p>
-            <a:pPr algn="l" marL="342900" indent="-342900">
-              <a:lnSpc>
-                <a:spcPts val="1620"/>
-              </a:lnSpc>
-              <a:spcAft>
-                <a:spcPts val="300"/>
-              </a:spcAft>
-              <a:buSzPct val="100000"/>
-              <a:buChar char="•"/>
-            </a:pPr>
-            <a:r>
-              <a:rPr lang="en-US" sz="1200" dirty="0">
-                <a:solidFill>
-                  <a:srgbClr val="1C2833"/>
-                </a:solidFill>
-                <a:latin typeface="Arial" pitchFamily="34" charset="0"/>
-                <a:ea typeface="Arial" pitchFamily="34" charset="-122"/>
-                <a:cs typeface="Arial" pitchFamily="34" charset="-120"/>
-              </a:rPr>
-              <a:t>activities/activity-02-shopkeeper.md</a:t>
-            </a:r>
-            <a:pPr algn="l" indent="0" marL="0">
-              <a:lnSpc>
-                <a:spcPts val="1620"/>
-              </a:lnSpc>
-              <a:spcAft>
-                <a:spcPts val="300"/>
-              </a:spcAft>
-              <a:buNone/>
-            </a:pPr>
-            <a:r>
-              <a:rPr lang="en-US" sz="1200" dirty="0">
-                <a:solidFill>
-                  <a:srgbClr val="1C2833"/>
-                </a:solidFill>
-                <a:latin typeface="Arial" pitchFamily="34" charset="0"/>
-                <a:ea typeface="Arial" pitchFamily="34" charset="-122"/>
-                <a:cs typeface="Arial" pitchFamily="34" charset="-120"/>
-              </a:rPr>
-              <a:t> worksheet</a:t>
-            </a:r>
-            <a:endParaRPr lang="en-US" sz="1200" dirty="0"/>
-          </a:p>
-        </p:txBody>
-      </p:sp>
-      <p:sp>
-        <p:nvSpPr>
-          <p:cNvPr id="6" name="Text 4"/>
-          <p:cNvSpPr/>
-          <p:nvPr/>
-        </p:nvSpPr>
-        <p:spPr>
-          <a:xfrm>
-            <a:off x="406301" y="1562844"/>
-            <a:ext cx="8498026" cy="213271"/>
-          </a:xfrm>
-          <a:prstGeom prst="rect">
-            <a:avLst/>
-          </a:prstGeom>
-          <a:noFill/>
-          <a:ln/>
-        </p:spPr>
-        <p:txBody>
-          <a:bodyPr wrap="square" lIns="0" tIns="0" rIns="0" bIns="0" rtlCol="0" anchor="t"/>
-          <a:lstStyle/>
-          <a:p>
-            <a:pPr algn="l" indent="0" marL="0">
-              <a:lnSpc>
-                <a:spcPts val="1680"/>
-              </a:lnSpc>
-              <a:spcBef>
-                <a:spcPts val="300"/>
-              </a:spcBef>
-              <a:spcAft>
-                <a:spcPts val="300"/>
-              </a:spcAft>
-              <a:buNone/>
-            </a:pPr>
-            <a:r>
-              <a:rPr lang="en-US" sz="1200" dirty="0">
-                <a:solidFill>
-                  <a:srgbClr val="1C2833"/>
-                </a:solidFill>
-                <a:latin typeface="Arial" pitchFamily="34" charset="0"/>
-                <a:ea typeface="Arial" pitchFamily="34" charset="-122"/>
-                <a:cs typeface="Arial" pitchFamily="34" charset="-120"/>
-              </a:rPr>
-              <a:t>– Pretend currency (paper notes of 100, 500, 1000 rupee denominations) – Stopwatches</a:t>
-            </a:r>
-            <a:endParaRPr lang="en-US" sz="1200" dirty="0"/>
-          </a:p>
-        </p:txBody>
-      </p:sp>
-      <p:sp>
-        <p:nvSpPr>
-          <p:cNvPr id="7" name="Text 5"/>
           <p:cNvSpPr/>
           <p:nvPr/>
         </p:nvSpPr>
@@ -3750,7 +6846,7 @@
                 <a:ea typeface="Georgia" pitchFamily="34" charset="-122"/>
                 <a:cs typeface="Georgia" pitchFamily="34" charset="-120"/>
               </a:rPr>
-              <a:t>Lesson flow</a:t>
+              <a:t>Materials</a:t>
             </a:r>
             <a:endParaRPr lang="en-US" sz="1800" dirty="0"/>
           </a:p>
@@ -3759,6 +6855,144 @@
       <p:sp>
         <p:nvSpPr>
           <p:cNvPr id="4" name="Text 2"/>
+          <p:cNvSpPr/>
+          <p:nvPr/>
+        </p:nvSpPr>
+        <p:spPr>
+          <a:xfrm>
+            <a:off x="634901" y="883593"/>
+            <a:ext cx="8102798" cy="1032272"/>
+          </a:xfrm>
+          <a:prstGeom prst="rect">
+            <a:avLst/>
+          </a:prstGeom>
+          <a:noFill/>
+          <a:ln/>
+        </p:spPr>
+        <p:txBody>
+          <a:bodyPr wrap="square" lIns="0" tIns="0" rIns="0" bIns="0" rtlCol="0" anchor="t"/>
+          <a:lstStyle/>
+          <a:p>
+            <a:pPr algn="l" marL="342900" indent="-342900">
+              <a:lnSpc>
+                <a:spcPts val="1620"/>
+              </a:lnSpc>
+              <a:spcAft>
+                <a:spcPts val="300"/>
+              </a:spcAft>
+              <a:buSzPct val="100000"/>
+              <a:buChar char="•"/>
+            </a:pPr>
+            <a:r>
+              <a:rPr lang="en-US" sz="1200" dirty="0">
+                <a:solidFill>
+                  <a:srgbClr val="1C2833"/>
+                </a:solidFill>
+                <a:latin typeface="Arial" pitchFamily="34" charset="0"/>
+                <a:ea typeface="Arial" pitchFamily="34" charset="-122"/>
+                <a:cs typeface="Arial" pitchFamily="34" charset="-120"/>
+              </a:rPr>
+              <a:t>Whiteboard</a:t>
+            </a:r>
+            <a:endParaRPr lang="en-US" sz="1200" dirty="0"/>
+          </a:p>
+          <a:p>
+            <a:pPr algn="l" marL="342900" indent="-342900">
+              <a:lnSpc>
+                <a:spcPts val="1620"/>
+              </a:lnSpc>
+              <a:spcAft>
+                <a:spcPts val="300"/>
+              </a:spcAft>
+              <a:buSzPct val="100000"/>
+              <a:buChar char="•"/>
+            </a:pPr>
+            <a:r>
+              <a:rPr lang="en-US" sz="1200" dirty="0">
+                <a:solidFill>
+                  <a:srgbClr val="1C2833"/>
+                </a:solidFill>
+                <a:latin typeface="Arial" pitchFamily="34" charset="0"/>
+                <a:ea typeface="Arial" pitchFamily="34" charset="-122"/>
+                <a:cs typeface="Arial" pitchFamily="34" charset="-120"/>
+              </a:rPr>
+              <a:t>activities/activity-02-shopkeeper.md</a:t>
+            </a:r>
+            <a:pPr algn="l" indent="0" marL="0">
+              <a:lnSpc>
+                <a:spcPts val="1620"/>
+              </a:lnSpc>
+              <a:spcAft>
+                <a:spcPts val="300"/>
+              </a:spcAft>
+              <a:buNone/>
+            </a:pPr>
+            <a:r>
+              <a:rPr lang="en-US" sz="1200" dirty="0">
+                <a:solidFill>
+                  <a:srgbClr val="1C2833"/>
+                </a:solidFill>
+                <a:latin typeface="Arial" pitchFamily="34" charset="0"/>
+                <a:ea typeface="Arial" pitchFamily="34" charset="-122"/>
+                <a:cs typeface="Arial" pitchFamily="34" charset="-120"/>
+              </a:rPr>
+              <a:t> worksheet</a:t>
+            </a:r>
+            <a:endParaRPr lang="en-US" sz="1200" dirty="0"/>
+          </a:p>
+          <a:p>
+            <a:pPr algn="l" marL="342900" indent="-342900">
+              <a:lnSpc>
+                <a:spcPts val="1620"/>
+              </a:lnSpc>
+              <a:spcAft>
+                <a:spcPts val="300"/>
+              </a:spcAft>
+              <a:buSzPct val="100000"/>
+              <a:buChar char="•"/>
+            </a:pPr>
+            <a:r>
+              <a:rPr lang="en-US" sz="1200" dirty="0">
+                <a:solidFill>
+                  <a:srgbClr val="1C2833"/>
+                </a:solidFill>
+                <a:latin typeface="Arial" pitchFamily="34" charset="0"/>
+                <a:ea typeface="Arial" pitchFamily="34" charset="-122"/>
+                <a:cs typeface="Arial" pitchFamily="34" charset="-120"/>
+              </a:rPr>
+              <a:t>Pretend currency (paper notes of 100, 500, 1000 rupee denominations)</a:t>
+            </a:r>
+            <a:endParaRPr lang="en-US" sz="1200" dirty="0"/>
+          </a:p>
+          <a:p>
+            <a:pPr algn="l" marL="342900" indent="-342900">
+              <a:lnSpc>
+                <a:spcPts val="1620"/>
+              </a:lnSpc>
+              <a:spcAft>
+                <a:spcPts val="300"/>
+              </a:spcAft>
+              <a:buSzPct val="100000"/>
+              <a:buChar char="•"/>
+            </a:pPr>
+            <a:r>
+              <a:rPr lang="en-US" sz="1200" dirty="0">
+                <a:solidFill>
+                  <a:srgbClr val="1C2833"/>
+                </a:solidFill>
+                <a:latin typeface="Arial" pitchFamily="34" charset="0"/>
+                <a:ea typeface="Arial" pitchFamily="34" charset="-122"/>
+                <a:cs typeface="Arial" pitchFamily="34" charset="-120"/>
+              </a:rPr>
+              <a:t>Stopwatches</a:t>
+            </a:r>
+            <a:endParaRPr lang="en-US" sz="1200" dirty="0"/>
+          </a:p>
+        </p:txBody>
+      </p:sp>
+      <p:sp>
+        <p:nvSpPr>
+          <p:cNvPr id="5" name="Text 3"/>
           <p:cNvSpPr/>
           <p:nvPr/>
         </p:nvSpPr>
@@ -3908,7 +7142,7 @@
                 <a:ea typeface="Georgia" pitchFamily="34" charset="-122"/>
                 <a:cs typeface="Georgia" pitchFamily="34" charset="-120"/>
               </a:rPr>
-              <a:t>Warm-up (5 min)</a:t>
+              <a:t>Lesson flow</a:t>
             </a:r>
             <a:endParaRPr lang="en-US" sz="1800" dirty="0"/>
           </a:p>
@@ -3917,54 +7151,6 @@
       <p:sp>
         <p:nvSpPr>
           <p:cNvPr id="4" name="Text 2"/>
-          <p:cNvSpPr/>
-          <p:nvPr/>
-        </p:nvSpPr>
-        <p:spPr>
-          <a:xfrm>
-            <a:off x="406301" y="870942"/>
-            <a:ext cx="8498026" cy="213271"/>
-          </a:xfrm>
-          <a:prstGeom prst="rect">
-            <a:avLst/>
-          </a:prstGeom>
-          <a:noFill/>
-          <a:ln/>
-        </p:spPr>
-        <p:txBody>
-          <a:bodyPr wrap="square" lIns="0" tIns="0" rIns="0" bIns="0" rtlCol="0" anchor="t"/>
-          <a:lstStyle/>
-          <a:p>
-            <a:pPr algn="l" indent="0" marL="0">
-              <a:lnSpc>
-                <a:spcPts val="1680"/>
-              </a:lnSpc>
-              <a:spcBef>
-                <a:spcPts val="300"/>
-              </a:spcBef>
-              <a:spcAft>
-                <a:spcPts val="300"/>
-              </a:spcAft>
-              <a:buNone/>
-            </a:pPr>
-            <a:r>
-              <a:rPr lang="en-US" sz="1200" dirty="0">
-                <a:solidFill>
-                  <a:srgbClr val="1C2833"/>
-                </a:solidFill>
-                <a:latin typeface="Arial" pitchFamily="34" charset="0"/>
-                <a:ea typeface="Arial" pitchFamily="34" charset="-122"/>
-                <a:cs typeface="Arial" pitchFamily="34" charset="-120"/>
-              </a:rPr>
-              <a:t>– Sūtra chant. – Quick fire: 4 complements (mix of bases).</a:t>
-            </a:r>
-            <a:endParaRPr lang="en-US" sz="1200" dirty="0"/>
-          </a:p>
-        </p:txBody>
-      </p:sp>
-      <p:sp>
-        <p:nvSpPr>
-          <p:cNvPr id="5" name="Text 3"/>
           <p:cNvSpPr/>
           <p:nvPr/>
         </p:nvSpPr>
@@ -4114,7 +7300,7 @@
                 <a:ea typeface="Georgia" pitchFamily="34" charset="-122"/>
                 <a:cs typeface="Georgia" pitchFamily="34" charset="-120"/>
               </a:rPr>
-              <a:t>Core (15 min) — Beyond clean bases</a:t>
+              <a:t>Warm-up (5 min)</a:t>
             </a:r>
             <a:endParaRPr lang="en-US" sz="1800" dirty="0"/>
           </a:p>
@@ -4129,7 +7315,7 @@
         <p:spPr>
           <a:xfrm>
             <a:off x="634901" y="883593"/>
-            <a:ext cx="8102798" cy="506611"/>
+            <a:ext cx="8102798" cy="525661"/>
           </a:xfrm>
           <a:prstGeom prst="rect">
             <a:avLst/>
@@ -4152,26 +7338,6 @@
               <a:buChar char="•"/>
             </a:pPr>
             <a:r>
-              <a:rPr lang="en-US" sz="1200" b="1" dirty="0">
-                <a:solidFill>
-                  <a:srgbClr val="1C2833"/>
-                </a:solidFill>
-                <a:latin typeface="Arial" pitchFamily="34" charset="0"/>
-                <a:ea typeface="Arial" pitchFamily="34" charset="-122"/>
-                <a:cs typeface="Arial" pitchFamily="34" charset="-120"/>
-              </a:rPr>
-              <a:t>The setup.</a:t>
-            </a:r>
-            <a:pPr algn="l" indent="0" marL="0">
-              <a:lnSpc>
-                <a:spcPts val="1620"/>
-              </a:lnSpc>
-              <a:spcAft>
-                <a:spcPts val="300"/>
-              </a:spcAft>
-              <a:buNone/>
-            </a:pPr>
-            <a:r>
               <a:rPr lang="en-US" sz="1200" dirty="0">
                 <a:solidFill>
                   <a:srgbClr val="1C2833"/>
@@ -4180,132 +7346,10 @@
                 <a:ea typeface="Arial" pitchFamily="34" charset="-122"/>
                 <a:cs typeface="Arial" pitchFamily="34" charset="-120"/>
               </a:rPr>
-              <a:t> </a:t>
-            </a:r>
-            <a:pPr algn="l" indent="0" marL="0">
-              <a:lnSpc>
-                <a:spcPts val="1620"/>
-              </a:lnSpc>
-              <a:spcAft>
-                <a:spcPts val="300"/>
-              </a:spcAft>
-              <a:buNone/>
-            </a:pPr>
-            <a:r>
-              <a:rPr lang="en-US" sz="1200" i="1" dirty="0">
-                <a:solidFill>
-                  <a:srgbClr val="1C2833"/>
-                </a:solidFill>
-                <a:latin typeface="Arial" pitchFamily="34" charset="0"/>
-                <a:ea typeface="Arial" pitchFamily="34" charset="-122"/>
-                <a:cs typeface="Arial" pitchFamily="34" charset="-120"/>
-              </a:rPr>
-              <a:t>"So far we've done </a:t>
-            </a:r>
-            <a:pPr algn="l" indent="0" marL="0">
-              <a:lnSpc>
-                <a:spcPts val="1620"/>
-              </a:lnSpc>
-              <a:spcAft>
-                <a:spcPts val="300"/>
-              </a:spcAft>
-              <a:buNone/>
-            </a:pPr>
-            <a:r>
-              <a:rPr lang="en-US" sz="1200" i="1" dirty="0">
-                <a:solidFill>
-                  <a:srgbClr val="1C2833"/>
-                </a:solidFill>
-                <a:latin typeface="Arial" pitchFamily="34" charset="0"/>
-                <a:ea typeface="Arial" pitchFamily="34" charset="-122"/>
-                <a:cs typeface="Arial" pitchFamily="34" charset="-120"/>
-              </a:rPr>
-              <a:t>1000 − 567</a:t>
-            </a:r>
-            <a:pPr algn="l" indent="0" marL="0">
-              <a:lnSpc>
-                <a:spcPts val="1620"/>
-              </a:lnSpc>
-              <a:spcAft>
-                <a:spcPts val="300"/>
-              </a:spcAft>
-              <a:buNone/>
-            </a:pPr>
-            <a:r>
-              <a:rPr lang="en-US" sz="1200" i="1" dirty="0">
-                <a:solidFill>
-                  <a:srgbClr val="1C2833"/>
-                </a:solidFill>
-                <a:latin typeface="Arial" pitchFamily="34" charset="0"/>
-                <a:ea typeface="Arial" pitchFamily="34" charset="-122"/>
-                <a:cs typeface="Arial" pitchFamily="34" charset="-120"/>
-              </a:rPr>
-              <a:t>. Easy: complement of 567 is the answer, 433. Now: </a:t>
-            </a:r>
-            <a:pPr algn="l" indent="0" marL="0">
-              <a:lnSpc>
-                <a:spcPts val="1620"/>
-              </a:lnSpc>
-              <a:spcAft>
-                <a:spcPts val="300"/>
-              </a:spcAft>
-              <a:buNone/>
-            </a:pPr>
-            <a:r>
-              <a:rPr lang="en-US" sz="1200" i="1" dirty="0">
-                <a:solidFill>
-                  <a:srgbClr val="1C2833"/>
-                </a:solidFill>
-                <a:latin typeface="Arial" pitchFamily="34" charset="0"/>
-                <a:ea typeface="Arial" pitchFamily="34" charset="-122"/>
-                <a:cs typeface="Arial" pitchFamily="34" charset="-120"/>
-              </a:rPr>
-              <a:t>8243 − 567</a:t>
-            </a:r>
-            <a:pPr algn="l" indent="0" marL="0">
-              <a:lnSpc>
-                <a:spcPts val="1620"/>
-              </a:lnSpc>
-              <a:spcAft>
-                <a:spcPts val="300"/>
-              </a:spcAft>
-              <a:buNone/>
-            </a:pPr>
-            <a:r>
-              <a:rPr lang="en-US" sz="1200" i="1" dirty="0">
-                <a:solidFill>
-                  <a:srgbClr val="1C2833"/>
-                </a:solidFill>
-                <a:latin typeface="Arial" pitchFamily="34" charset="0"/>
-                <a:ea typeface="Arial" pitchFamily="34" charset="-122"/>
-                <a:cs typeface="Arial" pitchFamily="34" charset="-120"/>
-              </a:rPr>
-              <a:t>. The minuend isn't a clean power of ten. What do we do?"</a:t>
+              <a:t>Sūtra chant.</a:t>
             </a:r>
             <a:endParaRPr lang="en-US" sz="1200" dirty="0"/>
           </a:p>
-        </p:txBody>
-      </p:sp>
-      <p:sp>
-        <p:nvSpPr>
-          <p:cNvPr id="5" name="Text 3"/>
-          <p:cNvSpPr/>
-          <p:nvPr/>
-        </p:nvSpPr>
-        <p:spPr>
-          <a:xfrm>
-            <a:off x="634901" y="1491704"/>
-            <a:ext cx="8102798" cy="281880"/>
-          </a:xfrm>
-          <a:prstGeom prst="rect">
-            <a:avLst/>
-          </a:prstGeom>
-          <a:noFill/>
-          <a:ln/>
-        </p:spPr>
-        <p:txBody>
-          <a:bodyPr wrap="square" lIns="0" tIns="0" rIns="0" bIns="0" rtlCol="0" anchor="t"/>
-          <a:lstStyle/>
           <a:p>
             <a:pPr algn="l" marL="342900" indent="-342900">
               <a:lnSpc>
@@ -4318,26 +7362,6 @@
               <a:buChar char="•"/>
             </a:pPr>
             <a:r>
-              <a:rPr lang="en-US" sz="1200" b="1" dirty="0">
-                <a:solidFill>
-                  <a:srgbClr val="1C2833"/>
-                </a:solidFill>
-                <a:latin typeface="Arial" pitchFamily="34" charset="0"/>
-                <a:ea typeface="Arial" pitchFamily="34" charset="-122"/>
-                <a:cs typeface="Arial" pitchFamily="34" charset="-120"/>
-              </a:rPr>
-              <a:t>Idea: borrow a base.</a:t>
-            </a:r>
-            <a:pPr algn="l" indent="0" marL="0">
-              <a:lnSpc>
-                <a:spcPts val="1620"/>
-              </a:lnSpc>
-              <a:spcAft>
-                <a:spcPts val="300"/>
-              </a:spcAft>
-              <a:buNone/>
-            </a:pPr>
-            <a:r>
               <a:rPr lang="en-US" sz="1200" dirty="0">
                 <a:solidFill>
                   <a:srgbClr val="1C2833"/>
@@ -4346,7 +7370,7 @@
                 <a:ea typeface="Arial" pitchFamily="34" charset="-122"/>
                 <a:cs typeface="Arial" pitchFamily="34" charset="-120"/>
               </a:rPr>
-              <a:t> Rewrite:</a:t>
+              <a:t>Quick fire: 4 complements (mix of bases).</a:t>
             </a:r>
             <a:endParaRPr lang="en-US" sz="1200" dirty="0"/>
           </a:p>
@@ -4354,1043 +7378,13 @@
       </p:sp>
       <p:sp>
         <p:nvSpPr>
-          <p:cNvPr id="6" name="Text 4"/>
-          <p:cNvSpPr/>
-          <p:nvPr/>
-        </p:nvSpPr>
-        <p:spPr>
-          <a:xfrm>
-            <a:off x="406301" y="1875086"/>
-            <a:ext cx="8331398" cy="952202"/>
-          </a:xfrm>
-          <a:prstGeom prst="rect">
-            <a:avLst/>
-          </a:prstGeom>
-          <a:solidFill>
-            <a:srgbClr val="F4F8F9"/>
-          </a:solidFill>
-          <a:ln/>
-        </p:spPr>
-        <p:txBody>
-          <a:bodyPr wrap="square" rtlCol="0" anchor="ctr"/>
-          <a:lstStyle/>
-          <a:p>
-            <a:pPr indent="0" marL="0">
-              <a:buNone/>
-            </a:pPr>
-            <a:endParaRPr lang="en-US" dirty="0"/>
-          </a:p>
-        </p:txBody>
-      </p:sp>
-      <p:sp>
-        <p:nvSpPr>
-          <p:cNvPr id="7" name="Shape 5"/>
-          <p:cNvSpPr/>
-          <p:nvPr/>
-        </p:nvSpPr>
-        <p:spPr>
-          <a:xfrm>
-            <a:off x="430113" y="1875086"/>
-            <a:ext cx="0" cy="952202"/>
-          </a:xfrm>
-          <a:prstGeom prst="line">
-            <a:avLst/>
-          </a:prstGeom>
-          <a:noFill/>
-          <a:ln w="47625">
-            <a:solidFill>
-              <a:srgbClr val="277884"/>
-            </a:solidFill>
-            <a:prstDash val="solid"/>
-          </a:ln>
-        </p:spPr>
-      </p:sp>
-      <p:sp>
-        <p:nvSpPr>
-          <p:cNvPr id="8" name="Text 6"/>
-          <p:cNvSpPr/>
-          <p:nvPr/>
-        </p:nvSpPr>
-        <p:spPr>
-          <a:xfrm>
-            <a:off x="631627" y="2002036"/>
-            <a:ext cx="8086939" cy="174575"/>
-          </a:xfrm>
-          <a:prstGeom prst="rect">
-            <a:avLst/>
-          </a:prstGeom>
-          <a:noFill/>
-          <a:ln/>
-        </p:spPr>
-        <p:txBody>
-          <a:bodyPr wrap="square" lIns="0" tIns="0" rIns="0" bIns="0" rtlCol="0" anchor="t"/>
-          <a:lstStyle/>
-          <a:p>
-            <a:pPr algn="l" indent="0" marL="0">
-              <a:lnSpc>
-                <a:spcPts val="1375"/>
-              </a:lnSpc>
-              <a:buNone/>
-            </a:pPr>
-            <a:r>
-              <a:rPr lang="en-US" sz="1100" dirty="0">
-                <a:solidFill>
-                  <a:srgbClr val="1C2833"/>
-                </a:solidFill>
-                <a:latin typeface="Courier New" pitchFamily="34" charset="0"/>
-                <a:ea typeface="Courier New" pitchFamily="34" charset="-122"/>
-                <a:cs typeface="Courier New" pitchFamily="34" charset="-120"/>
-              </a:rPr>
-              <a:t>8243 − 567</a:t>
-            </a:r>
-            <a:endParaRPr lang="en-US" sz="1100" dirty="0"/>
-          </a:p>
-        </p:txBody>
-      </p:sp>
-      <p:sp>
-        <p:nvSpPr>
-          <p:cNvPr id="9" name="Text 7"/>
-          <p:cNvSpPr/>
-          <p:nvPr/>
-        </p:nvSpPr>
-        <p:spPr>
-          <a:xfrm>
-            <a:off x="631627" y="2176611"/>
-            <a:ext cx="8086939" cy="174575"/>
-          </a:xfrm>
-          <a:prstGeom prst="rect">
-            <a:avLst/>
-          </a:prstGeom>
-          <a:noFill/>
-          <a:ln/>
-        </p:spPr>
-        <p:txBody>
-          <a:bodyPr wrap="square" lIns="0" tIns="0" rIns="0" bIns="0" rtlCol="0" anchor="t"/>
-          <a:lstStyle/>
-          <a:p>
-            <a:pPr algn="l" indent="0" marL="0">
-              <a:lnSpc>
-                <a:spcPts val="1375"/>
-              </a:lnSpc>
-              <a:buNone/>
-            </a:pPr>
-            <a:r>
-              <a:rPr lang="en-US" sz="1100" dirty="0">
-                <a:solidFill>
-                  <a:srgbClr val="1C2833"/>
-                </a:solidFill>
-                <a:latin typeface="Courier New" pitchFamily="34" charset="0"/>
-                <a:ea typeface="Courier New" pitchFamily="34" charset="-122"/>
-                <a:cs typeface="Courier New" pitchFamily="34" charset="-120"/>
-              </a:rPr>
-              <a:t>= 8243 − 1000 + (1000 − 567)</a:t>
-            </a:r>
-            <a:endParaRPr lang="en-US" sz="1100" dirty="0"/>
-          </a:p>
-        </p:txBody>
-      </p:sp>
-      <p:sp>
-        <p:nvSpPr>
-          <p:cNvPr id="10" name="Text 8"/>
-          <p:cNvSpPr/>
-          <p:nvPr/>
-        </p:nvSpPr>
-        <p:spPr>
-          <a:xfrm>
-            <a:off x="631627" y="2351187"/>
-            <a:ext cx="8086939" cy="174575"/>
-          </a:xfrm>
-          <a:prstGeom prst="rect">
-            <a:avLst/>
-          </a:prstGeom>
-          <a:noFill/>
-          <a:ln/>
-        </p:spPr>
-        <p:txBody>
-          <a:bodyPr wrap="square" lIns="0" tIns="0" rIns="0" bIns="0" rtlCol="0" anchor="t"/>
-          <a:lstStyle/>
-          <a:p>
-            <a:pPr algn="l" indent="0" marL="0">
-              <a:lnSpc>
-                <a:spcPts val="1375"/>
-              </a:lnSpc>
-              <a:buNone/>
-            </a:pPr>
-            <a:r>
-              <a:rPr lang="en-US" sz="1100" dirty="0">
-                <a:solidFill>
-                  <a:srgbClr val="1C2833"/>
-                </a:solidFill>
-                <a:latin typeface="Courier New" pitchFamily="34" charset="0"/>
-                <a:ea typeface="Courier New" pitchFamily="34" charset="-122"/>
-                <a:cs typeface="Courier New" pitchFamily="34" charset="-120"/>
-              </a:rPr>
-              <a:t>= 7243 + 433</a:t>
-            </a:r>
-            <a:endParaRPr lang="en-US" sz="1100" dirty="0"/>
-          </a:p>
-        </p:txBody>
-      </p:sp>
-      <p:sp>
-        <p:nvSpPr>
-          <p:cNvPr id="11" name="Text 9"/>
-          <p:cNvSpPr/>
-          <p:nvPr/>
-        </p:nvSpPr>
-        <p:spPr>
-          <a:xfrm>
-            <a:off x="631627" y="2525762"/>
-            <a:ext cx="8086939" cy="174575"/>
-          </a:xfrm>
-          <a:prstGeom prst="rect">
-            <a:avLst/>
-          </a:prstGeom>
-          <a:noFill/>
-          <a:ln/>
-        </p:spPr>
-        <p:txBody>
-          <a:bodyPr wrap="square" lIns="0" tIns="0" rIns="0" bIns="0" rtlCol="0" anchor="t"/>
-          <a:lstStyle/>
-          <a:p>
-            <a:pPr algn="l" indent="0" marL="0">
-              <a:lnSpc>
-                <a:spcPts val="1375"/>
-              </a:lnSpc>
-              <a:buNone/>
-            </a:pPr>
-            <a:r>
-              <a:rPr lang="en-US" sz="1100" dirty="0">
-                <a:solidFill>
-                  <a:srgbClr val="1C2833"/>
-                </a:solidFill>
-                <a:latin typeface="Courier New" pitchFamily="34" charset="0"/>
-                <a:ea typeface="Courier New" pitchFamily="34" charset="-122"/>
-                <a:cs typeface="Courier New" pitchFamily="34" charset="-120"/>
-              </a:rPr>
-              <a:t>= 7676.</a:t>
-            </a:r>
-            <a:endParaRPr lang="en-US" sz="1100" dirty="0"/>
-          </a:p>
-        </p:txBody>
-      </p:sp>
-      <p:sp>
-        <p:nvSpPr>
-          <p:cNvPr id="12" name="Text 10"/>
-          <p:cNvSpPr/>
-          <p:nvPr/>
-        </p:nvSpPr>
-        <p:spPr>
-          <a:xfrm>
-            <a:off x="406301" y="2916138"/>
-            <a:ext cx="8498026" cy="426541"/>
-          </a:xfrm>
-          <a:prstGeom prst="rect">
-            <a:avLst/>
-          </a:prstGeom>
-          <a:noFill/>
-          <a:ln/>
-        </p:spPr>
-        <p:txBody>
-          <a:bodyPr wrap="square" lIns="0" tIns="0" rIns="0" bIns="0" rtlCol="0" anchor="t"/>
-          <a:lstStyle/>
-          <a:p>
-            <a:pPr algn="l" indent="0" marL="0">
-              <a:lnSpc>
-                <a:spcPts val="1680"/>
-              </a:lnSpc>
-              <a:spcBef>
-                <a:spcPts val="300"/>
-              </a:spcBef>
-              <a:spcAft>
-                <a:spcPts val="300"/>
-              </a:spcAft>
-              <a:buNone/>
-            </a:pPr>
-            <a:r>
-              <a:rPr lang="en-US" sz="1200" i="1" dirty="0">
-                <a:solidFill>
-                  <a:srgbClr val="1C2833"/>
-                </a:solidFill>
-                <a:latin typeface="Arial" pitchFamily="34" charset="0"/>
-                <a:ea typeface="Arial" pitchFamily="34" charset="-122"/>
-                <a:cs typeface="Arial" pitchFamily="34" charset="-120"/>
-              </a:rPr>
-              <a:t>"We pick a base that's larger than the subtrahend (1000 &gt; 567 here). We subtract that base from the minuend (8243 − 1000 = 7243; easy). Then we add the complement (433). Done."</a:t>
-            </a:r>
-            <a:endParaRPr lang="en-US" sz="1200" dirty="0"/>
-          </a:p>
-        </p:txBody>
-      </p:sp>
-      <p:sp>
-        <p:nvSpPr>
-          <p:cNvPr id="13" name="Text 11"/>
-          <p:cNvSpPr/>
-          <p:nvPr/>
-        </p:nvSpPr>
-        <p:spPr>
-          <a:xfrm>
-            <a:off x="406301" y="3418880"/>
-            <a:ext cx="8498026" cy="213271"/>
-          </a:xfrm>
-          <a:prstGeom prst="rect">
-            <a:avLst/>
-          </a:prstGeom>
-          <a:noFill/>
-          <a:ln/>
-        </p:spPr>
-        <p:txBody>
-          <a:bodyPr wrap="square" lIns="0" tIns="0" rIns="0" bIns="0" rtlCol="0" anchor="t"/>
-          <a:lstStyle/>
-          <a:p>
-            <a:pPr algn="l" indent="0" marL="0">
-              <a:lnSpc>
-                <a:spcPts val="1680"/>
-              </a:lnSpc>
-              <a:spcBef>
-                <a:spcPts val="300"/>
-              </a:spcBef>
-              <a:spcAft>
-                <a:spcPts val="300"/>
-              </a:spcAft>
-              <a:buNone/>
-            </a:pPr>
-            <a:r>
-              <a:rPr lang="en-US" sz="1200" dirty="0">
-                <a:solidFill>
-                  <a:srgbClr val="1C2833"/>
-                </a:solidFill>
-                <a:latin typeface="Arial" pitchFamily="34" charset="0"/>
-                <a:ea typeface="Arial" pitchFamily="34" charset="-122"/>
-                <a:cs typeface="Arial" pitchFamily="34" charset="-120"/>
-              </a:rPr>
-              <a:t>Verify: 8243 − 567 = 7676 by standard borrowing. ✓</a:t>
-            </a:r>
-            <a:endParaRPr lang="en-US" sz="1200" dirty="0"/>
-          </a:p>
-        </p:txBody>
-      </p:sp>
-      <p:sp>
-        <p:nvSpPr>
-          <p:cNvPr id="14" name="Text 12"/>
-          <p:cNvSpPr/>
-          <p:nvPr/>
-        </p:nvSpPr>
-        <p:spPr>
-          <a:xfrm>
-            <a:off x="634901" y="3721001"/>
-            <a:ext cx="8102798" cy="281880"/>
-          </a:xfrm>
-          <a:prstGeom prst="rect">
-            <a:avLst/>
-          </a:prstGeom>
-          <a:noFill/>
-          <a:ln/>
-        </p:spPr>
-        <p:txBody>
-          <a:bodyPr wrap="square" lIns="0" tIns="0" rIns="0" bIns="0" rtlCol="0" anchor="t"/>
-          <a:lstStyle/>
-          <a:p>
-            <a:pPr algn="l" marL="342900" indent="-342900">
-              <a:lnSpc>
-                <a:spcPts val="1620"/>
-              </a:lnSpc>
-              <a:spcAft>
-                <a:spcPts val="300"/>
-              </a:spcAft>
-              <a:buSzPct val="100000"/>
-              <a:buChar char="•"/>
-            </a:pPr>
-            <a:r>
-              <a:rPr lang="en-US" sz="1200" b="1" dirty="0">
-                <a:solidFill>
-                  <a:srgbClr val="1C2833"/>
-                </a:solidFill>
-                <a:latin typeface="Arial" pitchFamily="34" charset="0"/>
-                <a:ea typeface="Arial" pitchFamily="34" charset="-122"/>
-                <a:cs typeface="Arial" pitchFamily="34" charset="-120"/>
-              </a:rPr>
-              <a:t>Why does this work?</a:t>
-            </a:r>
-            <a:pPr algn="l" indent="0" marL="0">
-              <a:lnSpc>
-                <a:spcPts val="1620"/>
-              </a:lnSpc>
-              <a:spcAft>
-                <a:spcPts val="300"/>
-              </a:spcAft>
-              <a:buNone/>
-            </a:pPr>
-            <a:r>
-              <a:rPr lang="en-US" sz="1200" dirty="0">
-                <a:solidFill>
-                  <a:srgbClr val="1C2833"/>
-                </a:solidFill>
-                <a:latin typeface="Arial" pitchFamily="34" charset="0"/>
-                <a:ea typeface="Arial" pitchFamily="34" charset="-122"/>
-                <a:cs typeface="Arial" pitchFamily="34" charset="-120"/>
-              </a:rPr>
-              <a:t> Algebra:</a:t>
-            </a:r>
-            <a:endParaRPr lang="en-US" sz="1200" dirty="0"/>
-          </a:p>
-        </p:txBody>
-      </p:sp>
-      <p:sp>
-        <p:nvSpPr>
-          <p:cNvPr id="15" name="Text 13"/>
-          <p:cNvSpPr/>
-          <p:nvPr/>
-        </p:nvSpPr>
-        <p:spPr>
-          <a:xfrm>
-            <a:off x="406301" y="4104382"/>
-            <a:ext cx="8331398" cy="428476"/>
-          </a:xfrm>
-          <a:prstGeom prst="rect">
-            <a:avLst/>
-          </a:prstGeom>
-          <a:solidFill>
-            <a:srgbClr val="F4F8F9"/>
-          </a:solidFill>
-          <a:ln/>
-        </p:spPr>
-        <p:txBody>
-          <a:bodyPr wrap="square" rtlCol="0" anchor="ctr"/>
-          <a:lstStyle/>
-          <a:p>
-            <a:pPr indent="0" marL="0">
-              <a:buNone/>
-            </a:pPr>
-            <a:endParaRPr lang="en-US" dirty="0"/>
-          </a:p>
-        </p:txBody>
-      </p:sp>
-      <p:sp>
-        <p:nvSpPr>
-          <p:cNvPr id="16" name="Shape 14"/>
-          <p:cNvSpPr/>
-          <p:nvPr/>
-        </p:nvSpPr>
-        <p:spPr>
-          <a:xfrm>
-            <a:off x="430113" y="4104382"/>
-            <a:ext cx="0" cy="428476"/>
-          </a:xfrm>
-          <a:prstGeom prst="line">
-            <a:avLst/>
-          </a:prstGeom>
-          <a:noFill/>
-          <a:ln w="47625">
-            <a:solidFill>
-              <a:srgbClr val="277884"/>
-            </a:solidFill>
-            <a:prstDash val="solid"/>
-          </a:ln>
-        </p:spPr>
-      </p:sp>
-      <p:sp>
-        <p:nvSpPr>
-          <p:cNvPr id="17" name="Text 15"/>
-          <p:cNvSpPr/>
-          <p:nvPr/>
-        </p:nvSpPr>
-        <p:spPr>
-          <a:xfrm>
-            <a:off x="631627" y="4231332"/>
-            <a:ext cx="8086939" cy="174575"/>
-          </a:xfrm>
-          <a:prstGeom prst="rect">
-            <a:avLst/>
-          </a:prstGeom>
-          <a:noFill/>
-          <a:ln/>
-        </p:spPr>
-        <p:txBody>
-          <a:bodyPr wrap="square" lIns="0" tIns="0" rIns="0" bIns="0" rtlCol="0" anchor="t"/>
-          <a:lstStyle/>
-          <a:p>
-            <a:pPr algn="l" indent="0" marL="0">
-              <a:lnSpc>
-                <a:spcPts val="1375"/>
-              </a:lnSpc>
-              <a:buNone/>
-            </a:pPr>
-            <a:r>
-              <a:rPr lang="en-US" sz="1100" dirty="0">
-                <a:solidFill>
-                  <a:srgbClr val="1C2833"/>
-                </a:solidFill>
-                <a:latin typeface="Courier New" pitchFamily="34" charset="0"/>
-                <a:ea typeface="Courier New" pitchFamily="34" charset="-122"/>
-                <a:cs typeface="Courier New" pitchFamily="34" charset="-120"/>
-              </a:rPr>
-              <a:t>M − S = M − (B − (B − S)) = M − B + complement(S to B)</a:t>
-            </a:r>
-            <a:endParaRPr lang="en-US" sz="1100" dirty="0"/>
-          </a:p>
-        </p:txBody>
-      </p:sp>
-      <p:sp>
-        <p:nvSpPr>
-          <p:cNvPr id="18" name="Text 16"/>
-          <p:cNvSpPr/>
-          <p:nvPr/>
-        </p:nvSpPr>
-        <p:spPr>
-          <a:xfrm>
-            <a:off x="406301" y="4621709"/>
-            <a:ext cx="8498026" cy="222796"/>
-          </a:xfrm>
-          <a:prstGeom prst="rect">
-            <a:avLst/>
-          </a:prstGeom>
-          <a:noFill/>
-          <a:ln/>
-        </p:spPr>
-        <p:txBody>
-          <a:bodyPr wrap="square" lIns="0" tIns="0" rIns="0" bIns="0" rtlCol="0" anchor="t"/>
-          <a:lstStyle/>
-          <a:p>
-            <a:pPr algn="l" indent="0" marL="0">
-              <a:lnSpc>
-                <a:spcPts val="1680"/>
-              </a:lnSpc>
-              <a:spcBef>
-                <a:spcPts val="300"/>
-              </a:spcBef>
-              <a:spcAft>
-                <a:spcPts val="300"/>
-              </a:spcAft>
-              <a:buNone/>
-            </a:pPr>
-            <a:r>
-              <a:rPr lang="en-US" sz="1200" i="1" dirty="0">
-                <a:solidFill>
-                  <a:srgbClr val="1C2833"/>
-                </a:solidFill>
-                <a:latin typeface="Arial" pitchFamily="34" charset="0"/>
-                <a:ea typeface="Arial" pitchFamily="34" charset="-122"/>
-                <a:cs typeface="Arial" pitchFamily="34" charset="-120"/>
-              </a:rPr>
-              <a:t>"</a:t>
-            </a:r>
-            <a:pPr algn="l" indent="0" marL="0">
-              <a:lnSpc>
-                <a:spcPts val="1680"/>
-              </a:lnSpc>
-              <a:spcBef>
-                <a:spcPts val="300"/>
-              </a:spcBef>
-              <a:spcAft>
-                <a:spcPts val="300"/>
-              </a:spcAft>
-              <a:buNone/>
-            </a:pPr>
-            <a:r>
-              <a:rPr lang="en-US" sz="1200" i="1" dirty="0">
-                <a:solidFill>
-                  <a:srgbClr val="1C2833"/>
-                </a:solidFill>
-                <a:latin typeface="Arial" pitchFamily="34" charset="0"/>
-                <a:ea typeface="Arial" pitchFamily="34" charset="-122"/>
-                <a:cs typeface="Arial" pitchFamily="34" charset="-120"/>
-              </a:rPr>
-              <a:t>B − S</a:t>
-            </a:r>
-            <a:pPr algn="l" indent="0" marL="0">
-              <a:lnSpc>
-                <a:spcPts val="1680"/>
-              </a:lnSpc>
-              <a:spcBef>
-                <a:spcPts val="300"/>
-              </a:spcBef>
-              <a:spcAft>
-                <a:spcPts val="300"/>
-              </a:spcAft>
-              <a:buNone/>
-            </a:pPr>
-            <a:r>
-              <a:rPr lang="en-US" sz="1200" i="1" dirty="0">
-                <a:solidFill>
-                  <a:srgbClr val="1C2833"/>
-                </a:solidFill>
-                <a:latin typeface="Arial" pitchFamily="34" charset="0"/>
-                <a:ea typeface="Arial" pitchFamily="34" charset="-122"/>
-                <a:cs typeface="Arial" pitchFamily="34" charset="-120"/>
-              </a:rPr>
-              <a:t> is the complement of S to base B. Add the complement and subtract B from M."</a:t>
-            </a:r>
-            <a:endParaRPr lang="en-US" sz="1200" dirty="0"/>
-          </a:p>
-        </p:txBody>
-      </p:sp>
-      <p:sp>
-        <p:nvSpPr>
-          <p:cNvPr id="19" name="Text 17"/>
-          <p:cNvSpPr/>
-          <p:nvPr/>
-        </p:nvSpPr>
-        <p:spPr>
-          <a:xfrm>
-            <a:off x="634901" y="4933355"/>
-            <a:ext cx="8102798" cy="281880"/>
-          </a:xfrm>
-          <a:prstGeom prst="rect">
-            <a:avLst/>
-          </a:prstGeom>
-          <a:noFill/>
-          <a:ln/>
-        </p:spPr>
-        <p:txBody>
-          <a:bodyPr wrap="square" lIns="0" tIns="0" rIns="0" bIns="0" rtlCol="0" anchor="t"/>
-          <a:lstStyle/>
-          <a:p>
-            <a:pPr algn="l" marL="342900" indent="-342900">
-              <a:lnSpc>
-                <a:spcPts val="1620"/>
-              </a:lnSpc>
-              <a:spcAft>
-                <a:spcPts val="300"/>
-              </a:spcAft>
-              <a:buSzPct val="100000"/>
-              <a:buChar char="•"/>
-            </a:pPr>
-            <a:r>
-              <a:rPr lang="en-US" sz="1200" b="1" dirty="0">
-                <a:solidFill>
-                  <a:srgbClr val="1C2833"/>
-                </a:solidFill>
-                <a:latin typeface="Arial" pitchFamily="34" charset="0"/>
-                <a:ea typeface="Arial" pitchFamily="34" charset="-122"/>
-                <a:cs typeface="Arial" pitchFamily="34" charset="-120"/>
-              </a:rPr>
-              <a:t>Worked examples (class participates):</a:t>
-            </a:r>
-            <a:endParaRPr lang="en-US" sz="1200" dirty="0"/>
-          </a:p>
-        </p:txBody>
-      </p:sp>
-      <p:sp>
-        <p:nvSpPr>
-          <p:cNvPr id="20" name="Text 18"/>
-          <p:cNvSpPr/>
-          <p:nvPr/>
-        </p:nvSpPr>
-        <p:spPr>
-          <a:xfrm>
-            <a:off x="406301" y="5304086"/>
-            <a:ext cx="8498026" cy="213271"/>
-          </a:xfrm>
-          <a:prstGeom prst="rect">
-            <a:avLst/>
-          </a:prstGeom>
-          <a:noFill/>
-          <a:ln/>
-        </p:spPr>
-        <p:txBody>
-          <a:bodyPr wrap="square" lIns="0" tIns="0" rIns="0" bIns="0" rtlCol="0" anchor="t"/>
-          <a:lstStyle/>
-          <a:p>
-            <a:pPr algn="l" indent="0" marL="0">
-              <a:lnSpc>
-                <a:spcPts val="1680"/>
-              </a:lnSpc>
-              <a:spcBef>
-                <a:spcPts val="300"/>
-              </a:spcBef>
-              <a:spcAft>
-                <a:spcPts val="300"/>
-              </a:spcAft>
-              <a:buNone/>
-            </a:pPr>
-            <a:r>
-              <a:rPr lang="en-US" sz="1200" i="1" dirty="0">
-                <a:solidFill>
-                  <a:srgbClr val="1C2833"/>
-                </a:solidFill>
-                <a:latin typeface="Arial" pitchFamily="34" charset="0"/>
-                <a:ea typeface="Arial" pitchFamily="34" charset="-122"/>
-                <a:cs typeface="Arial" pitchFamily="34" charset="-120"/>
-              </a:rPr>
-              <a:t>Each row: Problem · Base B · Complement · M − B · Add · Answer.</a:t>
-            </a:r>
-            <a:endParaRPr lang="en-US" sz="1200" dirty="0"/>
-          </a:p>
-        </p:txBody>
-      </p:sp>
-      <p:sp>
-        <p:nvSpPr>
-          <p:cNvPr id="21" name="Text 19"/>
-          <p:cNvSpPr/>
-          <p:nvPr/>
-        </p:nvSpPr>
-        <p:spPr>
-          <a:xfrm>
-            <a:off x="634901" y="5606207"/>
-            <a:ext cx="8102798" cy="1013222"/>
-          </a:xfrm>
-          <a:prstGeom prst="rect">
-            <a:avLst/>
-          </a:prstGeom>
-          <a:noFill/>
-          <a:ln/>
-        </p:spPr>
-        <p:txBody>
-          <a:bodyPr wrap="square" lIns="0" tIns="0" rIns="0" bIns="0" rtlCol="0" anchor="t"/>
-          <a:lstStyle/>
-          <a:p>
-            <a:pPr algn="l" marL="342900" indent="-342900">
-              <a:lnSpc>
-                <a:spcPts val="1620"/>
-              </a:lnSpc>
-              <a:spcAft>
-                <a:spcPts val="300"/>
-              </a:spcAft>
-              <a:buSzPct val="100000"/>
-              <a:buChar char="•"/>
-            </a:pPr>
-            <a:r>
-              <a:rPr lang="en-US" sz="1200" b="1" dirty="0">
-                <a:solidFill>
-                  <a:srgbClr val="1C2833"/>
-                </a:solidFill>
-                <a:latin typeface="Arial" pitchFamily="34" charset="0"/>
-                <a:ea typeface="Arial" pitchFamily="34" charset="-122"/>
-                <a:cs typeface="Arial" pitchFamily="34" charset="-120"/>
-              </a:rPr>
-              <a:t>8243 − 567</a:t>
-            </a:r>
-            <a:pPr algn="l" indent="0" marL="0">
-              <a:lnSpc>
-                <a:spcPts val="1620"/>
-              </a:lnSpc>
-              <a:spcAft>
-                <a:spcPts val="300"/>
-              </a:spcAft>
-              <a:buNone/>
-            </a:pPr>
-            <a:r>
-              <a:rPr lang="en-US" sz="1200" dirty="0">
-                <a:solidFill>
-                  <a:srgbClr val="1C2833"/>
-                </a:solidFill>
-                <a:latin typeface="Arial" pitchFamily="34" charset="0"/>
-                <a:ea typeface="Arial" pitchFamily="34" charset="-122"/>
-                <a:cs typeface="Arial" pitchFamily="34" charset="-120"/>
-              </a:rPr>
-              <a:t> — 1000 · 433 · 7243 · 7243 + 433 · </a:t>
-            </a:r>
-            <a:pPr algn="l" indent="0" marL="0">
-              <a:lnSpc>
-                <a:spcPts val="1620"/>
-              </a:lnSpc>
-              <a:spcAft>
-                <a:spcPts val="300"/>
-              </a:spcAft>
-              <a:buNone/>
-            </a:pPr>
-            <a:r>
-              <a:rPr lang="en-US" sz="1200" b="1" dirty="0">
-                <a:solidFill>
-                  <a:srgbClr val="1C2833"/>
-                </a:solidFill>
-                <a:latin typeface="Arial" pitchFamily="34" charset="0"/>
-                <a:ea typeface="Arial" pitchFamily="34" charset="-122"/>
-                <a:cs typeface="Arial" pitchFamily="34" charset="-120"/>
-              </a:rPr>
-              <a:t>7676</a:t>
-            </a:r>
-            <a:endParaRPr lang="en-US" sz="1200" dirty="0"/>
-          </a:p>
-          <a:p>
-            <a:pPr algn="l" marL="342900" indent="-342900">
-              <a:lnSpc>
-                <a:spcPts val="1620"/>
-              </a:lnSpc>
-              <a:spcAft>
-                <a:spcPts val="300"/>
-              </a:spcAft>
-              <a:buSzPct val="100000"/>
-              <a:buChar char="•"/>
-            </a:pPr>
-            <a:r>
-              <a:rPr lang="en-US" sz="1200" b="1" dirty="0">
-                <a:solidFill>
-                  <a:srgbClr val="1C2833"/>
-                </a:solidFill>
-                <a:latin typeface="Arial" pitchFamily="34" charset="0"/>
-                <a:ea typeface="Arial" pitchFamily="34" charset="-122"/>
-                <a:cs typeface="Arial" pitchFamily="34" charset="-120"/>
-              </a:rPr>
-              <a:t>5172 − 89</a:t>
-            </a:r>
-            <a:pPr algn="l" indent="0" marL="0">
-              <a:lnSpc>
-                <a:spcPts val="1620"/>
-              </a:lnSpc>
-              <a:spcAft>
-                <a:spcPts val="300"/>
-              </a:spcAft>
-              <a:buNone/>
-            </a:pPr>
-            <a:r>
-              <a:rPr lang="en-US" sz="1200" dirty="0">
-                <a:solidFill>
-                  <a:srgbClr val="1C2833"/>
-                </a:solidFill>
-                <a:latin typeface="Arial" pitchFamily="34" charset="0"/>
-                <a:ea typeface="Arial" pitchFamily="34" charset="-122"/>
-                <a:cs typeface="Arial" pitchFamily="34" charset="-120"/>
-              </a:rPr>
-              <a:t> — 100 · 11 · 5072 · 5072 + 11 · </a:t>
-            </a:r>
-            <a:pPr algn="l" indent="0" marL="0">
-              <a:lnSpc>
-                <a:spcPts val="1620"/>
-              </a:lnSpc>
-              <a:spcAft>
-                <a:spcPts val="300"/>
-              </a:spcAft>
-              <a:buNone/>
-            </a:pPr>
-            <a:r>
-              <a:rPr lang="en-US" sz="1200" b="1" dirty="0">
-                <a:solidFill>
-                  <a:srgbClr val="1C2833"/>
-                </a:solidFill>
-                <a:latin typeface="Arial" pitchFamily="34" charset="0"/>
-                <a:ea typeface="Arial" pitchFamily="34" charset="-122"/>
-                <a:cs typeface="Arial" pitchFamily="34" charset="-120"/>
-              </a:rPr>
-              <a:t>5083</a:t>
-            </a:r>
-            <a:endParaRPr lang="en-US" sz="1200" dirty="0"/>
-          </a:p>
-          <a:p>
-            <a:pPr algn="l" marL="342900" indent="-342900">
-              <a:lnSpc>
-                <a:spcPts val="1620"/>
-              </a:lnSpc>
-              <a:spcAft>
-                <a:spcPts val="300"/>
-              </a:spcAft>
-              <a:buSzPct val="100000"/>
-              <a:buChar char="•"/>
-            </a:pPr>
-            <a:r>
-              <a:rPr lang="en-US" sz="1200" b="1" dirty="0">
-                <a:solidFill>
-                  <a:srgbClr val="1C2833"/>
-                </a:solidFill>
-                <a:latin typeface="Arial" pitchFamily="34" charset="0"/>
-                <a:ea typeface="Arial" pitchFamily="34" charset="-122"/>
-                <a:cs typeface="Arial" pitchFamily="34" charset="-120"/>
-              </a:rPr>
-              <a:t>6300 − 248</a:t>
-            </a:r>
-            <a:pPr algn="l" indent="0" marL="0">
-              <a:lnSpc>
-                <a:spcPts val="1620"/>
-              </a:lnSpc>
-              <a:spcAft>
-                <a:spcPts val="300"/>
-              </a:spcAft>
-              <a:buNone/>
-            </a:pPr>
-            <a:r>
-              <a:rPr lang="en-US" sz="1200" dirty="0">
-                <a:solidFill>
-                  <a:srgbClr val="1C2833"/>
-                </a:solidFill>
-                <a:latin typeface="Arial" pitchFamily="34" charset="0"/>
-                <a:ea typeface="Arial" pitchFamily="34" charset="-122"/>
-                <a:cs typeface="Arial" pitchFamily="34" charset="-120"/>
-              </a:rPr>
-              <a:t> — 1000 · 752 · 5300 · 5300 + 752 · </a:t>
-            </a:r>
-            <a:pPr algn="l" indent="0" marL="0">
-              <a:lnSpc>
-                <a:spcPts val="1620"/>
-              </a:lnSpc>
-              <a:spcAft>
-                <a:spcPts val="300"/>
-              </a:spcAft>
-              <a:buNone/>
-            </a:pPr>
-            <a:r>
-              <a:rPr lang="en-US" sz="1200" b="1" dirty="0">
-                <a:solidFill>
-                  <a:srgbClr val="1C2833"/>
-                </a:solidFill>
-                <a:latin typeface="Arial" pitchFamily="34" charset="0"/>
-                <a:ea typeface="Arial" pitchFamily="34" charset="-122"/>
-                <a:cs typeface="Arial" pitchFamily="34" charset="-120"/>
-              </a:rPr>
-              <a:t>6052</a:t>
-            </a:r>
-            <a:endParaRPr lang="en-US" sz="1200" dirty="0"/>
-          </a:p>
-          <a:p>
-            <a:pPr algn="l" marL="342900" indent="-342900">
-              <a:lnSpc>
-                <a:spcPts val="1620"/>
-              </a:lnSpc>
-              <a:spcAft>
-                <a:spcPts val="300"/>
-              </a:spcAft>
-              <a:buSzPct val="100000"/>
-              <a:buChar char="•"/>
-            </a:pPr>
-            <a:r>
-              <a:rPr lang="en-US" sz="1200" b="1" dirty="0">
-                <a:solidFill>
-                  <a:srgbClr val="1C2833"/>
-                </a:solidFill>
-                <a:latin typeface="Arial" pitchFamily="34" charset="0"/>
-                <a:ea typeface="Arial" pitchFamily="34" charset="-122"/>
-                <a:cs typeface="Arial" pitchFamily="34" charset="-120"/>
-              </a:rPr>
-              <a:t>12 000 − 4 567</a:t>
-            </a:r>
-            <a:pPr algn="l" indent="0" marL="0">
-              <a:lnSpc>
-                <a:spcPts val="1620"/>
-              </a:lnSpc>
-              <a:spcAft>
-                <a:spcPts val="300"/>
-              </a:spcAft>
-              <a:buNone/>
-            </a:pPr>
-            <a:r>
-              <a:rPr lang="en-US" sz="1200" dirty="0">
-                <a:solidFill>
-                  <a:srgbClr val="1C2833"/>
-                </a:solidFill>
-                <a:latin typeface="Arial" pitchFamily="34" charset="0"/>
-                <a:ea typeface="Arial" pitchFamily="34" charset="-122"/>
-                <a:cs typeface="Arial" pitchFamily="34" charset="-120"/>
-              </a:rPr>
-              <a:t> — 10 000 · 5 433 · 2 000 · 2 000 + 5 433 · </a:t>
-            </a:r>
-            <a:pPr algn="l" indent="0" marL="0">
-              <a:lnSpc>
-                <a:spcPts val="1620"/>
-              </a:lnSpc>
-              <a:spcAft>
-                <a:spcPts val="300"/>
-              </a:spcAft>
-              <a:buNone/>
-            </a:pPr>
-            <a:r>
-              <a:rPr lang="en-US" sz="1200" b="1" dirty="0">
-                <a:solidFill>
-                  <a:srgbClr val="1C2833"/>
-                </a:solidFill>
-                <a:latin typeface="Arial" pitchFamily="34" charset="0"/>
-                <a:ea typeface="Arial" pitchFamily="34" charset="-122"/>
-                <a:cs typeface="Arial" pitchFamily="34" charset="-120"/>
-              </a:rPr>
-              <a:t>7 433</a:t>
-            </a:r>
-            <a:endParaRPr lang="en-US" sz="1200" dirty="0"/>
-          </a:p>
-        </p:txBody>
-      </p:sp>
-      <p:sp>
-        <p:nvSpPr>
-          <p:cNvPr id="22" name="Text 20"/>
-          <p:cNvSpPr/>
-          <p:nvPr/>
-        </p:nvSpPr>
-        <p:spPr>
-          <a:xfrm>
-            <a:off x="634901" y="6720929"/>
-            <a:ext cx="8102798" cy="898922"/>
-          </a:xfrm>
-          <a:prstGeom prst="rect">
-            <a:avLst/>
-          </a:prstGeom>
-          <a:noFill/>
-          <a:ln/>
-        </p:spPr>
-        <p:txBody>
-          <a:bodyPr wrap="square" lIns="0" tIns="0" rIns="0" bIns="0" rtlCol="0" anchor="t"/>
-          <a:lstStyle/>
-          <a:p>
-            <a:pPr algn="l" marL="342900" indent="-342900">
-              <a:lnSpc>
-                <a:spcPts val="1620"/>
-              </a:lnSpc>
-              <a:spcAft>
-                <a:spcPts val="300"/>
-              </a:spcAft>
-              <a:buSzPct val="100000"/>
-              <a:buChar char="•"/>
-            </a:pPr>
-            <a:r>
-              <a:rPr lang="en-US" sz="1200" b="1" dirty="0">
-                <a:solidFill>
-                  <a:srgbClr val="1C2833"/>
-                </a:solidFill>
-                <a:latin typeface="Arial" pitchFamily="34" charset="0"/>
-                <a:ea typeface="Arial" pitchFamily="34" charset="-122"/>
-                <a:cs typeface="Arial" pitchFamily="34" charset="-120"/>
-              </a:rPr>
-              <a:t>When is this faster than standard borrowing?</a:t>
-            </a:r>
-            <a:pPr algn="l" indent="0" marL="0">
-              <a:lnSpc>
-                <a:spcPts val="1620"/>
-              </a:lnSpc>
-              <a:spcAft>
-                <a:spcPts val="300"/>
-              </a:spcAft>
-              <a:buNone/>
-            </a:pPr>
-            <a:r>
-              <a:rPr lang="en-US" sz="1200" dirty="0">
-                <a:solidFill>
-                  <a:srgbClr val="1C2833"/>
-                </a:solidFill>
-                <a:latin typeface="Arial" pitchFamily="34" charset="0"/>
-                <a:ea typeface="Arial" pitchFamily="34" charset="-122"/>
-                <a:cs typeface="Arial" pitchFamily="34" charset="-120"/>
-              </a:rPr>
-              <a:t> </a:t>
-            </a:r>
-            <a:pPr algn="l" indent="0" marL="0">
-              <a:lnSpc>
-                <a:spcPts val="1620"/>
-              </a:lnSpc>
-              <a:spcAft>
-                <a:spcPts val="300"/>
-              </a:spcAft>
-              <a:buNone/>
-            </a:pPr>
-            <a:r>
-              <a:rPr lang="en-US" sz="1200" i="1" dirty="0">
-                <a:solidFill>
-                  <a:srgbClr val="1C2833"/>
-                </a:solidFill>
-                <a:latin typeface="Arial" pitchFamily="34" charset="0"/>
-                <a:ea typeface="Arial" pitchFamily="34" charset="-122"/>
-                <a:cs typeface="Arial" pitchFamily="34" charset="-120"/>
-              </a:rPr>
-              <a:t>"When the subtrahend is close to a base — say 567 to 1000 — Nikhilam-with-adjustment is genuinely faster. When the subtrahend is in the middle (like 4567 from 8243, where 4567 is not close to any clean base), standard borrowing is competitive. The mature mental-arithmetic move is to know both and pick."</a:t>
-            </a:r>
-            <a:endParaRPr lang="en-US" sz="1200" dirty="0"/>
-          </a:p>
-        </p:txBody>
-      </p:sp>
-      <p:sp>
-        <p:nvSpPr>
-          <p:cNvPr id="23" name="Text 21"/>
-          <p:cNvSpPr/>
-          <p:nvPr/>
-        </p:nvSpPr>
-        <p:spPr>
-          <a:xfrm>
-            <a:off x="406301" y="7784902"/>
+          <p:cNvPr id="5" name="Text 3"/>
+          <p:cNvSpPr/>
+          <p:nvPr/>
+        </p:nvSpPr>
+        <p:spPr>
+          <a:xfrm>
+            <a:off x="406301" y="4434929"/>
             <a:ext cx="8498026" cy="213271"/>
           </a:xfrm>
           <a:prstGeom prst="rect">
@@ -5534,7 +7528,7 @@
                 <a:ea typeface="Georgia" pitchFamily="34" charset="-122"/>
                 <a:cs typeface="Georgia" pitchFamily="34" charset="-120"/>
               </a:rPr>
-              <a:t>Activity (20 min) — Shopkeeper role-play</a:t>
+              <a:t>Core (15 min) — Beyond clean bases</a:t>
             </a:r>
             <a:endParaRPr lang="en-US" sz="1800" dirty="0"/>
           </a:p>
@@ -5548,8 +7542,8 @@
         </p:nvSpPr>
         <p:spPr>
           <a:xfrm>
-            <a:off x="406301" y="870942"/>
-            <a:ext cx="8498026" cy="222796"/>
+            <a:off x="634901" y="883593"/>
+            <a:ext cx="8102798" cy="506611"/>
           </a:xfrm>
           <a:prstGeom prst="rect">
             <a:avLst/>
@@ -5561,13 +7555,31 @@
           <a:bodyPr wrap="square" lIns="0" tIns="0" rIns="0" bIns="0" rtlCol="0" anchor="t"/>
           <a:lstStyle/>
           <a:p>
-            <a:pPr algn="l" indent="0" marL="0">
-              <a:lnSpc>
-                <a:spcPts val="1680"/>
-              </a:lnSpc>
-              <a:spcBef>
-                <a:spcPts val="300"/>
-              </a:spcBef>
+            <a:pPr algn="l" marL="342900" indent="-342900">
+              <a:lnSpc>
+                <a:spcPts val="1620"/>
+              </a:lnSpc>
+              <a:spcAft>
+                <a:spcPts val="300"/>
+              </a:spcAft>
+              <a:buSzPct val="100000"/>
+              <a:buChar char="•"/>
+            </a:pPr>
+            <a:r>
+              <a:rPr lang="en-US" sz="1200" b="1" dirty="0">
+                <a:solidFill>
+                  <a:srgbClr val="1C2833"/>
+                </a:solidFill>
+                <a:latin typeface="Arial" pitchFamily="34" charset="0"/>
+                <a:ea typeface="Arial" pitchFamily="34" charset="-122"/>
+                <a:cs typeface="Arial" pitchFamily="34" charset="-120"/>
+              </a:rPr>
+              <a:t>The setup.</a:t>
+            </a:r>
+            <a:pPr algn="l" indent="0" marL="0">
+              <a:lnSpc>
+                <a:spcPts val="1620"/>
+              </a:lnSpc>
               <a:spcAft>
                 <a:spcPts val="300"/>
               </a:spcAft>
@@ -5582,53 +7594,107 @@
                 <a:ea typeface="Arial" pitchFamily="34" charset="-122"/>
                 <a:cs typeface="Arial" pitchFamily="34" charset="-120"/>
               </a:rPr>
-              <a:t>See </a:t>
-            </a:r>
-            <a:pPr algn="l" indent="0" marL="0">
-              <a:lnSpc>
-                <a:spcPts val="1680"/>
-              </a:lnSpc>
-              <a:spcBef>
-                <a:spcPts val="300"/>
-              </a:spcBef>
-              <a:spcAft>
-                <a:spcPts val="300"/>
-              </a:spcAft>
-              <a:buNone/>
-            </a:pPr>
-            <a:r>
-              <a:rPr lang="en-US" sz="1200" dirty="0">
-                <a:solidFill>
-                  <a:srgbClr val="1C2833"/>
-                </a:solidFill>
-                <a:latin typeface="Arial" pitchFamily="34" charset="0"/>
-                <a:ea typeface="Arial" pitchFamily="34" charset="-122"/>
-                <a:cs typeface="Arial" pitchFamily="34" charset="-120"/>
-              </a:rPr>
-              <a:t>activities/activity-02-shopkeeper.md</a:t>
-            </a:r>
-            <a:pPr algn="l" indent="0" marL="0">
-              <a:lnSpc>
-                <a:spcPts val="1680"/>
-              </a:lnSpc>
-              <a:spcBef>
-                <a:spcPts val="300"/>
-              </a:spcBef>
-              <a:spcAft>
-                <a:spcPts val="300"/>
-              </a:spcAft>
-              <a:buNone/>
-            </a:pPr>
-            <a:r>
-              <a:rPr lang="en-US" sz="1200" dirty="0">
-                <a:solidFill>
-                  <a:srgbClr val="1C2833"/>
-                </a:solidFill>
-                <a:latin typeface="Arial" pitchFamily="34" charset="0"/>
-                <a:ea typeface="Arial" pitchFamily="34" charset="-122"/>
-                <a:cs typeface="Arial" pitchFamily="34" charset="-120"/>
-              </a:rPr>
-              <a:t>.</a:t>
+              <a:t> </a:t>
+            </a:r>
+            <a:pPr algn="l" indent="0" marL="0">
+              <a:lnSpc>
+                <a:spcPts val="1620"/>
+              </a:lnSpc>
+              <a:spcAft>
+                <a:spcPts val="300"/>
+              </a:spcAft>
+              <a:buNone/>
+            </a:pPr>
+            <a:r>
+              <a:rPr lang="en-US" sz="1200" i="1" dirty="0">
+                <a:solidFill>
+                  <a:srgbClr val="1C2833"/>
+                </a:solidFill>
+                <a:latin typeface="Arial" pitchFamily="34" charset="0"/>
+                <a:ea typeface="Arial" pitchFamily="34" charset="-122"/>
+                <a:cs typeface="Arial" pitchFamily="34" charset="-120"/>
+              </a:rPr>
+              <a:t>"So far we've done </a:t>
+            </a:r>
+            <a:pPr algn="l" indent="0" marL="0">
+              <a:lnSpc>
+                <a:spcPts val="1620"/>
+              </a:lnSpc>
+              <a:spcAft>
+                <a:spcPts val="300"/>
+              </a:spcAft>
+              <a:buNone/>
+            </a:pPr>
+            <a:r>
+              <a:rPr lang="en-US" sz="1200" i="1" dirty="0">
+                <a:solidFill>
+                  <a:srgbClr val="1C2833"/>
+                </a:solidFill>
+                <a:latin typeface="Arial" pitchFamily="34" charset="0"/>
+                <a:ea typeface="Arial" pitchFamily="34" charset="-122"/>
+                <a:cs typeface="Arial" pitchFamily="34" charset="-120"/>
+              </a:rPr>
+              <a:t>1000 − 567</a:t>
+            </a:r>
+            <a:pPr algn="l" indent="0" marL="0">
+              <a:lnSpc>
+                <a:spcPts val="1620"/>
+              </a:lnSpc>
+              <a:spcAft>
+                <a:spcPts val="300"/>
+              </a:spcAft>
+              <a:buNone/>
+            </a:pPr>
+            <a:r>
+              <a:rPr lang="en-US" sz="1200" i="1" dirty="0">
+                <a:solidFill>
+                  <a:srgbClr val="1C2833"/>
+                </a:solidFill>
+                <a:latin typeface="Arial" pitchFamily="34" charset="0"/>
+                <a:ea typeface="Arial" pitchFamily="34" charset="-122"/>
+                <a:cs typeface="Arial" pitchFamily="34" charset="-120"/>
+              </a:rPr>
+              <a:t>. Easy: complement of 567 is the answer, 433. Now: </a:t>
+            </a:r>
+            <a:pPr algn="l" indent="0" marL="0">
+              <a:lnSpc>
+                <a:spcPts val="1620"/>
+              </a:lnSpc>
+              <a:spcAft>
+                <a:spcPts val="300"/>
+              </a:spcAft>
+              <a:buNone/>
+            </a:pPr>
+            <a:r>
+              <a:rPr lang="en-US" sz="1200" i="1" dirty="0">
+                <a:solidFill>
+                  <a:srgbClr val="1C2833"/>
+                </a:solidFill>
+                <a:latin typeface="Arial" pitchFamily="34" charset="0"/>
+                <a:ea typeface="Arial" pitchFamily="34" charset="-122"/>
+                <a:cs typeface="Arial" pitchFamily="34" charset="-120"/>
+              </a:rPr>
+              <a:t>8243 − 567</a:t>
+            </a:r>
+            <a:pPr algn="l" indent="0" marL="0">
+              <a:lnSpc>
+                <a:spcPts val="1620"/>
+              </a:lnSpc>
+              <a:spcAft>
+                <a:spcPts val="300"/>
+              </a:spcAft>
+              <a:buNone/>
+            </a:pPr>
+            <a:r>
+              <a:rPr lang="en-US" sz="1200" i="1" dirty="0">
+                <a:solidFill>
+                  <a:srgbClr val="1C2833"/>
+                </a:solidFill>
+                <a:latin typeface="Arial" pitchFamily="34" charset="0"/>
+                <a:ea typeface="Arial" pitchFamily="34" charset="-122"/>
+                <a:cs typeface="Arial" pitchFamily="34" charset="-120"/>
+              </a:rPr>
+              <a:t>. The minuend isn't a clean power of ten. What do we do?"</a:t>
             </a:r>
             <a:endParaRPr lang="en-US" sz="1200" dirty="0"/>
           </a:p>
@@ -5642,8 +7708,8 @@
         </p:nvSpPr>
         <p:spPr>
           <a:xfrm>
-            <a:off x="406301" y="1169938"/>
-            <a:ext cx="8498026" cy="639812"/>
+            <a:off x="634901" y="1491704"/>
+            <a:ext cx="8102798" cy="281880"/>
           </a:xfrm>
           <a:prstGeom prst="rect">
             <a:avLst/>
@@ -5655,13 +7721,31 @@
           <a:bodyPr wrap="square" lIns="0" tIns="0" rIns="0" bIns="0" rtlCol="0" anchor="t"/>
           <a:lstStyle/>
           <a:p>
-            <a:pPr algn="l" indent="0" marL="0">
-              <a:lnSpc>
-                <a:spcPts val="1680"/>
-              </a:lnSpc>
-              <a:spcBef>
-                <a:spcPts val="300"/>
-              </a:spcBef>
+            <a:pPr algn="l" marL="342900" indent="-342900">
+              <a:lnSpc>
+                <a:spcPts val="1620"/>
+              </a:lnSpc>
+              <a:spcAft>
+                <a:spcPts val="300"/>
+              </a:spcAft>
+              <a:buSzPct val="100000"/>
+              <a:buChar char="•"/>
+            </a:pPr>
+            <a:r>
+              <a:rPr lang="en-US" sz="1200" b="1" dirty="0">
+                <a:solidFill>
+                  <a:srgbClr val="1C2833"/>
+                </a:solidFill>
+                <a:latin typeface="Arial" pitchFamily="34" charset="0"/>
+                <a:ea typeface="Arial" pitchFamily="34" charset="-122"/>
+                <a:cs typeface="Arial" pitchFamily="34" charset="-120"/>
+              </a:rPr>
+              <a:t>Idea: borrow a base.</a:t>
+            </a:r>
+            <a:pPr algn="l" indent="0" marL="0">
+              <a:lnSpc>
+                <a:spcPts val="1620"/>
+              </a:lnSpc>
               <a:spcAft>
                 <a:spcPts val="300"/>
               </a:spcAft>
@@ -5676,7 +7760,7 @@
                 <a:ea typeface="Arial" pitchFamily="34" charset="-122"/>
                 <a:cs typeface="Arial" pitchFamily="34" charset="-120"/>
               </a:rPr>
-              <a:t>– In pairs, one is the shopkeeper, one is the customer. – Customer hands over a "round" note (100, 500, 1000, or 2000 rupees). – Shopkeeper computes the change using Nikhilam (mental). – Swap roles every 3 rounds. – 10 scenarios per pair. Times recorded.</a:t>
+              <a:t> Rewrite:</a:t>
             </a:r>
             <a:endParaRPr lang="en-US" sz="1200" dirty="0"/>
           </a:p>
@@ -5834,7 +7918,7 @@
                 <a:ea typeface="Georgia" pitchFamily="34" charset="-122"/>
                 <a:cs typeface="Georgia" pitchFamily="34" charset="-120"/>
               </a:rPr>
-              <a:t>Wrap-up (5 min)</a:t>
+              <a:t>Core (15 min) — Beyond clean bases (cont.)</a:t>
             </a:r>
             <a:endParaRPr lang="en-US" sz="1800" dirty="0"/>
           </a:p>
@@ -5848,8 +7932,61 @@
         </p:nvSpPr>
         <p:spPr>
           <a:xfrm>
-            <a:off x="406301" y="870942"/>
-            <a:ext cx="8498026" cy="639812"/>
+            <a:off x="406301" y="883593"/>
+            <a:ext cx="8331398" cy="952202"/>
+          </a:xfrm>
+          <a:prstGeom prst="rect">
+            <a:avLst/>
+          </a:prstGeom>
+          <a:solidFill>
+            <a:srgbClr val="F4F8F9"/>
+          </a:solidFill>
+          <a:ln/>
+        </p:spPr>
+        <p:txBody>
+          <a:bodyPr wrap="square" rtlCol="0" anchor="ctr"/>
+          <a:lstStyle/>
+          <a:p>
+            <a:pPr indent="0" marL="0">
+              <a:buNone/>
+            </a:pPr>
+            <a:endParaRPr lang="en-US" dirty="0"/>
+          </a:p>
+        </p:txBody>
+      </p:sp>
+      <p:sp>
+        <p:nvSpPr>
+          <p:cNvPr id="5" name="Shape 3"/>
+          <p:cNvSpPr/>
+          <p:nvPr/>
+        </p:nvSpPr>
+        <p:spPr>
+          <a:xfrm>
+            <a:off x="430113" y="883593"/>
+            <a:ext cx="0" cy="952202"/>
+          </a:xfrm>
+          <a:prstGeom prst="line">
+            <a:avLst/>
+          </a:prstGeom>
+          <a:noFill/>
+          <a:ln w="47625">
+            <a:solidFill>
+              <a:srgbClr val="277884"/>
+            </a:solidFill>
+            <a:prstDash val="solid"/>
+          </a:ln>
+        </p:spPr>
+      </p:sp>
+      <p:sp>
+        <p:nvSpPr>
+          <p:cNvPr id="6" name="Text 4"/>
+          <p:cNvSpPr/>
+          <p:nvPr/>
+        </p:nvSpPr>
+        <p:spPr>
+          <a:xfrm>
+            <a:off x="631627" y="1010543"/>
+            <a:ext cx="8086939" cy="174575"/>
           </a:xfrm>
           <a:prstGeom prst="rect">
             <a:avLst/>
@@ -5863,6 +8000,174 @@
           <a:p>
             <a:pPr algn="l" indent="0" marL="0">
               <a:lnSpc>
+                <a:spcPts val="1375"/>
+              </a:lnSpc>
+              <a:buNone/>
+            </a:pPr>
+            <a:r>
+              <a:rPr lang="en-US" sz="1100" dirty="0">
+                <a:solidFill>
+                  <a:srgbClr val="1C2833"/>
+                </a:solidFill>
+                <a:latin typeface="Courier New" pitchFamily="34" charset="0"/>
+                <a:ea typeface="Courier New" pitchFamily="34" charset="-122"/>
+                <a:cs typeface="Courier New" pitchFamily="34" charset="-120"/>
+              </a:rPr>
+              <a:t>8243 − 567</a:t>
+            </a:r>
+            <a:endParaRPr lang="en-US" sz="1100" dirty="0"/>
+          </a:p>
+        </p:txBody>
+      </p:sp>
+      <p:sp>
+        <p:nvSpPr>
+          <p:cNvPr id="7" name="Text 5"/>
+          <p:cNvSpPr/>
+          <p:nvPr/>
+        </p:nvSpPr>
+        <p:spPr>
+          <a:xfrm>
+            <a:off x="631627" y="1185118"/>
+            <a:ext cx="8086939" cy="174575"/>
+          </a:xfrm>
+          <a:prstGeom prst="rect">
+            <a:avLst/>
+          </a:prstGeom>
+          <a:noFill/>
+          <a:ln/>
+        </p:spPr>
+        <p:txBody>
+          <a:bodyPr wrap="square" lIns="0" tIns="0" rIns="0" bIns="0" rtlCol="0" anchor="t"/>
+          <a:lstStyle/>
+          <a:p>
+            <a:pPr algn="l" indent="0" marL="0">
+              <a:lnSpc>
+                <a:spcPts val="1375"/>
+              </a:lnSpc>
+              <a:buNone/>
+            </a:pPr>
+            <a:r>
+              <a:rPr lang="en-US" sz="1100" dirty="0">
+                <a:solidFill>
+                  <a:srgbClr val="1C2833"/>
+                </a:solidFill>
+                <a:latin typeface="Courier New" pitchFamily="34" charset="0"/>
+                <a:ea typeface="Courier New" pitchFamily="34" charset="-122"/>
+                <a:cs typeface="Courier New" pitchFamily="34" charset="-120"/>
+              </a:rPr>
+              <a:t>= 8243 − 1000 + (1000 − 567)</a:t>
+            </a:r>
+            <a:endParaRPr lang="en-US" sz="1100" dirty="0"/>
+          </a:p>
+        </p:txBody>
+      </p:sp>
+      <p:sp>
+        <p:nvSpPr>
+          <p:cNvPr id="8" name="Text 6"/>
+          <p:cNvSpPr/>
+          <p:nvPr/>
+        </p:nvSpPr>
+        <p:spPr>
+          <a:xfrm>
+            <a:off x="631627" y="1359694"/>
+            <a:ext cx="8086939" cy="174575"/>
+          </a:xfrm>
+          <a:prstGeom prst="rect">
+            <a:avLst/>
+          </a:prstGeom>
+          <a:noFill/>
+          <a:ln/>
+        </p:spPr>
+        <p:txBody>
+          <a:bodyPr wrap="square" lIns="0" tIns="0" rIns="0" bIns="0" rtlCol="0" anchor="t"/>
+          <a:lstStyle/>
+          <a:p>
+            <a:pPr algn="l" indent="0" marL="0">
+              <a:lnSpc>
+                <a:spcPts val="1375"/>
+              </a:lnSpc>
+              <a:buNone/>
+            </a:pPr>
+            <a:r>
+              <a:rPr lang="en-US" sz="1100" dirty="0">
+                <a:solidFill>
+                  <a:srgbClr val="1C2833"/>
+                </a:solidFill>
+                <a:latin typeface="Courier New" pitchFamily="34" charset="0"/>
+                <a:ea typeface="Courier New" pitchFamily="34" charset="-122"/>
+                <a:cs typeface="Courier New" pitchFamily="34" charset="-120"/>
+              </a:rPr>
+              <a:t>= 7243 + 433</a:t>
+            </a:r>
+            <a:endParaRPr lang="en-US" sz="1100" dirty="0"/>
+          </a:p>
+        </p:txBody>
+      </p:sp>
+      <p:sp>
+        <p:nvSpPr>
+          <p:cNvPr id="9" name="Text 7"/>
+          <p:cNvSpPr/>
+          <p:nvPr/>
+        </p:nvSpPr>
+        <p:spPr>
+          <a:xfrm>
+            <a:off x="631627" y="1534269"/>
+            <a:ext cx="8086939" cy="174575"/>
+          </a:xfrm>
+          <a:prstGeom prst="rect">
+            <a:avLst/>
+          </a:prstGeom>
+          <a:noFill/>
+          <a:ln/>
+        </p:spPr>
+        <p:txBody>
+          <a:bodyPr wrap="square" lIns="0" tIns="0" rIns="0" bIns="0" rtlCol="0" anchor="t"/>
+          <a:lstStyle/>
+          <a:p>
+            <a:pPr algn="l" indent="0" marL="0">
+              <a:lnSpc>
+                <a:spcPts val="1375"/>
+              </a:lnSpc>
+              <a:buNone/>
+            </a:pPr>
+            <a:r>
+              <a:rPr lang="en-US" sz="1100" dirty="0">
+                <a:solidFill>
+                  <a:srgbClr val="1C2833"/>
+                </a:solidFill>
+                <a:latin typeface="Courier New" pitchFamily="34" charset="0"/>
+                <a:ea typeface="Courier New" pitchFamily="34" charset="-122"/>
+                <a:cs typeface="Courier New" pitchFamily="34" charset="-120"/>
+              </a:rPr>
+              <a:t>= 7676.</a:t>
+            </a:r>
+            <a:endParaRPr lang="en-US" sz="1100" dirty="0"/>
+          </a:p>
+        </p:txBody>
+      </p:sp>
+      <p:sp>
+        <p:nvSpPr>
+          <p:cNvPr id="10" name="Text 8"/>
+          <p:cNvSpPr/>
+          <p:nvPr/>
+        </p:nvSpPr>
+        <p:spPr>
+          <a:xfrm>
+            <a:off x="406301" y="1924645"/>
+            <a:ext cx="8498026" cy="426541"/>
+          </a:xfrm>
+          <a:prstGeom prst="rect">
+            <a:avLst/>
+          </a:prstGeom>
+          <a:noFill/>
+          <a:ln/>
+        </p:spPr>
+        <p:txBody>
+          <a:bodyPr wrap="square" lIns="0" tIns="0" rIns="0" bIns="0" rtlCol="0" anchor="t"/>
+          <a:lstStyle/>
+          <a:p>
+            <a:pPr algn="l" indent="0" marL="0">
+              <a:lnSpc>
                 <a:spcPts val="1680"/>
               </a:lnSpc>
               <a:spcBef>
@@ -5874,29 +8179,6 @@
               <a:buNone/>
             </a:pPr>
             <a:r>
-              <a:rPr lang="en-US" sz="1200" dirty="0">
-                <a:solidFill>
-                  <a:srgbClr val="1C2833"/>
-                </a:solidFill>
-                <a:latin typeface="Arial" pitchFamily="34" charset="0"/>
-                <a:ea typeface="Arial" pitchFamily="34" charset="-122"/>
-                <a:cs typeface="Arial" pitchFamily="34" charset="-120"/>
-              </a:rPr>
-              <a:t>– Quick discussion: </a:t>
-            </a:r>
-            <a:pPr algn="l" indent="0" marL="0">
-              <a:lnSpc>
-                <a:spcPts val="1680"/>
-              </a:lnSpc>
-              <a:spcBef>
-                <a:spcPts val="300"/>
-              </a:spcBef>
-              <a:spcAft>
-                <a:spcPts val="300"/>
-              </a:spcAft>
-              <a:buNone/>
-            </a:pPr>
-            <a:r>
               <a:rPr lang="en-US" sz="1200" i="1" dirty="0">
                 <a:solidFill>
                   <a:srgbClr val="1C2833"/>
@@ -5905,53 +8187,7 @@
                 <a:ea typeface="Arial" pitchFamily="34" charset="-122"/>
                 <a:cs typeface="Arial" pitchFamily="34" charset="-120"/>
               </a:rPr>
-              <a:t>"Where in real life does this method save time?"</a:t>
-            </a:r>
-            <a:pPr algn="l" indent="0" marL="0">
-              <a:lnSpc>
-                <a:spcPts val="1680"/>
-              </a:lnSpc>
-              <a:spcBef>
-                <a:spcPts val="300"/>
-              </a:spcBef>
-              <a:spcAft>
-                <a:spcPts val="300"/>
-              </a:spcAft>
-              <a:buNone/>
-            </a:pPr>
-            <a:r>
-              <a:rPr lang="en-US" sz="1200" dirty="0">
-                <a:solidFill>
-                  <a:srgbClr val="1C2833"/>
-                </a:solidFill>
-                <a:latin typeface="Arial" pitchFamily="34" charset="0"/>
-                <a:ea typeface="Arial" pitchFamily="34" charset="-122"/>
-                <a:cs typeface="Arial" pitchFamily="34" charset="-120"/>
-              </a:rPr>
-              <a:t> Most answers will be shop-related. Affirm and add: change-counting, expense splitting, deficit tracking. – Preview Day 9: </a:t>
-            </a:r>
-            <a:pPr algn="l" indent="0" marL="0">
-              <a:lnSpc>
-                <a:spcPts val="1680"/>
-              </a:lnSpc>
-              <a:spcBef>
-                <a:spcPts val="300"/>
-              </a:spcBef>
-              <a:spcAft>
-                <a:spcPts val="300"/>
-              </a:spcAft>
-              <a:buNone/>
-            </a:pPr>
-            <a:r>
-              <a:rPr lang="en-US" sz="1200" i="1" dirty="0">
-                <a:solidFill>
-                  <a:srgbClr val="1C2833"/>
-                </a:solidFill>
-                <a:latin typeface="Arial" pitchFamily="34" charset="0"/>
-                <a:ea typeface="Arial" pitchFamily="34" charset="-122"/>
-                <a:cs typeface="Arial" pitchFamily="34" charset="-120"/>
-              </a:rPr>
-              <a:t>"Tomorrow — speed test, both methods, head-to-head."</a:t>
+              <a:t>"We pick a base that's larger than the subtrahend (1000 &gt; 567 here). We subtract that base from the minuend (8243 − 1000 = 7243; easy). Then we add the complement (433). Done."</a:t>
             </a:r>
             <a:endParaRPr lang="en-US" sz="1200" dirty="0"/>
           </a:p>
@@ -5959,7 +8195,7 @@
       </p:sp>
       <p:sp>
         <p:nvSpPr>
-          <p:cNvPr id="5" name="Text 3"/>
+          <p:cNvPr id="11" name="Text 9"/>
           <p:cNvSpPr/>
           <p:nvPr/>
         </p:nvSpPr>
@@ -6109,7 +8345,7 @@
                 <a:ea typeface="Georgia" pitchFamily="34" charset="-122"/>
                 <a:cs typeface="Georgia" pitchFamily="34" charset="-120"/>
               </a:rPr>
-              <a:t>Student-facing content</a:t>
+              <a:t>Core (15 min) — Beyond clean bases (cont.)</a:t>
             </a:r>
             <a:endParaRPr lang="en-US" sz="1800" dirty="0"/>
           </a:p>
@@ -6123,8 +8359,122 @@
         </p:nvSpPr>
         <p:spPr>
           <a:xfrm>
-            <a:off x="406301" y="883593"/>
-            <a:ext cx="8331398" cy="2514600"/>
+            <a:off x="406301" y="870942"/>
+            <a:ext cx="8498026" cy="213271"/>
+          </a:xfrm>
+          <a:prstGeom prst="rect">
+            <a:avLst/>
+          </a:prstGeom>
+          <a:noFill/>
+          <a:ln/>
+        </p:spPr>
+        <p:txBody>
+          <a:bodyPr wrap="square" lIns="0" tIns="0" rIns="0" bIns="0" rtlCol="0" anchor="t"/>
+          <a:lstStyle/>
+          <a:p>
+            <a:pPr algn="l" indent="0" marL="0">
+              <a:lnSpc>
+                <a:spcPts val="1680"/>
+              </a:lnSpc>
+              <a:spcBef>
+                <a:spcPts val="300"/>
+              </a:spcBef>
+              <a:spcAft>
+                <a:spcPts val="300"/>
+              </a:spcAft>
+              <a:buNone/>
+            </a:pPr>
+            <a:r>
+              <a:rPr lang="en-US" sz="1200" dirty="0">
+                <a:solidFill>
+                  <a:srgbClr val="1C2833"/>
+                </a:solidFill>
+                <a:latin typeface="Arial" pitchFamily="34" charset="0"/>
+                <a:ea typeface="Arial" pitchFamily="34" charset="-122"/>
+                <a:cs typeface="Arial" pitchFamily="34" charset="-120"/>
+              </a:rPr>
+              <a:t>Verify: 8243 − 567 = 7676 by standard borrowing. ✓</a:t>
+            </a:r>
+            <a:endParaRPr lang="en-US" sz="1200" dirty="0"/>
+          </a:p>
+        </p:txBody>
+      </p:sp>
+      <p:sp>
+        <p:nvSpPr>
+          <p:cNvPr id="5" name="Text 3"/>
+          <p:cNvSpPr/>
+          <p:nvPr/>
+        </p:nvSpPr>
+        <p:spPr>
+          <a:xfrm>
+            <a:off x="634901" y="1173063"/>
+            <a:ext cx="8102798" cy="281880"/>
+          </a:xfrm>
+          <a:prstGeom prst="rect">
+            <a:avLst/>
+          </a:prstGeom>
+          <a:noFill/>
+          <a:ln/>
+        </p:spPr>
+        <p:txBody>
+          <a:bodyPr wrap="square" lIns="0" tIns="0" rIns="0" bIns="0" rtlCol="0" anchor="t"/>
+          <a:lstStyle/>
+          <a:p>
+            <a:pPr algn="l" marL="342900" indent="-342900">
+              <a:lnSpc>
+                <a:spcPts val="1620"/>
+              </a:lnSpc>
+              <a:spcAft>
+                <a:spcPts val="300"/>
+              </a:spcAft>
+              <a:buSzPct val="100000"/>
+              <a:buChar char="•"/>
+            </a:pPr>
+            <a:r>
+              <a:rPr lang="en-US" sz="1200" b="1" dirty="0">
+                <a:solidFill>
+                  <a:srgbClr val="1C2833"/>
+                </a:solidFill>
+                <a:latin typeface="Arial" pitchFamily="34" charset="0"/>
+                <a:ea typeface="Arial" pitchFamily="34" charset="-122"/>
+                <a:cs typeface="Arial" pitchFamily="34" charset="-120"/>
+              </a:rPr>
+              <a:t>Why does this work?</a:t>
+            </a:r>
+            <a:pPr algn="l" indent="0" marL="0">
+              <a:lnSpc>
+                <a:spcPts val="1620"/>
+              </a:lnSpc>
+              <a:spcAft>
+                <a:spcPts val="300"/>
+              </a:spcAft>
+              <a:buNone/>
+            </a:pPr>
+            <a:r>
+              <a:rPr lang="en-US" sz="1200" dirty="0">
+                <a:solidFill>
+                  <a:srgbClr val="1C2833"/>
+                </a:solidFill>
+                <a:latin typeface="Arial" pitchFamily="34" charset="0"/>
+                <a:ea typeface="Arial" pitchFamily="34" charset="-122"/>
+                <a:cs typeface="Arial" pitchFamily="34" charset="-120"/>
+              </a:rPr>
+              <a:t> Algebra:</a:t>
+            </a:r>
+            <a:endParaRPr lang="en-US" sz="1200" dirty="0"/>
+          </a:p>
+        </p:txBody>
+      </p:sp>
+      <p:sp>
+        <p:nvSpPr>
+          <p:cNvPr id="6" name="Text 4"/>
+          <p:cNvSpPr/>
+          <p:nvPr/>
+        </p:nvSpPr>
+        <p:spPr>
+          <a:xfrm>
+            <a:off x="406301" y="1556445"/>
+            <a:ext cx="8331398" cy="428476"/>
           </a:xfrm>
           <a:prstGeom prst="rect">
             <a:avLst/>
@@ -6147,22 +8497,22 @@
       </p:sp>
       <p:sp>
         <p:nvSpPr>
-          <p:cNvPr id="5" name="Shape 3"/>
-          <p:cNvSpPr/>
-          <p:nvPr/>
-        </p:nvSpPr>
-        <p:spPr>
-          <a:xfrm>
-            <a:off x="434876" y="883593"/>
-            <a:ext cx="0" cy="2514600"/>
+          <p:cNvPr id="7" name="Shape 5"/>
+          <p:cNvSpPr/>
+          <p:nvPr/>
+        </p:nvSpPr>
+        <p:spPr>
+          <a:xfrm>
+            <a:off x="430113" y="1556445"/>
+            <a:ext cx="0" cy="428476"/>
           </a:xfrm>
           <a:prstGeom prst="line">
             <a:avLst/>
           </a:prstGeom>
           <a:noFill/>
-          <a:ln w="57150">
+          <a:ln w="47625">
             <a:solidFill>
-              <a:srgbClr val="FE4447"/>
+              <a:srgbClr val="277884"/>
             </a:solidFill>
             <a:prstDash val="solid"/>
           </a:ln>
@@ -6170,14 +8520,14 @@
       </p:sp>
       <p:sp>
         <p:nvSpPr>
-          <p:cNvPr id="6" name="Text 4"/>
-          <p:cNvSpPr/>
-          <p:nvPr/>
-        </p:nvSpPr>
-        <p:spPr>
-          <a:xfrm>
-            <a:off x="692051" y="1074093"/>
-            <a:ext cx="7973389" cy="230981"/>
+          <p:cNvPr id="8" name="Text 6"/>
+          <p:cNvSpPr/>
+          <p:nvPr/>
+        </p:nvSpPr>
+        <p:spPr>
+          <a:xfrm>
+            <a:off x="631627" y="1683395"/>
+            <a:ext cx="8086939" cy="174575"/>
           </a:xfrm>
           <a:prstGeom prst="rect">
             <a:avLst/>
@@ -6191,665 +8541,28 @@
           <a:p>
             <a:pPr algn="l" indent="0" marL="0">
               <a:lnSpc>
-                <a:spcPts val="1820"/>
-              </a:lnSpc>
-              <a:spcBef>
-                <a:spcPts val="300"/>
-              </a:spcBef>
-              <a:spcAft>
-                <a:spcPts val="300"/>
-              </a:spcAft>
-              <a:buNone/>
-            </a:pPr>
-            <a:r>
-              <a:rPr lang="en-US" sz="1300" b="1" i="1" dirty="0">
-                <a:solidFill>
-                  <a:srgbClr val="1C2833"/>
-                </a:solidFill>
-                <a:latin typeface="Georgia" pitchFamily="34" charset="0"/>
-                <a:ea typeface="Georgia" pitchFamily="34" charset="-122"/>
-                <a:cs typeface="Georgia" pitchFamily="34" charset="-120"/>
-              </a:rPr>
-              <a:t>General Subtraction with Complements</a:t>
-            </a:r>
-            <a:endParaRPr lang="en-US" sz="1300" dirty="0"/>
-          </a:p>
-        </p:txBody>
-      </p:sp>
-      <p:sp>
-        <p:nvSpPr>
-          <p:cNvPr id="7" name="Text 5"/>
-          <p:cNvSpPr/>
-          <p:nvPr/>
-        </p:nvSpPr>
-        <p:spPr>
-          <a:xfrm>
-            <a:off x="692051" y="1343174"/>
-            <a:ext cx="7973389" cy="250031"/>
-          </a:xfrm>
-          <a:prstGeom prst="rect">
-            <a:avLst/>
-          </a:prstGeom>
-          <a:noFill/>
-          <a:ln/>
-        </p:spPr>
-        <p:txBody>
-          <a:bodyPr wrap="square" lIns="0" tIns="0" rIns="0" bIns="0" rtlCol="0" anchor="t"/>
-          <a:lstStyle/>
-          <a:p>
-            <a:pPr algn="l" indent="0" marL="0">
-              <a:lnSpc>
-                <a:spcPts val="1820"/>
-              </a:lnSpc>
-              <a:spcBef>
-                <a:spcPts val="300"/>
-              </a:spcBef>
-              <a:spcAft>
-                <a:spcPts val="300"/>
-              </a:spcAft>
-              <a:buNone/>
-            </a:pPr>
-            <a:r>
-              <a:rPr lang="en-US" sz="1300" dirty="0">
-                <a:solidFill>
-                  <a:srgbClr val="1C2833"/>
-                </a:solidFill>
-                <a:latin typeface="Georgia" pitchFamily="34" charset="0"/>
-                <a:ea typeface="Georgia" pitchFamily="34" charset="-122"/>
-                <a:cs typeface="Georgia" pitchFamily="34" charset="-120"/>
-              </a:rPr>
-              <a:t>To compute </a:t>
-            </a:r>
-            <a:pPr algn="l" indent="0" marL="0">
-              <a:lnSpc>
-                <a:spcPts val="1820"/>
-              </a:lnSpc>
-              <a:spcBef>
-                <a:spcPts val="300"/>
-              </a:spcBef>
-              <a:spcAft>
-                <a:spcPts val="300"/>
-              </a:spcAft>
-              <a:buNone/>
-            </a:pPr>
-            <a:r>
-              <a:rPr lang="en-US" sz="1300" i="1" dirty="0">
-                <a:solidFill>
-                  <a:srgbClr val="1C2833"/>
-                </a:solidFill>
-                <a:latin typeface="Georgia" pitchFamily="34" charset="0"/>
-                <a:ea typeface="Georgia" pitchFamily="34" charset="-122"/>
-                <a:cs typeface="Georgia" pitchFamily="34" charset="-120"/>
-              </a:rPr>
-              <a:t>M − S</a:t>
-            </a:r>
-            <a:pPr algn="l" indent="0" marL="0">
-              <a:lnSpc>
-                <a:spcPts val="1820"/>
-              </a:lnSpc>
-              <a:spcBef>
-                <a:spcPts val="300"/>
-              </a:spcBef>
-              <a:spcAft>
-                <a:spcPts val="300"/>
-              </a:spcAft>
-              <a:buNone/>
-            </a:pPr>
-            <a:r>
-              <a:rPr lang="en-US" sz="1300" dirty="0">
-                <a:solidFill>
-                  <a:srgbClr val="1C2833"/>
-                </a:solidFill>
-                <a:latin typeface="Georgia" pitchFamily="34" charset="0"/>
-                <a:ea typeface="Georgia" pitchFamily="34" charset="-122"/>
-                <a:cs typeface="Georgia" pitchFamily="34" charset="-120"/>
-              </a:rPr>
-              <a:t>:</a:t>
-            </a:r>
-            <a:endParaRPr lang="en-US" sz="1300" dirty="0"/>
-          </a:p>
-        </p:txBody>
-      </p:sp>
-      <p:sp>
-        <p:nvSpPr>
-          <p:cNvPr id="8" name="Text 6"/>
-          <p:cNvSpPr/>
-          <p:nvPr/>
-        </p:nvSpPr>
-        <p:spPr>
-          <a:xfrm>
-            <a:off x="692051" y="1631305"/>
-            <a:ext cx="7973389" cy="750094"/>
-          </a:xfrm>
-          <a:prstGeom prst="rect">
-            <a:avLst/>
-          </a:prstGeom>
-          <a:noFill/>
-          <a:ln/>
-        </p:spPr>
-        <p:txBody>
-          <a:bodyPr wrap="square" lIns="0" tIns="0" rIns="0" bIns="0" rtlCol="0" anchor="t"/>
-          <a:lstStyle/>
-          <a:p>
-            <a:pPr algn="l" indent="0" marL="0">
-              <a:lnSpc>
-                <a:spcPts val="1820"/>
-              </a:lnSpc>
-              <a:spcBef>
-                <a:spcPts val="300"/>
-              </a:spcBef>
-              <a:spcAft>
-                <a:spcPts val="300"/>
-              </a:spcAft>
-              <a:buNone/>
-            </a:pPr>
-            <a:r>
-              <a:rPr lang="en-US" sz="1300" dirty="0">
-                <a:solidFill>
-                  <a:srgbClr val="1C2833"/>
-                </a:solidFill>
-                <a:latin typeface="Georgia" pitchFamily="34" charset="0"/>
-                <a:ea typeface="Georgia" pitchFamily="34" charset="-122"/>
-                <a:cs typeface="Georgia" pitchFamily="34" charset="-120"/>
-              </a:rPr>
-              <a:t>1. Pick a base </a:t>
-            </a:r>
-            <a:pPr algn="l" indent="0" marL="0">
-              <a:lnSpc>
-                <a:spcPts val="1820"/>
-              </a:lnSpc>
-              <a:spcBef>
-                <a:spcPts val="300"/>
-              </a:spcBef>
-              <a:spcAft>
-                <a:spcPts val="300"/>
-              </a:spcAft>
-              <a:buNone/>
-            </a:pPr>
-            <a:r>
-              <a:rPr lang="en-US" sz="1300" i="1" dirty="0">
-                <a:solidFill>
-                  <a:srgbClr val="1C2833"/>
-                </a:solidFill>
-                <a:latin typeface="Georgia" pitchFamily="34" charset="0"/>
-                <a:ea typeface="Georgia" pitchFamily="34" charset="-122"/>
-                <a:cs typeface="Georgia" pitchFamily="34" charset="-120"/>
-              </a:rPr>
-              <a:t>B</a:t>
-            </a:r>
-            <a:pPr algn="l" indent="0" marL="0">
-              <a:lnSpc>
-                <a:spcPts val="1820"/>
-              </a:lnSpc>
-              <a:spcBef>
-                <a:spcPts val="300"/>
-              </a:spcBef>
-              <a:spcAft>
-                <a:spcPts val="300"/>
-              </a:spcAft>
-              <a:buNone/>
-            </a:pPr>
-            <a:r>
-              <a:rPr lang="en-US" sz="1300" dirty="0">
-                <a:solidFill>
-                  <a:srgbClr val="1C2833"/>
-                </a:solidFill>
-                <a:latin typeface="Georgia" pitchFamily="34" charset="0"/>
-                <a:ea typeface="Georgia" pitchFamily="34" charset="-122"/>
-                <a:cs typeface="Georgia" pitchFamily="34" charset="-120"/>
-              </a:rPr>
-              <a:t> such that </a:t>
-            </a:r>
-            <a:pPr algn="l" indent="0" marL="0">
-              <a:lnSpc>
-                <a:spcPts val="1820"/>
-              </a:lnSpc>
-              <a:spcBef>
-                <a:spcPts val="300"/>
-              </a:spcBef>
-              <a:spcAft>
-                <a:spcPts val="300"/>
-              </a:spcAft>
-              <a:buNone/>
-            </a:pPr>
-            <a:r>
-              <a:rPr lang="en-US" sz="1300" i="1" dirty="0">
-                <a:solidFill>
-                  <a:srgbClr val="1C2833"/>
-                </a:solidFill>
-                <a:latin typeface="Georgia" pitchFamily="34" charset="0"/>
-                <a:ea typeface="Georgia" pitchFamily="34" charset="-122"/>
-                <a:cs typeface="Georgia" pitchFamily="34" charset="-120"/>
-              </a:rPr>
-              <a:t>B &gt; S</a:t>
-            </a:r>
-            <a:pPr algn="l" indent="0" marL="0">
-              <a:lnSpc>
-                <a:spcPts val="1820"/>
-              </a:lnSpc>
-              <a:spcBef>
-                <a:spcPts val="300"/>
-              </a:spcBef>
-              <a:spcAft>
-                <a:spcPts val="300"/>
-              </a:spcAft>
-              <a:buNone/>
-            </a:pPr>
-            <a:r>
-              <a:rPr lang="en-US" sz="1300" dirty="0">
-                <a:solidFill>
-                  <a:srgbClr val="1C2833"/>
-                </a:solidFill>
-                <a:latin typeface="Georgia" pitchFamily="34" charset="0"/>
-                <a:ea typeface="Georgia" pitchFamily="34" charset="-122"/>
-                <a:cs typeface="Georgia" pitchFamily="34" charset="-120"/>
-              </a:rPr>
-              <a:t> and </a:t>
-            </a:r>
-            <a:pPr algn="l" indent="0" marL="0">
-              <a:lnSpc>
-                <a:spcPts val="1820"/>
-              </a:lnSpc>
-              <a:spcBef>
-                <a:spcPts val="300"/>
-              </a:spcBef>
-              <a:spcAft>
-                <a:spcPts val="300"/>
-              </a:spcAft>
-              <a:buNone/>
-            </a:pPr>
-            <a:r>
-              <a:rPr lang="en-US" sz="1300" i="1" dirty="0">
-                <a:solidFill>
-                  <a:srgbClr val="1C2833"/>
-                </a:solidFill>
-                <a:latin typeface="Georgia" pitchFamily="34" charset="0"/>
-                <a:ea typeface="Georgia" pitchFamily="34" charset="-122"/>
-                <a:cs typeface="Georgia" pitchFamily="34" charset="-120"/>
-              </a:rPr>
-              <a:t>B</a:t>
-            </a:r>
-            <a:pPr algn="l" indent="0" marL="0">
-              <a:lnSpc>
-                <a:spcPts val="1820"/>
-              </a:lnSpc>
-              <a:spcBef>
-                <a:spcPts val="300"/>
-              </a:spcBef>
-              <a:spcAft>
-                <a:spcPts val="300"/>
-              </a:spcAft>
-              <a:buNone/>
-            </a:pPr>
-            <a:r>
-              <a:rPr lang="en-US" sz="1300" dirty="0">
-                <a:solidFill>
-                  <a:srgbClr val="1C2833"/>
-                </a:solidFill>
-                <a:latin typeface="Georgia" pitchFamily="34" charset="0"/>
-                <a:ea typeface="Georgia" pitchFamily="34" charset="-122"/>
-                <a:cs typeface="Georgia" pitchFamily="34" charset="-120"/>
-              </a:rPr>
-              <a:t> is a power of 10 (so 100, 1000, 10 000, ...). 2. Compute the complement of S to B (using Nikhilam) — call it C. 3. Compute </a:t>
-            </a:r>
-            <a:pPr algn="l" indent="0" marL="0">
-              <a:lnSpc>
-                <a:spcPts val="1820"/>
-              </a:lnSpc>
-              <a:spcBef>
-                <a:spcPts val="300"/>
-              </a:spcBef>
-              <a:spcAft>
-                <a:spcPts val="300"/>
-              </a:spcAft>
-              <a:buNone/>
-            </a:pPr>
-            <a:r>
-              <a:rPr lang="en-US" sz="1300" i="1" dirty="0">
-                <a:solidFill>
-                  <a:srgbClr val="1C2833"/>
-                </a:solidFill>
-                <a:latin typeface="Georgia" pitchFamily="34" charset="0"/>
-                <a:ea typeface="Georgia" pitchFamily="34" charset="-122"/>
-                <a:cs typeface="Georgia" pitchFamily="34" charset="-120"/>
-              </a:rPr>
-              <a:t>M − B</a:t>
-            </a:r>
-            <a:pPr algn="l" indent="0" marL="0">
-              <a:lnSpc>
-                <a:spcPts val="1820"/>
-              </a:lnSpc>
-              <a:spcBef>
-                <a:spcPts val="300"/>
-              </a:spcBef>
-              <a:spcAft>
-                <a:spcPts val="300"/>
-              </a:spcAft>
-              <a:buNone/>
-            </a:pPr>
-            <a:r>
-              <a:rPr lang="en-US" sz="1300" dirty="0">
-                <a:solidFill>
-                  <a:srgbClr val="1C2833"/>
-                </a:solidFill>
-                <a:latin typeface="Georgia" pitchFamily="34" charset="0"/>
-                <a:ea typeface="Georgia" pitchFamily="34" charset="-122"/>
-                <a:cs typeface="Georgia" pitchFamily="34" charset="-120"/>
-              </a:rPr>
-              <a:t> (which is easy, since B is a round number). 4. Answer = </a:t>
-            </a:r>
-            <a:pPr algn="l" indent="0" marL="0">
-              <a:lnSpc>
-                <a:spcPts val="1820"/>
-              </a:lnSpc>
-              <a:spcBef>
-                <a:spcPts val="300"/>
-              </a:spcBef>
-              <a:spcAft>
-                <a:spcPts val="300"/>
-              </a:spcAft>
-              <a:buNone/>
-            </a:pPr>
-            <a:r>
-              <a:rPr lang="en-US" sz="1300" i="1" dirty="0">
-                <a:solidFill>
-                  <a:srgbClr val="1C2833"/>
-                </a:solidFill>
-                <a:latin typeface="Georgia" pitchFamily="34" charset="0"/>
-                <a:ea typeface="Georgia" pitchFamily="34" charset="-122"/>
-                <a:cs typeface="Georgia" pitchFamily="34" charset="-120"/>
-              </a:rPr>
-              <a:t>(M − B) + C</a:t>
-            </a:r>
-            <a:pPr algn="l" indent="0" marL="0">
-              <a:lnSpc>
-                <a:spcPts val="1820"/>
-              </a:lnSpc>
-              <a:spcBef>
-                <a:spcPts val="300"/>
-              </a:spcBef>
-              <a:spcAft>
-                <a:spcPts val="300"/>
-              </a:spcAft>
-              <a:buNone/>
-            </a:pPr>
-            <a:r>
-              <a:rPr lang="en-US" sz="1300" dirty="0">
-                <a:solidFill>
-                  <a:srgbClr val="1C2833"/>
-                </a:solidFill>
-                <a:latin typeface="Georgia" pitchFamily="34" charset="0"/>
-                <a:ea typeface="Georgia" pitchFamily="34" charset="-122"/>
-                <a:cs typeface="Georgia" pitchFamily="34" charset="-120"/>
-              </a:rPr>
-              <a:t>.</a:t>
-            </a:r>
-            <a:endParaRPr lang="en-US" sz="1300" dirty="0"/>
+                <a:spcPts val="1375"/>
+              </a:lnSpc>
+              <a:buNone/>
+            </a:pPr>
+            <a:r>
+              <a:rPr lang="en-US" sz="1100" dirty="0">
+                <a:solidFill>
+                  <a:srgbClr val="1C2833"/>
+                </a:solidFill>
+                <a:latin typeface="Courier New" pitchFamily="34" charset="0"/>
+                <a:ea typeface="Courier New" pitchFamily="34" charset="-122"/>
+                <a:cs typeface="Courier New" pitchFamily="34" charset="-120"/>
+              </a:rPr>
+              <a:t>M − S = M − (B − (B − S)) = M − B + complement(S to B)</a:t>
+            </a:r>
+            <a:endParaRPr lang="en-US" sz="1100" dirty="0"/>
           </a:p>
         </p:txBody>
       </p:sp>
       <p:sp>
         <p:nvSpPr>
           <p:cNvPr id="9" name="Text 7"/>
-          <p:cNvSpPr/>
-          <p:nvPr/>
-        </p:nvSpPr>
-        <p:spPr>
-          <a:xfrm>
-            <a:off x="692051" y="2419499"/>
-            <a:ext cx="7973389" cy="230981"/>
-          </a:xfrm>
-          <a:prstGeom prst="rect">
-            <a:avLst/>
-          </a:prstGeom>
-          <a:noFill/>
-          <a:ln/>
-        </p:spPr>
-        <p:txBody>
-          <a:bodyPr wrap="square" lIns="0" tIns="0" rIns="0" bIns="0" rtlCol="0" anchor="t"/>
-          <a:lstStyle/>
-          <a:p>
-            <a:pPr algn="l" indent="0" marL="0">
-              <a:lnSpc>
-                <a:spcPts val="1820"/>
-              </a:lnSpc>
-              <a:spcBef>
-                <a:spcPts val="300"/>
-              </a:spcBef>
-              <a:spcAft>
-                <a:spcPts val="300"/>
-              </a:spcAft>
-              <a:buNone/>
-            </a:pPr>
-            <a:r>
-              <a:rPr lang="en-US" sz="1300" dirty="0">
-                <a:solidFill>
-                  <a:srgbClr val="1C2833"/>
-                </a:solidFill>
-                <a:latin typeface="Georgia" pitchFamily="34" charset="0"/>
-                <a:ea typeface="Georgia" pitchFamily="34" charset="-122"/>
-                <a:cs typeface="Georgia" pitchFamily="34" charset="-120"/>
-              </a:rPr>
-              <a:t>Algebraic identity: </a:t>
-            </a:r>
-            <a:pPr algn="l" indent="0" marL="0">
-              <a:lnSpc>
-                <a:spcPts val="1820"/>
-              </a:lnSpc>
-              <a:spcBef>
-                <a:spcPts val="300"/>
-              </a:spcBef>
-              <a:spcAft>
-                <a:spcPts val="300"/>
-              </a:spcAft>
-              <a:buNone/>
-            </a:pPr>
-            <a:r>
-              <a:rPr lang="en-US" sz="1300" b="1" i="1" dirty="0">
-                <a:solidFill>
-                  <a:srgbClr val="1C2833"/>
-                </a:solidFill>
-                <a:latin typeface="Georgia" pitchFamily="34" charset="0"/>
-                <a:ea typeface="Georgia" pitchFamily="34" charset="-122"/>
-                <a:cs typeface="Georgia" pitchFamily="34" charset="-120"/>
-              </a:rPr>
-              <a:t>M − S = (M − B) + (B − S)</a:t>
-            </a:r>
-            <a:endParaRPr lang="en-US" sz="1300" dirty="0"/>
-          </a:p>
-        </p:txBody>
-      </p:sp>
-      <p:sp>
-        <p:nvSpPr>
-          <p:cNvPr id="10" name="Text 8"/>
-          <p:cNvSpPr/>
-          <p:nvPr/>
-        </p:nvSpPr>
-        <p:spPr>
-          <a:xfrm>
-            <a:off x="692051" y="2688580"/>
-            <a:ext cx="7973389" cy="250031"/>
-          </a:xfrm>
-          <a:prstGeom prst="rect">
-            <a:avLst/>
-          </a:prstGeom>
-          <a:noFill/>
-          <a:ln/>
-        </p:spPr>
-        <p:txBody>
-          <a:bodyPr wrap="square" lIns="0" tIns="0" rIns="0" bIns="0" rtlCol="0" anchor="t"/>
-          <a:lstStyle/>
-          <a:p>
-            <a:pPr algn="l" indent="0" marL="0">
-              <a:lnSpc>
-                <a:spcPts val="1820"/>
-              </a:lnSpc>
-              <a:spcBef>
-                <a:spcPts val="300"/>
-              </a:spcBef>
-              <a:spcAft>
-                <a:spcPts val="300"/>
-              </a:spcAft>
-              <a:buNone/>
-            </a:pPr>
-            <a:r>
-              <a:rPr lang="en-US" sz="1300" dirty="0">
-                <a:solidFill>
-                  <a:srgbClr val="1C2833"/>
-                </a:solidFill>
-                <a:latin typeface="Georgia" pitchFamily="34" charset="0"/>
-                <a:ea typeface="Georgia" pitchFamily="34" charset="-122"/>
-                <a:cs typeface="Georgia" pitchFamily="34" charset="-120"/>
-              </a:rPr>
-              <a:t>Verify by checking: </a:t>
-            </a:r>
-            <a:pPr algn="l" indent="0" marL="0">
-              <a:lnSpc>
-                <a:spcPts val="1820"/>
-              </a:lnSpc>
-              <a:spcBef>
-                <a:spcPts val="300"/>
-              </a:spcBef>
-              <a:spcAft>
-                <a:spcPts val="300"/>
-              </a:spcAft>
-              <a:buNone/>
-            </a:pPr>
-            <a:r>
-              <a:rPr lang="en-US" sz="1300" i="1" dirty="0">
-                <a:solidFill>
-                  <a:srgbClr val="1C2833"/>
-                </a:solidFill>
-                <a:latin typeface="Georgia" pitchFamily="34" charset="0"/>
-                <a:ea typeface="Georgia" pitchFamily="34" charset="-122"/>
-                <a:cs typeface="Georgia" pitchFamily="34" charset="-120"/>
-              </a:rPr>
-              <a:t>M − S</a:t>
-            </a:r>
-            <a:pPr algn="l" indent="0" marL="0">
-              <a:lnSpc>
-                <a:spcPts val="1820"/>
-              </a:lnSpc>
-              <a:spcBef>
-                <a:spcPts val="300"/>
-              </a:spcBef>
-              <a:spcAft>
-                <a:spcPts val="300"/>
-              </a:spcAft>
-              <a:buNone/>
-            </a:pPr>
-            <a:r>
-              <a:rPr lang="en-US" sz="1300" dirty="0">
-                <a:solidFill>
-                  <a:srgbClr val="1C2833"/>
-                </a:solidFill>
-                <a:latin typeface="Georgia" pitchFamily="34" charset="0"/>
-                <a:ea typeface="Georgia" pitchFamily="34" charset="-122"/>
-                <a:cs typeface="Georgia" pitchFamily="34" charset="-120"/>
-              </a:rPr>
-              <a:t> should equal your answer.</a:t>
-            </a:r>
-            <a:endParaRPr lang="en-US" sz="1300" dirty="0"/>
-          </a:p>
-        </p:txBody>
-      </p:sp>
-      <p:sp>
-        <p:nvSpPr>
-          <p:cNvPr id="11" name="Text 9"/>
-          <p:cNvSpPr/>
-          <p:nvPr/>
-        </p:nvSpPr>
-        <p:spPr>
-          <a:xfrm>
-            <a:off x="692051" y="2976711"/>
-            <a:ext cx="7973389" cy="230981"/>
-          </a:xfrm>
-          <a:prstGeom prst="rect">
-            <a:avLst/>
-          </a:prstGeom>
-          <a:noFill/>
-          <a:ln/>
-        </p:spPr>
-        <p:txBody>
-          <a:bodyPr wrap="square" lIns="0" tIns="0" rIns="0" bIns="0" rtlCol="0" anchor="t"/>
-          <a:lstStyle/>
-          <a:p>
-            <a:pPr algn="l" indent="0" marL="0">
-              <a:lnSpc>
-                <a:spcPts val="1820"/>
-              </a:lnSpc>
-              <a:spcBef>
-                <a:spcPts val="300"/>
-              </a:spcBef>
-              <a:spcAft>
-                <a:spcPts val="300"/>
-              </a:spcAft>
-              <a:buNone/>
-            </a:pPr>
-            <a:r>
-              <a:rPr lang="en-US" sz="1300" dirty="0">
-                <a:solidFill>
-                  <a:srgbClr val="1C2833"/>
-                </a:solidFill>
-                <a:latin typeface="Georgia" pitchFamily="34" charset="0"/>
-                <a:ea typeface="Georgia" pitchFamily="34" charset="-122"/>
-                <a:cs typeface="Georgia" pitchFamily="34" charset="-120"/>
-              </a:rPr>
-              <a:t>Example: 8243 − 567 = (8243 − 1000) + 433 = 7243 + 433 = </a:t>
-            </a:r>
-            <a:pPr algn="l" indent="0" marL="0">
-              <a:lnSpc>
-                <a:spcPts val="1820"/>
-              </a:lnSpc>
-              <a:spcBef>
-                <a:spcPts val="300"/>
-              </a:spcBef>
-              <a:spcAft>
-                <a:spcPts val="300"/>
-              </a:spcAft>
-              <a:buNone/>
-            </a:pPr>
-            <a:r>
-              <a:rPr lang="en-US" sz="1300" b="1" i="1" dirty="0">
-                <a:solidFill>
-                  <a:srgbClr val="1C2833"/>
-                </a:solidFill>
-                <a:latin typeface="Georgia" pitchFamily="34" charset="0"/>
-                <a:ea typeface="Georgia" pitchFamily="34" charset="-122"/>
-                <a:cs typeface="Georgia" pitchFamily="34" charset="-120"/>
-              </a:rPr>
-              <a:t>7676</a:t>
-            </a:r>
-            <a:pPr algn="l" indent="0" marL="0">
-              <a:lnSpc>
-                <a:spcPts val="1820"/>
-              </a:lnSpc>
-              <a:spcBef>
-                <a:spcPts val="300"/>
-              </a:spcBef>
-              <a:spcAft>
-                <a:spcPts val="300"/>
-              </a:spcAft>
-              <a:buNone/>
-            </a:pPr>
-            <a:r>
-              <a:rPr lang="en-US" sz="1300" dirty="0">
-                <a:solidFill>
-                  <a:srgbClr val="1C2833"/>
-                </a:solidFill>
-                <a:latin typeface="Georgia" pitchFamily="34" charset="0"/>
-                <a:ea typeface="Georgia" pitchFamily="34" charset="-122"/>
-                <a:cs typeface="Georgia" pitchFamily="34" charset="-120"/>
-              </a:rPr>
-              <a:t>.</a:t>
-            </a:r>
-            <a:endParaRPr lang="en-US" sz="1300" dirty="0"/>
-          </a:p>
-        </p:txBody>
-      </p:sp>
-      <p:sp>
-        <p:nvSpPr>
-          <p:cNvPr id="12" name="Text 10"/>
           <p:cNvSpPr/>
           <p:nvPr/>
         </p:nvSpPr>
@@ -6999,7 +8712,7 @@
                 <a:ea typeface="Georgia" pitchFamily="34" charset="-122"/>
                 <a:cs typeface="Georgia" pitchFamily="34" charset="-120"/>
               </a:rPr>
-              <a:t>Homework</a:t>
+              <a:t>Core (15 min) — Beyond clean bases (cont.)</a:t>
             </a:r>
             <a:endParaRPr lang="en-US" sz="1800" dirty="0"/>
           </a:p>
@@ -7014,7 +8727,7 @@
         <p:spPr>
           <a:xfrm>
             <a:off x="406301" y="870942"/>
-            <a:ext cx="8498026" cy="639812"/>
+            <a:ext cx="8498026" cy="222796"/>
           </a:xfrm>
           <a:prstGeom prst="rect">
             <a:avLst/>
@@ -7039,15 +8752,61 @@
               <a:buNone/>
             </a:pPr>
             <a:r>
-              <a:rPr lang="en-US" sz="1200" dirty="0">
-                <a:solidFill>
-                  <a:srgbClr val="1C2833"/>
-                </a:solidFill>
-                <a:latin typeface="Arial" pitchFamily="34" charset="0"/>
-                <a:ea typeface="Arial" pitchFamily="34" charset="-122"/>
-                <a:cs typeface="Arial" pitchFamily="34" charset="-120"/>
-              </a:rPr>
-              <a:t>– Solve 6 mixed subtractions using the combined method:   – 7234 − 587 (base 1000)   – 9 612 − 3 458 (base 10 000)   – 5 100 − 67 (base 100)   – 13 405 − 2 850 (base 10 000)   – 800 − 39 (base 100)   – 25 000 − 4 999 (base 10 000) – For each, show the base, the complement, and the final answer.</a:t>
+              <a:rPr lang="en-US" sz="1200" i="1" dirty="0">
+                <a:solidFill>
+                  <a:srgbClr val="1C2833"/>
+                </a:solidFill>
+                <a:latin typeface="Arial" pitchFamily="34" charset="0"/>
+                <a:ea typeface="Arial" pitchFamily="34" charset="-122"/>
+                <a:cs typeface="Arial" pitchFamily="34" charset="-120"/>
+              </a:rPr>
+              <a:t>"</a:t>
+            </a:r>
+            <a:pPr algn="l" indent="0" marL="0">
+              <a:lnSpc>
+                <a:spcPts val="1680"/>
+              </a:lnSpc>
+              <a:spcBef>
+                <a:spcPts val="300"/>
+              </a:spcBef>
+              <a:spcAft>
+                <a:spcPts val="300"/>
+              </a:spcAft>
+              <a:buNone/>
+            </a:pPr>
+            <a:r>
+              <a:rPr lang="en-US" sz="1200" i="1" dirty="0">
+                <a:solidFill>
+                  <a:srgbClr val="1C2833"/>
+                </a:solidFill>
+                <a:latin typeface="Arial" pitchFamily="34" charset="0"/>
+                <a:ea typeface="Arial" pitchFamily="34" charset="-122"/>
+                <a:cs typeface="Arial" pitchFamily="34" charset="-120"/>
+              </a:rPr>
+              <a:t>B − S</a:t>
+            </a:r>
+            <a:pPr algn="l" indent="0" marL="0">
+              <a:lnSpc>
+                <a:spcPts val="1680"/>
+              </a:lnSpc>
+              <a:spcBef>
+                <a:spcPts val="300"/>
+              </a:spcBef>
+              <a:spcAft>
+                <a:spcPts val="300"/>
+              </a:spcAft>
+              <a:buNone/>
+            </a:pPr>
+            <a:r>
+              <a:rPr lang="en-US" sz="1200" i="1" dirty="0">
+                <a:solidFill>
+                  <a:srgbClr val="1C2833"/>
+                </a:solidFill>
+                <a:latin typeface="Arial" pitchFamily="34" charset="0"/>
+                <a:ea typeface="Arial" pitchFamily="34" charset="-122"/>
+                <a:cs typeface="Arial" pitchFamily="34" charset="-120"/>
+              </a:rPr>
+              <a:t> is the complement of S to base B. Add the complement and subtract B from M."</a:t>
             </a:r>
             <a:endParaRPr lang="en-US" sz="1200" dirty="0"/>
           </a:p>
@@ -7056,6 +8815,100 @@
       <p:sp>
         <p:nvSpPr>
           <p:cNvPr id="5" name="Text 3"/>
+          <p:cNvSpPr/>
+          <p:nvPr/>
+        </p:nvSpPr>
+        <p:spPr>
+          <a:xfrm>
+            <a:off x="634901" y="1182588"/>
+            <a:ext cx="8102798" cy="281880"/>
+          </a:xfrm>
+          <a:prstGeom prst="rect">
+            <a:avLst/>
+          </a:prstGeom>
+          <a:noFill/>
+          <a:ln/>
+        </p:spPr>
+        <p:txBody>
+          <a:bodyPr wrap="square" lIns="0" tIns="0" rIns="0" bIns="0" rtlCol="0" anchor="t"/>
+          <a:lstStyle/>
+          <a:p>
+            <a:pPr algn="l" marL="342900" indent="-342900">
+              <a:lnSpc>
+                <a:spcPts val="1620"/>
+              </a:lnSpc>
+              <a:spcAft>
+                <a:spcPts val="300"/>
+              </a:spcAft>
+              <a:buSzPct val="100000"/>
+              <a:buChar char="•"/>
+            </a:pPr>
+            <a:r>
+              <a:rPr lang="en-US" sz="1200" b="1" dirty="0">
+                <a:solidFill>
+                  <a:srgbClr val="1C2833"/>
+                </a:solidFill>
+                <a:latin typeface="Arial" pitchFamily="34" charset="0"/>
+                <a:ea typeface="Arial" pitchFamily="34" charset="-122"/>
+                <a:cs typeface="Arial" pitchFamily="34" charset="-120"/>
+              </a:rPr>
+              <a:t>Worked examples (class participates):</a:t>
+            </a:r>
+            <a:endParaRPr lang="en-US" sz="1200" dirty="0"/>
+          </a:p>
+        </p:txBody>
+      </p:sp>
+      <p:sp>
+        <p:nvSpPr>
+          <p:cNvPr id="6" name="Text 4"/>
+          <p:cNvSpPr/>
+          <p:nvPr/>
+        </p:nvSpPr>
+        <p:spPr>
+          <a:xfrm>
+            <a:off x="406301" y="1553319"/>
+            <a:ext cx="8498026" cy="213271"/>
+          </a:xfrm>
+          <a:prstGeom prst="rect">
+            <a:avLst/>
+          </a:prstGeom>
+          <a:noFill/>
+          <a:ln/>
+        </p:spPr>
+        <p:txBody>
+          <a:bodyPr wrap="square" lIns="0" tIns="0" rIns="0" bIns="0" rtlCol="0" anchor="t"/>
+          <a:lstStyle/>
+          <a:p>
+            <a:pPr algn="l" indent="0" marL="0">
+              <a:lnSpc>
+                <a:spcPts val="1680"/>
+              </a:lnSpc>
+              <a:spcBef>
+                <a:spcPts val="300"/>
+              </a:spcBef>
+              <a:spcAft>
+                <a:spcPts val="300"/>
+              </a:spcAft>
+              <a:buNone/>
+            </a:pPr>
+            <a:r>
+              <a:rPr lang="en-US" sz="1200" i="1" dirty="0">
+                <a:solidFill>
+                  <a:srgbClr val="1C2833"/>
+                </a:solidFill>
+                <a:latin typeface="Arial" pitchFamily="34" charset="0"/>
+                <a:ea typeface="Arial" pitchFamily="34" charset="-122"/>
+                <a:cs typeface="Arial" pitchFamily="34" charset="-120"/>
+              </a:rPr>
+              <a:t>Each row: Problem · Base B · Complement · M − B · Add · Answer.</a:t>
+            </a:r>
+            <a:endParaRPr lang="en-US" sz="1200" dirty="0"/>
+          </a:p>
+        </p:txBody>
+      </p:sp>
+      <p:sp>
+        <p:nvSpPr>
+          <p:cNvPr id="7" name="Text 5"/>
           <p:cNvSpPr/>
           <p:nvPr/>
         </p:nvSpPr>
